--- a/Unit decks/Unit 02 - Strategy Visioning & Success in Practice (SiP).pptx
+++ b/Unit decks/Unit 02 - Strategy Visioning & Success in Practice (SiP).pptx
@@ -632,6 +632,23 @@
             </a:r>
             <a:endParaRPr lang="en-US" dirty="0"/>
           </a:p>
+          <a:p/>
+          <a:p>
+            <a:r>
+              <a:t>Professional insights:</a:t>
+            </a:r>
+          </a:p>
+          <a:p/>
+          <a:p>
+            <a:r>
+              <a:t>Naming the gap: Honestly naming the gap between what has been achieved and what remains is the foundation of the next strategic phase. Organisations that settle for a vague awareness of more to do make little purposeful progress. Name the remaining work specifically, then plan for it.</a:t>
+            </a:r>
+          </a:p>
+          <a:p>
+            <a:r>
+              <a:t>Source: Journal, 10 April 2026 — Professional Insights: Strategy</a:t>
+            </a:r>
+          </a:p>
         </p:txBody>
       </p:sp>
       <p:sp>
@@ -830,6 +847,56 @@
             </a:r>
             <a:endParaRPr lang="en-US" dirty="0"/>
           </a:p>
+          <a:p/>
+          <a:p>
+            <a:r>
+              <a:t>Professional insights:</a:t>
+            </a:r>
+          </a:p>
+          <a:p/>
+          <a:p>
+            <a:r>
+              <a:t>Top-down cultures: When the senior voice ends the conversation, the intelligence that lives at every level of the organisation never reaches the strategy. Use this when participants say their direction was shaped at the top and distributed downward.</a:t>
+            </a:r>
+          </a:p>
+          <a:p>
+            <a:r>
+              <a:t>Source: Journal, 9 January 2026 — Professional Insights: Culture</a:t>
+            </a:r>
+          </a:p>
+          <a:p/>
+          <a:p>
+            <a:r>
+              <a:t>Willing commitment: Lasting influence grows when people understand the significance of the mission and commit to it voluntarily. Willing commitment produces ownership. Use this with the “aligned or complied?” question.</a:t>
+            </a:r>
+          </a:p>
+          <a:p>
+            <a:r>
+              <a:t>Source: Journal, 29 July 2026 — Professional Insights: Leadership</a:t>
+            </a:r>
+          </a:p>
+          <a:p/>
+          <a:p>
+            <a:r>
+              <a:t>Shared understanding: Intent cannot be executed consistently when people do not know the principles, expectations and boundaries that should govern their decisions.</a:t>
+            </a:r>
+          </a:p>
+          <a:p>
+            <a:r>
+              <a:t>Source: Journal, 19 July 2026 — Professional Insights: Strategy</a:t>
+            </a:r>
+          </a:p>
+          <a:p/>
+          <a:p>
+            <a:r>
+              <a:t>Trade-offs: A strong strategy carries a clear operating logic that guides what is prioritised, how trade-offs are made and how consistency holds under pressure. Execution quality depends on how those decisions are made daily. Use this with “Visible trade-offs”.</a:t>
+            </a:r>
+          </a:p>
+          <a:p>
+            <a:r>
+              <a:t>Source: Journal, 3 April 2026 — Professional Insights: Culture</a:t>
+            </a:r>
+          </a:p>
         </p:txBody>
       </p:sp>
       <p:sp>
@@ -946,6 +1013,23 @@
             </a:r>
             <a:endParaRPr lang="en-US" dirty="0"/>
           </a:p>
+          <a:p/>
+          <a:p>
+            <a:r>
+              <a:t>Professional insights:</a:t>
+            </a:r>
+          </a:p>
+          <a:p/>
+          <a:p>
+            <a:r>
+              <a:t>Right destination, right design: A worthy goal can break down when governance, roles, timing and execution discipline are weak. The right destination still needs the right design. Strategic leadership holds pressure without surrendering clarity. Use this with Process and Thinking Logic.</a:t>
+            </a:r>
+          </a:p>
+          <a:p>
+            <a:r>
+              <a:t>Source: Journal, 7 July 2026 — Professional Insights: Strategy</a:t>
+            </a:r>
+          </a:p>
         </p:txBody>
       </p:sp>
       <p:sp>
@@ -1049,6 +1133,34 @@
 SiP: Describes the organisation as a functioning system, helping leaders see how their individual functions contribute to the collective outcome.</a:t>
             </a:r>
             <a:endParaRPr lang="en-US" dirty="0"/>
+          </a:p>
+          <a:p/>
+          <a:p>
+            <a:r>
+              <a:t>Professional insights:</a:t>
+            </a:r>
+          </a:p>
+          <a:p/>
+          <a:p>
+            <a:r>
+              <a:t>Decision Filter: Organisations without an explicit governing reference point drift into convergent decline: each person makes locally rational decisions that are collectively damaging. Ask participants to name the three governing reference points that override individual preference when they collide. If they cannot name them in plain sentences, the filter is missing.</a:t>
+            </a:r>
+          </a:p>
+          <a:p>
+            <a:r>
+              <a:t>Source: Journal, 27 April 2026 — Professional Insights: Strategy</a:t>
+            </a:r>
+          </a:p>
+          <a:p/>
+          <a:p>
+            <a:r>
+              <a:t>Strategic Alignment: Many legitimate demands fragment attention unless there is a clear organising priority. Effective strategy knows the “one thing” around which competing choices are ordered.</a:t>
+            </a:r>
+          </a:p>
+          <a:p>
+            <a:r>
+              <a:t>Source: Journal, 18 September 2026 — Professional Insights: Strategy</a:t>
+            </a:r>
           </a:p>
         </p:txBody>
       </p:sp>
@@ -1307,6 +1419,23 @@
             </a:r>
             <a:endParaRPr lang="en-US" dirty="0"/>
           </a:p>
+          <a:p/>
+          <a:p>
+            <a:r>
+              <a:t>Professional insights:</a:t>
+            </a:r>
+          </a:p>
+          <a:p/>
+          <a:p>
+            <a:r>
+              <a:t>Partial formation: The organisations most at risk are often the ones clearly succeeding on one or two dimensions while remaining unformed on the others. What is working reassures them that all is well, so they do not feel the cost of what is missing. Use this to show why all four dimensions matter.</a:t>
+            </a:r>
+          </a:p>
+          <a:p>
+            <a:r>
+              <a:t>Source: Journal, 26 March 2026 — Professional Insights</a:t>
+            </a:r>
+          </a:p>
         </p:txBody>
       </p:sp>
       <p:sp>
@@ -1417,6 +1546,78 @@
 Risk: Leaders optimise for metrics without creating the conditions that produce them. Short-termism disguises itself as strategic clarity.</a:t>
             </a:r>
             <a:endParaRPr lang="en-US" dirty="0"/>
+          </a:p>
+          <a:p/>
+          <a:p>
+            <a:r>
+              <a:t>Professional insights:</a:t>
+            </a:r>
+          </a:p>
+          <a:p/>
+          <a:p>
+            <a:r>
+              <a:t>D1 Customer Only: Execution can fail from internal dysfunction while external threats are managed well. Sustainable results need attention to both the task and the conditions under which people are expected to perform it.</a:t>
+            </a:r>
+          </a:p>
+          <a:p>
+            <a:r>
+              <a:t>Source: Journal, 7 August 2026 — Professional Insights: Strategy</a:t>
+            </a:r>
+          </a:p>
+          <a:p/>
+          <a:p>
+            <a:r>
+              <a:t>D1 Customer Only · signal to watch for: An organisation declares customer-centricity while its measures and incentives stay internally focused.</a:t>
+            </a:r>
+          </a:p>
+          <a:p>
+            <a:r>
+              <a:t>Source: Journal, 29 September 2026 — Professional Insights: Strategy</a:t>
+            </a:r>
+          </a:p>
+          <a:p/>
+          <a:p>
+            <a:r>
+              <a:t>D2 Operations Only: Cultures calcify when a process or control becomes an end in itself, enforced whether or not it still serves anyone. Ask: “Which rule do your people now serve that no longer benefits them? Fix its purpose or retire it.”</a:t>
+            </a:r>
+          </a:p>
+          <a:p>
+            <a:r>
+              <a:t>Source: Journal, 19 May 2026 — Professional Insights: Strategy</a:t>
+            </a:r>
+          </a:p>
+          <a:p/>
+          <a:p>
+            <a:r>
+              <a:t>D3 People Only: A culture shows in its budget allocations and recognition rituals. Quick audit: list the three things the team invested most resource in last quarter and the three things it most publicly celebrated. If neither list matches the stated values, the values on the wall are decoration.</a:t>
+            </a:r>
+          </a:p>
+          <a:p>
+            <a:r>
+              <a:t>Source: Journal, 26 April 2026 — Professional Insights: Culture</a:t>
+            </a:r>
+          </a:p>
+          <a:p/>
+          <a:p>
+            <a:r>
+              <a:t>D4 Value Only: Leaders reach for metrics that flatter when they stop trusting the harder, less quantifiable foundations of the work. Ask: “What anxiety is this number meant to soothe?”</a:t>
+            </a:r>
+          </a:p>
+          <a:p>
+            <a:r>
+              <a:t>Source: Journal, 3 June 2026 — Professional Insights: Leadership</a:t>
+            </a:r>
+          </a:p>
+          <a:p/>
+          <a:p>
+            <a:r>
+              <a:t>D4 Value Only · enduring value: Visible momentum does not necessarily indicate sustainable value. Decisions must rest on a clear understanding of what the organisation is trying to build.</a:t>
+            </a:r>
+          </a:p>
+          <a:p>
+            <a:r>
+              <a:t>Source: Journal, 23 September 2026 — Professional Insights: Leadership</a:t>
+            </a:r>
           </a:p>
         </p:txBody>
       </p:sp>
@@ -1646,6 +1847,23 @@
 Integration challenge: The CSO's SiP is architecturally sound but emotionally absent. Other leaders struggle to feel ownership of something designed by the strategy function.</a:t>
             </a:r>
             <a:endParaRPr lang="en-US" dirty="0"/>
+          </a:p>
+          <a:p/>
+          <a:p>
+            <a:r>
+              <a:t>Professional insights:</a:t>
+            </a:r>
+          </a:p>
+          <a:p/>
+          <a:p>
+            <a:r>
+              <a:t>Seeing the larger system: Good leadership sometimes helps people see a problem within a larger system so that more responsible judgement becomes possible. Use this with “many partial pictures, each accurate and collectively incomplete”.</a:t>
+            </a:r>
+          </a:p>
+          <a:p>
+            <a:r>
+              <a:t>Source: Journal, 3 September 2026 — Professional Insights: Leadership</a:t>
+            </a:r>
           </a:p>
         </p:txBody>
       </p:sp>
@@ -1916,6 +2134,23 @@
             </a:r>
             <a:endParaRPr lang="en-US" dirty="0"/>
           </a:p>
+          <a:p/>
+          <a:p>
+            <a:r>
+              <a:t>Professional insights:</a:t>
+            </a:r>
+          </a:p>
+          <a:p/>
+          <a:p>
+            <a:r>
+              <a:t>An honest baseline: Strategy begins with an accurate understanding of present reality. Leaders who avoid difficult information protect their comfort at the expense of the institution. Name the true condition without minimising it. Use this before participants score: honest scoring is the point of the assessment.</a:t>
+            </a:r>
+          </a:p>
+          <a:p>
+            <a:r>
+              <a:t>Source: Journal, 4 August 2026 — Professional Insights: Strategy</a:t>
+            </a:r>
+          </a:p>
         </p:txBody>
       </p:sp>
       <p:sp>
@@ -2010,6 +2245,34 @@
             </a:r>
             <a:endParaRPr lang="en-US" dirty="0"/>
           </a:p>
+          <a:p/>
+          <a:p>
+            <a:r>
+              <a:t>Professional insights:</a:t>
+            </a:r>
+          </a:p>
+          <a:p/>
+          <a:p>
+            <a:r>
+              <a:t>Personality-dependent strategy: A sound strategy is defined clearly enough that a new leader can step in and continue execution. A defined strategic position creates value only when the organisation translates intent into deliberate, consistent action. Use this with the 0–26 band.</a:t>
+            </a:r>
+          </a:p>
+          <a:p>
+            <a:r>
+              <a:t>Source: Journal, 3 April 2026 — Professional Insights: Strategy</a:t>
+            </a:r>
+          </a:p>
+          <a:p/>
+          <a:p>
+            <a:r>
+              <a:t>The mission larger than the contributor: When value becomes inseparable from particular individuals, ego and fragility increase. Strong cultures recognise the contribution while keeping the mission larger than the contributor.</a:t>
+            </a:r>
+          </a:p>
+          <a:p>
+            <a:r>
+              <a:t>Source: Journal, 18 September 2026 — Professional Insights: Culture</a:t>
+            </a:r>
+          </a:p>
         </p:txBody>
       </p:sp>
       <p:sp>
@@ -2125,6 +2388,23 @@
             </a:r>
             <a:endParaRPr lang="en-US" dirty="0"/>
           </a:p>
+          <a:p/>
+          <a:p>
+            <a:r>
+              <a:t>Professional insights:</a:t>
+            </a:r>
+          </a:p>
+          <a:p/>
+          <a:p>
+            <a:r>
+              <a:t>Present tense of the future: Teams that can receive a declared outcome and work backward from it to the actions required move from instruction to execution most effectively. Declare the outcome first, then design the process to reach it.</a:t>
+            </a:r>
+          </a:p>
+          <a:p>
+            <a:r>
+              <a:t>Source: Journal, 7 April 2026 — Professional Insights: Culture</a:t>
+            </a:r>
+          </a:p>
         </p:txBody>
       </p:sp>
       <p:sp>
@@ -2218,6 +2498,23 @@
 Producing the collective output: The facilitator (or a nominated scribe) drafts a single integrated SiP from the synthesis discussion. This draft becomes the working SiP for the organisation — it will be tested, refined, and embedded across subsequent units. It needs to be genuinely shared today; refinement follows in later units.</a:t>
             </a:r>
             <a:endParaRPr lang="en-US" dirty="0"/>
+          </a:p>
+          <a:p/>
+          <a:p>
+            <a:r>
+              <a:t>Professional insights:</a:t>
+            </a:r>
+          </a:p>
+          <a:p/>
+          <a:p>
+            <a:r>
+              <a:t>Silence is a decision: The leader who is present when a commitment is made and does not challenge it has endorsed it. A plan received without objection binds the organisation to an outcome the leader could have shaped. Use this with “Compete: where trade-off decisions are needed”.</a:t>
+            </a:r>
+          </a:p>
+          <a:p>
+            <a:r>
+              <a:t>Source: Journal, 15 March 2026 — Professional Insights</a:t>
+            </a:r>
           </a:p>
         </p:txBody>
       </p:sp>
@@ -2642,6 +2939,23 @@
             </a:r>
             <a:endParaRPr lang="en-US" dirty="0"/>
           </a:p>
+          <a:p/>
+          <a:p>
+            <a:r>
+              <a:t>Professional insights:</a:t>
+            </a:r>
+          </a:p>
+          <a:p/>
+          <a:p>
+            <a:r>
+              <a:t>Strategy carried by people: What the people who carry a strategy have understood and internalised survives the loss of any document. Build the strategy into their knowledge and conviction. Use this with “Leaders repeat it everywhere”.</a:t>
+            </a:r>
+          </a:p>
+          <a:p>
+            <a:r>
+              <a:t>Source: Journal, 16 February 2026 — Professional Insights: Strategy</a:t>
+            </a:r>
+          </a:p>
         </p:txBody>
       </p:sp>
       <p:sp>
@@ -3434,6 +3748,34 @@
 - ✎ Reflection — The Definition Which element of the master definition is least clearly present in your organisation's current strategy? What is the consequence of its absence?</a:t>
             </a:r>
             <a:endParaRPr lang="en-US" dirty="0"/>
+          </a:p>
+          <a:p/>
+          <a:p>
+            <a:r>
+              <a:t>Professional insights:</a:t>
+            </a:r>
+          </a:p>
+          <a:p/>
+          <a:p>
+            <a:r>
+              <a:t>Bringing order: Every strategy takes complexity and gives it structure. The first act of strategic leadership is to bring order to what is chaotic and to name things clearly.</a:t>
+            </a:r>
+          </a:p>
+          <a:p>
+            <a:r>
+              <a:t>Source: Journal, 4 January 2026 — Professional Insights: Strategy</a:t>
+            </a:r>
+          </a:p>
+          <a:p/>
+          <a:p>
+            <a:r>
+              <a:t>Value for whom: An organisation can have alignment, resources, skill and momentum and still fail when its strategy rests on the wrong foundation. A strategy designed mainly to build the reputation of its builders serves the wrong master. Anchor strategy in what the organisation is trying to achieve for its stakeholders. Use this with “creates, delivers and sustains value to its stakeholders”.</a:t>
+            </a:r>
+          </a:p>
+          <a:p>
+            <a:r>
+              <a:t>Source: Journal, 10 January 2026 — Professional Insights: Strategy</a:t>
+            </a:r>
           </a:p>
         </p:txBody>
       </p:sp>
@@ -3682,6 +4024,23 @@
 Diagnostic questions: Have we mapped the sequence of moves needed to achieve the strategy? · Are we moving at the right pace? · What signals tell us when to accelerate or pause?</a:t>
             </a:r>
             <a:endParaRPr lang="en-US" dirty="0"/>
+          </a:p>
+          <a:p/>
+          <a:p>
+            <a:r>
+              <a:t>Professional insights:</a:t>
+            </a:r>
+          </a:p>
+          <a:p/>
+          <a:p>
+            <a:r>
+              <a:t>WHY before HOW: Organisations that rush into execution without clarifying purpose create activity without lasting impact. Strategic clarity emerges when leaders understand why the work exists before deciding how it will be done.</a:t>
+            </a:r>
+          </a:p>
+          <a:p>
+            <a:r>
+              <a:t>Source: Journal, 28 July 2026 — Professional Insights: Strategy</a:t>
+            </a:r>
           </a:p>
         </p:txBody>
       </p:sp>

--- a/Unit decks/Unit 02 - Strategy Visioning & Success in Practice (SiP).pptx
+++ b/Unit decks/Unit 02 - Strategy Visioning & Success in Practice (SiP).pptx
@@ -542,6 +542,23 @@
             </a:r>
             <a:endParaRPr lang="en-US" dirty="0"/>
           </a:p>
+          <a:p/>
+          <a:p>
+            <a:r>
+              <a:t>Source detail (S2R® manuscript):</a:t>
+            </a:r>
+          </a:p>
+          <a:p/>
+          <a:p>
+            <a:r>
+              <a:t>Module context: The Direction module (Strategy Intent &amp; Direction Across Functions) equips participants to understand how each Executive Leadership role interprets strategic intent and direction, and the steps where these interpretations create cross-functional tension or reinforcement.</a:t>
+            </a:r>
+          </a:p>
+          <a:p>
+            <a:r>
+              <a:t>Participants work through the whole Direction module from the perspective of their assigned CXO role.</a:t>
+            </a:r>
+          </a:p>
         </p:txBody>
       </p:sp>
       <p:sp>
@@ -850,6 +867,28 @@
           <a:p/>
           <a:p>
             <a:r>
+              <a:t>Source detail (S2R® manuscript):</a:t>
+            </a:r>
+          </a:p>
+          <a:p/>
+          <a:p>
+            <a:r>
+              <a:t>Why co-creation is a requirement: Strategy execution fails when leaders interpret the strategy through different perspectives, pursue different definitions of success, or prioritise different outcomes.</a:t>
+            </a:r>
+          </a:p>
+          <a:p>
+            <a:r>
+              <a:t>What co-creation excludes: a Strategic Intent Statement and SiP written by one executive and distributed to the rest of the organisation, and agreement on the destination reached through compliance.</a:t>
+            </a:r>
+          </a:p>
+          <a:p>
+            <a:r>
+              <a:t>The third result in full: the organisation builds collective ownership of the future state.</a:t>
+            </a:r>
+          </a:p>
+          <a:p/>
+          <a:p>
+            <a:r>
               <a:t>Professional insights:</a:t>
             </a:r>
           </a:p>
@@ -1016,6 +1055,39 @@
           <a:p/>
           <a:p>
             <a:r>
+              <a:t>Source detail (S2R® manuscript):</a:t>
+            </a:r>
+          </a:p>
+          <a:p/>
+          <a:p>
+            <a:r>
+              <a:t>Why three components: Strategy is not produced in a single session.</a:t>
+            </a:r>
+          </a:p>
+          <a:p/>
+          <a:p>
+            <a:r>
+              <a:t>Further detail on the components:</a:t>
+            </a:r>
+          </a:p>
+          <a:p>
+            <a:r>
+              <a:t>Thinking Logic: Reaching strategic insight takes judgement as well as analysis. Strategic errors arise in logic far more often than in data.</a:t>
+            </a:r>
+          </a:p>
+          <a:p>
+            <a:r>
+              <a:t>Process: The scaffolding takes the form of workshops, governance forums, and decision protocols. The five stages in full: Diagnose (understand reality without filtering); Interpret (extract meaning); Design (formulate choices and trade-offs); Validate (stress-test assumptions); Refine (loop back and improve). When process is over-engineered, strategy becomes template-filling.</a:t>
+            </a:r>
+          </a:p>
+          <a:p>
+            <a:r>
+              <a:t>Where most organisations fail (the full result): strategy that is internally coherent but fundamentally incorrect, and confidence that is not grounded in sound logic.</a:t>
+            </a:r>
+          </a:p>
+          <a:p/>
+          <a:p>
+            <a:r>
               <a:t>Professional insights:</a:t>
             </a:r>
           </a:p>
@@ -1137,6 +1209,18 @@
           <a:p/>
           <a:p>
             <a:r>
+              <a:t>Source detail (S2R® manuscript):</a:t>
+            </a:r>
+          </a:p>
+          <a:p/>
+          <a:p>
+            <a:r>
+              <a:t>Strategic Alignment (further detail): Strategic Intent guards against each executive pursuing a personal interpretation of the domain and its differentiating logic. SiP guards against each executive describing a functional version of the future operating state.</a:t>
+            </a:r>
+          </a:p>
+          <a:p/>
+          <a:p>
+            <a:r>
               <a:t>Professional insights:</a:t>
             </a:r>
           </a:p>
@@ -1258,6 +1342,18 @@
 Suggested section time: 20–25 minutes.</a:t>
             </a:r>
             <a:endParaRPr lang="en-US" dirty="0"/>
+          </a:p>
+          <a:p/>
+          <a:p>
+            <a:r>
+              <a:t>Source detail (S2R® manuscript):</a:t>
+            </a:r>
+          </a:p>
+          <a:p/>
+          <a:p>
+            <a:r>
+              <a:t>Section opening: The SiP dimensions serve as a guardrail that carries the intent into future success. No dimension is a single metric. This section breaks each dimension down into its key indicators.</a:t>
+            </a:r>
           </a:p>
         </p:txBody>
       </p:sp>
@@ -1422,6 +1518,89 @@
           <a:p/>
           <a:p>
             <a:r>
+              <a:t>Source detail (S2R® manuscript):</a:t>
+            </a:r>
+          </a:p>
+          <a:p/>
+          <a:p>
+            <a:r>
+              <a:t>CARE source encounters: Customers encounter the organisation through four channels, and each one is the source of one form of value. People: Connection Value. Platforms: Access Value. Products: Results Value. Processes: Effort Value.</a:t>
+            </a:r>
+          </a:p>
+          <a:p/>
+          <a:p>
+            <a:r>
+              <a:t>Further indicator detail:</a:t>
+            </a:r>
+          </a:p>
+          <a:p>
+            <a:r>
+              <a:t>D1 · Connection Value: Customers trust that the care extends beyond the transaction. When it is missing, customers feel processed where they should feel served.</a:t>
+            </a:r>
+          </a:p>
+          <a:p>
+            <a:r>
+              <a:t>D1 · Effort Value: The minimal effort is the customer’s own effort to achieve results. No complexity is passed to the customer.</a:t>
+            </a:r>
+          </a:p>
+          <a:p>
+            <a:r>
+              <a:t>D2 · Decision Flow: The organisation does not bottleneck at the top. When it is missing, it is the leaders below CXO level who feel they cannot act without approval.</a:t>
+            </a:r>
+          </a:p>
+          <a:p>
+            <a:r>
+              <a:t>D2 · Cross-Functional Coordination: Execution friction that is silently absorbed goes unmanaged.</a:t>
+            </a:r>
+          </a:p>
+          <a:p>
+            <a:r>
+              <a:t>D2 · Delivery Rhythm: The cadence is weekly signal scanning, monthly performance reads, and quarterly strategic review. When it is missing, review has not become a disciplined organisational habit, and delivery is variable and unpredictable.</a:t>
+            </a:r>
+          </a:p>
+          <a:p>
+            <a:r>
+              <a:t>D3 · Cross-Boundary Collaboration: Information is shared proactively. When it is missing, information is hoarded or filtered.</a:t>
+            </a:r>
+          </a:p>
+          <a:p>
+            <a:r>
+              <a:t>D3 · Ownership Culture: People step in without being required to. Accountability is cultural before it is structural. When it is missing and something fails at a boundary, no one steps forward.</a:t>
+            </a:r>
+          </a:p>
+          <a:p>
+            <a:r>
+              <a:t>D3 · Strategic Alignment: Leaders can trace what they are doing to both the strategic intent and the SiP. When it is missing, function history is one of the things driving action.</a:t>
+            </a:r>
+          </a:p>
+          <a:p>
+            <a:r>
+              <a:t>D3 · Dialogue Quality: Leaders can say they do not know something without losing credibility. When it is missing, System 1 thinking (fast, pattern-based) dominates without System 2 (deliberate, analytical) to check it.</a:t>
+            </a:r>
+          </a:p>
+          <a:p>
+            <a:r>
+              <a:t>D4 · Growth Trajectory: Growth is deliberate. When it is missing, growth may be happening in arenas that were not part of the intended WHAT.</a:t>
+            </a:r>
+          </a:p>
+          <a:p>
+            <a:r>
+              <a:t>D4 · Profitability Quality: The premium is earned because the organisation has chosen arenas where its differentiation commands it.</a:t>
+            </a:r>
+          </a:p>
+          <a:p>
+            <a:r>
+              <a:t>D4 · Market Position: The stakeholders in question are customers, partners, analysts and employees. When it is missing, the strategy exists on paper only.</a:t>
+            </a:r>
+          </a:p>
+          <a:p>
+            <a:r>
+              <a:t>D4 · Value Durability: The organisation is building moats. When it is missing, short-term results also cost the relationships that make future success possible.</a:t>
+            </a:r>
+          </a:p>
+          <a:p/>
+          <a:p>
+            <a:r>
               <a:t>Professional insights:</a:t>
             </a:r>
           </a:p>
@@ -1720,6 +1899,18 @@
 Suggested total section time: 55–75 minutes.</a:t>
             </a:r>
             <a:endParaRPr lang="en-US" dirty="0"/>
+          </a:p>
+          <a:p/>
+          <a:p>
+            <a:r>
+              <a:t>Source detail (S2R® manuscript):</a:t>
+            </a:r>
+          </a:p>
+          <a:p/>
+          <a:p>
+            <a:r>
+              <a:t>Anchor question: How do all executive perspectives integrate into one Strategic Intent Statement and one shared SiP?</a:t>
+            </a:r>
           </a:p>
         </p:txBody>
       </p:sp>
@@ -2137,6 +2328,174 @@
           <a:p/>
           <a:p>
             <a:r>
+              <a:t>Source detail (S2R® manuscript):</a:t>
+            </a:r>
+          </a:p>
+          <a:p/>
+          <a:p>
+            <a:r>
+              <a:t>Diagnostic questions (open-response version): The assessment covers all 26 components of the master strategy definition. For each area, the executive team records its honest diagnostic response in a Team Response column, then scores the area 0–3.</a:t>
+            </a:r>
+          </a:p>
+          <a:p/>
+          <a:p>
+            <a:r>
+              <a:t>A · Process</a:t>
+            </a:r>
+          </a:p>
+          <a:p>
+            <a:r>
+              <a:t>1. OUTPUT: Can your strategy be expressed in a single written statement that someone not in the room could act on? Describe what exists today.</a:t>
+            </a:r>
+          </a:p>
+          <a:p>
+            <a:r>
+              <a:t>2. ITERATIVE: Describe the last time your strategy was formally updated in response to new information. What changed, and what triggered the revision?</a:t>
+            </a:r>
+          </a:p>
+          <a:p>
+            <a:r>
+              <a:t>3. THINKING &amp; LOGIC: What uncomfortable assumption does your current strategy rest on that has not been formally challenged? What would happen if that assumption were wrong?</a:t>
+            </a:r>
+          </a:p>
+          <a:p>
+            <a:r>
+              <a:t>4. PROCESS: Describe your current strategy process. Who is involved? What decisions are made? Could someone else run the next cycle without you?</a:t>
+            </a:r>
+          </a:p>
+          <a:p/>
+          <a:p>
+            <a:r>
+              <a:t>B · Intent (3W1H)</a:t>
+            </a:r>
+          </a:p>
+          <a:p>
+            <a:r>
+              <a:t>5. WHAT: State your WHAT in one precise sentence, including what you have explicitly decided NOT to do. Where does your scope end?</a:t>
+            </a:r>
+          </a:p>
+          <a:p>
+            <a:r>
+              <a:t>6. WHY: What is the unique reason stakeholders choose your organisation over every alternative, including doing nothing? Could a competitor make the same claim?</a:t>
+            </a:r>
+          </a:p>
+          <a:p>
+            <a:r>
+              <a:t>7. HOW: What are the two or three specific capabilities that make your strategy executable? Where are the most critical capability gaps right now?</a:t>
+            </a:r>
+          </a:p>
+          <a:p>
+            <a:r>
+              <a:t>8. WHEN: What is the sequencing logic of your current strategy? What must happen first, and why does that order matter?</a:t>
+            </a:r>
+          </a:p>
+          <a:p/>
+          <a:p>
+            <a:r>
+              <a:t>C · Value</a:t>
+            </a:r>
+          </a:p>
+          <a:p>
+            <a:r>
+              <a:t>9. CREATES value: What new value are you currently generating that did not exist before? How do you know it is genuinely valued by its intended recipients?</a:t>
+            </a:r>
+          </a:p>
+          <a:p>
+            <a:r>
+              <a:t>10. DELIVERS value: How reliably does your created value reach the people it was designed for? Where in the delivery system is the biggest breakdown?</a:t>
+            </a:r>
+          </a:p>
+          <a:p>
+            <a:r>
+              <a:t>11. SUSTAINS value: What are you explicitly investing in today that ensures your strategy will still be relevant in three to five years, well beyond next quarter?</a:t>
+            </a:r>
+          </a:p>
+          <a:p/>
+          <a:p>
+            <a:r>
+              <a:t>D · Environment</a:t>
+            </a:r>
+          </a:p>
+          <a:p>
+            <a:r>
+              <a:t>12. STAKEHOLDERS: Name all the stakeholder groups your strategy must serve. Which group are you most likely underserving right now, and what risk does that create?</a:t>
+            </a:r>
+          </a:p>
+          <a:p>
+            <a:r>
+              <a:t>13. NAVIGATING (continuous course correction, beyond reacting or surviving): Describe the most deliberate move your organisation has made in the last 12 months to shape its environment.</a:t>
+            </a:r>
+          </a:p>
+          <a:p>
+            <a:r>
+              <a:t>14. THE FORCES: Which force in your operating environment poses the greatest threat to your strategy in the next 18 months, and how explicitly does your strategy address it?</a:t>
+            </a:r>
+          </a:p>
+          <a:p>
+            <a:r>
+              <a:t>15. OPERATING ENVIRONMENT: How recently has your operating environment been formally scanned? What is the most significant environmental shift you are currently under-responding to?</a:t>
+            </a:r>
+          </a:p>
+          <a:p/>
+          <a:p>
+            <a:r>
+              <a:t>E · Engine</a:t>
+            </a:r>
+          </a:p>
+          <a:p>
+            <a:r>
+              <a:t>Areas 16 to 18 have no open-response question in this set; use the scoring questions listed above.</a:t>
+            </a:r>
+          </a:p>
+          <a:p/>
+          <a:p>
+            <a:r>
+              <a:t>F · Strategic Chain</a:t>
+            </a:r>
+          </a:p>
+          <a:p>
+            <a:r>
+              <a:t>19. INPUTS: How complete, current, and unbiased are your strategic inputs right now? What critical input is most likely missing?</a:t>
+            </a:r>
+          </a:p>
+          <a:p>
+            <a:r>
+              <a:t>20. ITERATIVE THINKING LOGIC (mental model and reasoning): Where in your strategy work is thinking most rigorous? Where is it most likely to drift into assumption-confirming analysis?</a:t>
+            </a:r>
+          </a:p>
+          <a:p>
+            <a:r>
+              <a:t>21. STRUCTURED PROCESS CYCLES (formalised iteration that turns thinking into documented positions): How structured and consistent is your strategy process? Could someone step in and run the next cycle without the current lead person?</a:t>
+            </a:r>
+          </a:p>
+          <a:p>
+            <a:r>
+              <a:t>22. DECISIONS ACROSS WHAT / WHY / HOW / WHEN: Which of the four dimensions (WHAT, WHY, HOW, or WHEN) is least clearly documented in your current strategy?</a:t>
+            </a:r>
+          </a:p>
+          <a:p>
+            <a:r>
+              <a:t>23. VALUE LIFECYCLE DESIGN: Which stage of your value lifecycle is weakest (creating, delivering, or sustaining), and what evidence tells you that?</a:t>
+            </a:r>
+          </a:p>
+          <a:p>
+            <a:r>
+              <a:t>24. STAKEHOLDER ALIGNMENT (multi-constituency logic): Which stakeholder group creates the greatest risk if their expectations are consistently not met, and how explicit is your strategy’s response?</a:t>
+            </a:r>
+          </a:p>
+          <a:p>
+            <a:r>
+              <a:t>25. ENVIRONMENTAL NAVIGATION (external and internal forces): What internal force (culture, legacy, habits, or inertia) is most likely to undermine your strategy, and how explicitly are you addressing it?</a:t>
+            </a:r>
+          </a:p>
+          <a:p>
+            <a:r>
+              <a:t>26. OUTPUT (a set of choices that answers all four dimensions): Could your complete strategy be communicated clearly by someone who was not in the room? Write it as a test: what would a one-page version say?</a:t>
+            </a:r>
+          </a:p>
+          <a:p/>
+          <a:p>
+            <a:r>
               <a:t>Professional insights:</a:t>
             </a:r>
           </a:p>
@@ -2616,6 +2975,18 @@
 Suggested total section time: 55–80 minutes.</a:t>
             </a:r>
             <a:endParaRPr lang="en-US" dirty="0"/>
+          </a:p>
+          <a:p/>
+          <a:p>
+            <a:r>
+              <a:t>Source detail (S2R® manuscript):</a:t>
+            </a:r>
+          </a:p>
+          <a:p/>
+          <a:p>
+            <a:r>
+              <a:t>How the results are used: The executive team conducts the assessment using the 26 areas of strategy as defined by the programme. The corrective actions across the four SiP dimensions enhance the intent, and the team then crafts the SiP storyline and headline.</a:t>
+            </a:r>
           </a:p>
         </p:txBody>
       </p:sp>
@@ -2835,6 +3206,18 @@
             </a:r>
             <a:endParaRPr lang="en-US" dirty="0"/>
           </a:p>
+          <a:p/>
+          <a:p>
+            <a:r>
+              <a:t>Source detail (S2R® manuscript):</a:t>
+            </a:r>
+          </a:p>
+          <a:p/>
+          <a:p>
+            <a:r>
+              <a:t>The table layout: one row per CXO role (CEO, CFO, COO, CHRO, CTO, CMO, CCO, CPO, CRO, CSO) and one column per SiP dimension (Customer Experience &amp; Value; Operational Capability &amp; Execution Rhythm; People &amp; Culture Dynamics; Enterprise Value Creation). Each CXO uses the maturity assessment results to describe the four dimensions.</a:t>
+            </a:r>
+          </a:p>
         </p:txBody>
       </p:sp>
       <p:sp>
@@ -3461,6 +3844,75 @@
             </a:r>
             <a:endParaRPr lang="en-US" dirty="0"/>
           </a:p>
+          <a:p/>
+          <a:p>
+            <a:r>
+              <a:t>Source detail (S2R® manuscript):</a:t>
+            </a:r>
+          </a:p>
+          <a:p/>
+          <a:p>
+            <a:r>
+              <a:t>The two outputs: This unit produces two integrated outputs from one collective exercise.</a:t>
+            </a:r>
+          </a:p>
+          <a:p>
+            <a:r>
+              <a:t>- A Strategic Intent Statement: a precise articulation of WHAT the organisation does, for WHOM, WHY it is distinctively positioned, and what it deliberately excludes.</a:t>
+            </a:r>
+          </a:p>
+          <a:p>
+            <a:r>
+              <a:t>- A Success in Practice (SiP) Narrative: a vivid, four-dimensional description of the organisation written in the present tense of the future, co-owned by the entire executive team.</a:t>
+            </a:r>
+          </a:p>
+          <a:p/>
+          <a:p>
+            <a:r>
+              <a:t>Further detail for each stage of the summary:</a:t>
+            </a:r>
+          </a:p>
+          <a:p>
+            <a:r>
+              <a:t>Awareness: Each concept in the master definition carries a specific strategic implication as well as a named failure mode. The Storyline is written in the present tense of the future.</a:t>
+            </a:r>
+          </a:p>
+          <a:p>
+            <a:r>
+              <a:t>Intelligence: When executives participate in shaping both outputs, strategy moves from individual interpretation to shared strategic imagination.</a:t>
+            </a:r>
+          </a:p>
+          <a:p>
+            <a:r>
+              <a:t>Extrapolating: Strategic intent most often breaks down at the point of execution across functions, where each area interprets the strategy differently. To make this fragmentation visible, the SiP dimensions act as diagnostics, translating strategy into observable signals across four critical domains. Leaders assess whether the strategy is working by examining how customers experience value, how the organisation operates and executes, how people behave and align, and whether enterprise value is being created and sustained. Each dimension reveals specific indicators of alignment or breakdown, enabling leaders to identify execution gaps, surface hidden friction, and locate the precise points where strategy is not translating into reality.</a:t>
+            </a:r>
+          </a:p>
+          <a:p>
+            <a:r>
+              <a:t>Integration: The six groups of the assessment are Process Components (OUTPUT, ITERATIVE, THINKING &amp; LOGIC, PROCESS); Strategic Intent Dimensions (WHAT, WHY, HOW, WHEN); Value Lifecycle (CREATES, DELIVERS, SUSTAINS); Operating Environment (STAKEHOLDERS, NAVIGATING, THE FORCES, OPERATING ENVIRONMENT); Strategy Engine (Thinking Logic, Process, Iterative Nature); and Strategic Chain (Inputs through Coherent Output). The results were used to identify corrective actions across the four SiP dimensions and to anchor the storyline and headline.</a:t>
+            </a:r>
+          </a:p>
+          <a:p/>
+          <a:p>
+            <a:r>
+              <a:t>By the end of the session, the executive team has produced:</a:t>
+            </a:r>
+          </a:p>
+          <a:p>
+            <a:r>
+              <a:t>- A collectively authored Success in Practice storyline.</a:t>
+            </a:r>
+          </a:p>
+          <a:p>
+            <a:r>
+              <a:t>- A clear strategic headline.</a:t>
+            </a:r>
+          </a:p>
+          <a:p>
+            <a:r>
+              <a:t>- A shared mental model of the future organisation.</a:t>
+            </a:r>
+          </a:p>
         </p:txBody>
       </p:sp>
       <p:sp>
@@ -3560,6 +4012,23 @@
             </a:r>
             <a:endParaRPr lang="en-US" dirty="0"/>
           </a:p>
+          <a:p/>
+          <a:p>
+            <a:r>
+              <a:t>Source detail (S2R® manuscript):</a:t>
+            </a:r>
+          </a:p>
+          <a:p/>
+          <a:p>
+            <a:r>
+              <a:t>Preamble (further wording): Leaders agree on what strategy means in the precise, strategic sense, translated to operational reality, that makes every subsequent decision coherent.</a:t>
+            </a:r>
+          </a:p>
+          <a:p>
+            <a:r>
+              <a:t>This unit opens with the master definition of strategy, unpacks each of its critical components, and builds toward two integrated outputs: a Strategic Intent Statement and a Success in Practice narrative.</a:t>
+            </a:r>
+          </a:p>
         </p:txBody>
       </p:sp>
       <p:sp>
@@ -3748,6 +4217,23 @@
 - ✎ Reflection — The Definition Which element of the master definition is least clearly present in your organisation's current strategy? What is the consequence of its absence?</a:t>
             </a:r>
             <a:endParaRPr lang="en-US" dirty="0"/>
+          </a:p>
+          <a:p/>
+          <a:p>
+            <a:r>
+              <a:t>Source detail (S2R® manuscript):</a:t>
+            </a:r>
+          </a:p>
+          <a:p/>
+          <a:p>
+            <a:r>
+              <a:t>Why a master definition: Strategy is frequently used but rarely precisely defined. In most organisations it functions as shorthand for ambition, planning, or competitive intention, with each executive leader carrying a slightly different version of the word. In the Strategy2Results® framework, strategy has a specific applied definition.</a:t>
+            </a:r>
+          </a:p>
+          <a:p>
+            <a:r>
+              <a:t>How the definition is unpacked: for each critical concept, what it means, what it implies for execution, and what breaks when it is absent.</a:t>
+            </a:r>
           </a:p>
           <a:p/>
           <a:p>
@@ -3901,6 +4387,53 @@
             </a:r>
             <a:endParaRPr lang="en-US" dirty="0"/>
           </a:p>
+          <a:p/>
+          <a:p>
+            <a:r>
+              <a:t>Source detail (S2R® manuscript):</a:t>
+            </a:r>
+          </a:p>
+          <a:p/>
+          <a:p>
+            <a:r>
+              <a:t>Further detail on the concepts:</a:t>
+            </a:r>
+          </a:p>
+          <a:p>
+            <a:r>
+              <a:t>OUTPUT: The decided position is distinct from a plan, a meeting, the process of strategising, the presentation deck, and the off-site discussion.</a:t>
+            </a:r>
+          </a:p>
+          <a:p>
+            <a:r>
+              <a:t>ITERATIVE: This rules out strategy as an annual ritual and rules in strategy as a living organisational capability.</a:t>
+            </a:r>
+          </a:p>
+          <a:p>
+            <a:r>
+              <a:t>THINKING &amp; LOGIC: Strategy needs reasoning as well as inspiration.</a:t>
+            </a:r>
+          </a:p>
+          <a:p>
+            <a:r>
+              <a:t>PROCESS: With process, strategy stops being a personality-dependent event. Process is the scaffolding that makes thinking transferable.</a:t>
+            </a:r>
+          </a:p>
+          <a:p>
+            <a:r>
+              <a:t>WHAT · WHY · HOW · WHEN: Together the four dimensions constitute a complete strategic position. A third failure pattern: WHEN without WHAT is urgency without direction.</a:t>
+            </a:r>
+          </a:p>
+          <a:p>
+            <a:r>
+              <a:t>CREATES · DELIVERS · SUSTAINS: The failure mode is named “partial value chains”.</a:t>
+            </a:r>
+          </a:p>
+          <a:p>
+            <a:r>
+              <a:t>STAKEHOLDERS: The blind spots are specific: employees who deliver value, investors who fund it, regulators who permit it.</a:t>
+            </a:r>
+          </a:p>
         </p:txBody>
       </p:sp>
       <p:sp>
@@ -4028,6 +4561,66 @@
           <a:p/>
           <a:p>
             <a:r>
+              <a:t>Source detail (S2R® manuscript):</a:t>
+            </a:r>
+          </a:p>
+          <a:p/>
+          <a:p>
+            <a:r>
+              <a:t>What strategic intent is: Strategic intent is the crystallisation of the 3Ws and H into a single, expressible position. It is the directional anchor from which every other strategic choice must flow, and it stops short of being the full strategy. The four dimensions are interdependent: answering only two or three creates a structurally incomplete strategy.</a:t>
+            </a:r>
+          </a:p>
+          <a:p>
+            <a:r>
+              <a:t>Critical Insight (further detail): Unclear WHAT and WHY are seldom the cause of failure. For HOW, high-level aspiration is insufficient. For WHEN, a project milestone list is insufficient.</a:t>
+            </a:r>
+          </a:p>
+          <a:p/>
+          <a:p>
+            <a:r>
+              <a:t>Further core questions. WHY: Why does our approach create more value than others? HOW: How do we organise and resource the work?</a:t>
+            </a:r>
+          </a:p>
+          <a:p>
+            <a:r>
+              <a:t>WHEN, the pace question in full: Are we moving at the right pace, fast enough to catch the windows and slow enough to build solidly?</a:t>
+            </a:r>
+          </a:p>
+          <a:p/>
+          <a:p>
+            <a:r>
+              <a:t>A well-formed strategic intent answers all four questions simultaneously:</a:t>
+            </a:r>
+          </a:p>
+          <a:p>
+            <a:r>
+              <a:t>WHAT: What value are we creating?</a:t>
+            </a:r>
+          </a:p>
+          <a:p>
+            <a:r>
+              <a:t>WHY: Why will stakeholders choose us?</a:t>
+            </a:r>
+          </a:p>
+          <a:p>
+            <a:r>
+              <a:t>HOW: How will we deliver this value?</a:t>
+            </a:r>
+          </a:p>
+          <a:p>
+            <a:r>
+              <a:t>WHEN: When will we act?</a:t>
+            </a:r>
+          </a:p>
+          <a:p/>
+          <a:p>
+            <a:r>
+              <a:t>Without a clear strategic intent (further consequences): Every investment becomes a negotiation without a shared reference point. Every performance review becomes a contest between competing definitions of success. Strategic intent is not a slogan.</a:t>
+            </a:r>
+          </a:p>
+          <a:p/>
+          <a:p>
+            <a:r>
               <a:t>Professional insights:</a:t>
             </a:r>
           </a:p>
@@ -4149,6 +4742,80 @@
 A narrative of how the organisation operates when success has been achieved, structured across four observable future-reality dimensions. Leaders describe an operating reality they intend to build.</a:t>
             </a:r>
             <a:endParaRPr lang="en-US" dirty="0"/>
+          </a:p>
+          <a:p/>
+          <a:p>
+            <a:r>
+              <a:t>Source detail (S2R® manuscript):</a:t>
+            </a:r>
+          </a:p>
+          <a:p/>
+          <a:p>
+            <a:r>
+              <a:t>From intent to future reality: Once the strategic intent is locked (once the organisation has answered WHAT, WHY, HOW, and WHEN), the next step is to translate that cognitive clarity into an observable future reality. The facilitator guides the team through a deliberate shift.</a:t>
+            </a:r>
+          </a:p>
+          <a:p>
+            <a:r>
+              <a:t>Further line for the facilitation move: “Assume the strategy has worked. From here, we are observing.” Intentions and plans stay out of the description.</a:t>
+            </a:r>
+          </a:p>
+          <a:p>
+            <a:r>
+              <a:t>The 3W1H in lived form, in the order listed above: WHAT (the value as customers experience it), WHY (stakeholder trust, choice and advocacy), HOW (the way the organisation operates), WHEN (pace, sequencing and responsiveness).</a:t>
+            </a:r>
+          </a:p>
+          <a:p>
+            <a:r>
+              <a:t>Why four domains: Anchoring the narrative in four observable domains that determine success in practice avoids vague storytelling.</a:t>
+            </a:r>
+          </a:p>
+          <a:p/>
+          <a:p>
+            <a:r>
+              <a:t>What SiP does: Success in Practice (SiP) translates strategic intent into a clear picture of the future operating reality of the organisation. It answers the question that most strategy processes fail to address clearly (the question quoted above).</a:t>
+            </a:r>
+          </a:p>
+          <a:p>
+            <a:r>
+              <a:t>This framing produces several critical effects for an executive team:</a:t>
+            </a:r>
+          </a:p>
+          <a:p>
+            <a:r>
+              <a:t>- Removes ambiguity about what the strategy is actually aiming to produce.</a:t>
+            </a:r>
+          </a:p>
+          <a:p>
+            <a:r>
+              <a:t>- Creates a shared mental model of the future state across all functions.</a:t>
+            </a:r>
+          </a:p>
+          <a:p>
+            <a:r>
+              <a:t>- Provides a decision filter: every initiative, investment, and priority can be tested against it.</a:t>
+            </a:r>
+          </a:p>
+          <a:p>
+            <a:r>
+              <a:t>- Enables recognition of progress: leaders can see alignment and momentum during execution.</a:t>
+            </a:r>
+          </a:p>
+          <a:p/>
+          <a:p>
+            <a:r>
+              <a:t>The two forms of SiP (further detail):</a:t>
+            </a:r>
+          </a:p>
+          <a:p>
+            <a:r>
+              <a:t>Headline: The short-form expression of the SiP. Memorable, inspirational, and directional. It is the portable version of the strategy, repeated in operational reviews as well as in meetings, town halls and board discussions.</a:t>
+            </a:r>
+          </a:p>
+          <a:p>
+            <a:r>
+              <a:t>Storyline: It enables leaders to visualise the future organisation as if it already exists. The leadership conversation moves from debating abstract strategic ideas to describing an operating reality.</a:t>
+            </a:r>
           </a:p>
         </p:txBody>
       </p:sp>

--- a/Unit decks/Unit 02 - Strategy Visioning & Success in Practice (SiP).pptx
+++ b/Unit decks/Unit 02 - Strategy Visioning & Success in Practice (SiP).pptx
@@ -827,7 +827,7 @@
           <a:p>
             <a:r>
               <a:rPr lang="en-US" dirty="0"/>
-              <a:t>1. Explain how a shared strategic ambition and a shared picture of success keep leaders and functions aligned.</a:t>
+              <a:t>1. Align leaders and functions around a shared strategic ambition and a shared picture of success.</a:t>
             </a:r>
           </a:p>
           <a:p>
@@ -9948,14 +9948,14 @@
           <a:p>
             <a:r>
               <a:rPr lang="en-US" b="1" dirty="0"/>
-              <a:t>SECTION LEARNING OUTCOMES:</a:t>
-            </a:r>
-            <a:r>
-              <a:rPr lang="en-US" dirty="0"/>
-              <a:t>
-1. Redefine strategy to create a robust understanding of strategy architecture.
+              <a:t>SECTION LEARNING OUTCOMES:
+1. Define strategy through the architecture that connects direction to success.
 2. Distinguish the direction an organisation sets from the future position that defines its success.
 </a:t>
+            </a:r>
+            <a:r>
+              <a:rPr lang="en-US" dirty="0"/>
+              <a:t/>
             </a:r>
           </a:p>
           <a:p>
@@ -13856,7 +13856,7 @@
                 <a:ea typeface="Calibri" pitchFamily="34" charset="-122"/>
                 <a:cs typeface="Calibri" pitchFamily="34" charset="-120"/>
               </a:rPr>
-              <a:t>Explain how a shared strategic ambition and a shared picture of success keep leaders and functions aligned.</a:t>
+              <a:t>Align leaders and functions around a shared strategic ambition and a shared picture of success.</a:t>
             </a:r>
             <a:endParaRPr lang="en-US" sz="2400" dirty="0"/>
           </a:p>
@@ -30919,7 +30919,7 @@
                 <a:ea typeface="Calibri" pitchFamily="34" charset="-122"/>
                 <a:cs typeface="Calibri" pitchFamily="34" charset="-120"/>
               </a:rPr>
-              <a:t>Redefine strategy to create a robust understanding of strategy architecture.</a:t>
+              <a:t>Define strategy through the architecture that connects direction to success.</a:t>
             </a:r>
             <a:endParaRPr lang="en-US" sz="2400" dirty="0"/>
           </a:p>

--- a/Unit decks/Unit 02 - Strategy Visioning & Success in Practice (SiP).pptx
+++ b/Unit decks/Unit 02 - Strategy Visioning & Success in Practice (SiP).pptx
@@ -1086,7 +1086,7 @@
           <a:p>
             <a:r>
               <a:rPr lang="en-US" b="1" dirty="0"/>
-              <a:t>3. Leave one question in the room.</a:t>
+              <a:t>3. Leave one question with the group.</a:t>
             </a:r>
           </a:p>
           <a:p>
@@ -2203,7 +2203,7 @@
           <a:p>
             <a:r>
               <a:rPr lang="en-US" dirty="0"/>
-              <a:t>Take a show of hands for each function and say what the pattern in the room is.</a:t>
+              <a:t>Take a show of hands for each function and say what pattern the group shows.</a:t>
             </a:r>
           </a:p>
           <a:p>
@@ -10451,7 +10451,7 @@
           <a:p>
             <a:r>
               <a:rPr lang="en-US" b="1" dirty="0"/>
-              <a:t>5. Leave one question in the room.</a:t>
+              <a:t>5. Leave one question with the group.</a:t>
             </a:r>
           </a:p>
           <a:p>
@@ -12210,7 +12210,7 @@
           <a:p>
             <a:r>
               <a:rPr lang="en-US" dirty="0"/>
-              <a:t>Take a show of hands for each dimension and say what the pattern in the room is. </a:t>
+              <a:t>Take a show of hands for each dimension and say what pattern the group shows. </a:t>
             </a:r>
           </a:p>
           <a:p>
@@ -27625,7 +27625,7 @@
                 <a:ea typeface="Cambria" pitchFamily="34" charset="-122"/>
                 <a:cs typeface="Cambria" pitchFamily="34" charset="-120"/>
               </a:rPr>
-              <a:t>4.3 Step 3: Build Success in Practice</a:t>
+              <a:t>4.3 · Step 3: Build Success in Practice</a:t>
             </a:r>
             <a:endParaRPr lang="en-US" sz="3600" dirty="0"/>
           </a:p>
@@ -29436,7 +29436,7 @@
                 <a:ea typeface="Cambria" pitchFamily="34" charset="-122"/>
                 <a:cs typeface="Cambria" pitchFamily="34" charset="-120"/>
               </a:rPr>
-              <a:t>5.1 Role Contribution to SiP</a:t>
+              <a:t>5.1 · Role Contribution to SiP</a:t>
             </a:r>
             <a:endParaRPr lang="en-US" sz="3600" dirty="0"/>
           </a:p>
@@ -31420,7 +31420,7 @@
                 <a:ea typeface="Cambria" pitchFamily="34" charset="-122"/>
                 <a:cs typeface="Cambria" pitchFamily="34" charset="-120"/>
               </a:rPr>
-              <a:t>1.1· Building the Strategy Architecture</a:t>
+              <a:t>1.1 · Building the Strategy Architecture</a:t>
             </a:r>
             <a:endParaRPr lang="en-US" sz="3600" dirty="0"/>
           </a:p>
@@ -33263,7 +33263,7 @@
                 <a:ea typeface="Cambria" pitchFamily="34" charset="-122"/>
                 <a:cs typeface="Cambria" pitchFamily="34" charset="-120"/>
               </a:rPr>
-              <a:t>1.3 · Defining the Success In Practice</a:t>
+              <a:t>1.3 · Defining the Success in Practice</a:t>
             </a:r>
             <a:endParaRPr lang="en-US" sz="3600" dirty="0"/>
           </a:p>

--- a/Unit decks/Unit 02 - Strategy Visioning & Success in Practice (SiP).pptx
+++ b/Unit decks/Unit 02 - Strategy Visioning & Success in Practice (SiP).pptx
@@ -827,21 +827,21 @@
           <a:p>
             <a:r>
               <a:rPr lang="en-US" dirty="0"/>
-              <a:t>1. Align leaders and functions around a shared strategic ambition and a shared picture of success.</a:t>
-            </a:r>
-          </a:p>
-          <a:p>
-            <a:r>
-              <a:rPr lang="en-US" dirty="0"/>
-              <a:t>2. </a:t>
+              <a:t>1. Reconcile leadership perspectives into a shared strategic ambition and picture of success.</a:t>
+            </a:r>
+          </a:p>
+          <a:p>
+            <a:r>
+              <a:rPr lang="en-US" dirty="0"/>
+              <a:t>2. Apply strategic direction as a consistent basis for enterprise decisions.</a:t>
             </a:r>
             <a:r>
               <a:rPr lang="en-US" dirty="0" err="1"/>
-              <a:t>Recognise</a:t>
-            </a:r>
-            <a:r>
-              <a:rPr lang="en-US" dirty="0"/>
-              <a:t> how a shared direction filters decisions throughout execution.</a:t>
+              <a:t/>
+            </a:r>
+            <a:r>
+              <a:rPr lang="en-US" dirty="0"/>
+              <a:t/>
             </a:r>
           </a:p>
           <a:p>
@@ -2356,21 +2356,21 @@
           <a:p>
             <a:r>
               <a:rPr lang="en-US" dirty="0"/>
-              <a:t>1. Use observable indicators to examine what success looks like within each of the four </a:t>
+              <a:t>1. Specify observable evidence of success across the four SiP domains.</a:t>
             </a:r>
             <a:r>
               <a:rPr lang="en-US" dirty="0" err="1"/>
-              <a:t>SiP</a:t>
-            </a:r>
-            <a:r>
-              <a:rPr lang="en-US" dirty="0"/>
-              <a:t> domains.</a:t>
-            </a:r>
-          </a:p>
-          <a:p>
-            <a:r>
-              <a:rPr lang="en-US" dirty="0"/>
-              <a:t>2. Distinguish between conditions that demonstrate success and signals that those conditions are absent.</a:t>
+              <a:t/>
+            </a:r>
+            <a:r>
+              <a:rPr lang="en-US" dirty="0"/>
+              <a:t/>
+            </a:r>
+          </a:p>
+          <a:p>
+            <a:r>
+              <a:rPr lang="en-US" dirty="0"/>
+              <a:t>2. Interpret gaps between intended success and current conditions to identify strategic misalignment.</a:t>
             </a:r>
           </a:p>
           <a:p>
@@ -5954,13 +5954,13 @@
           <a:p>
             <a:r>
               <a:rPr lang="en-US" dirty="0"/>
-              <a:t>1. Build a coherent Strategy Architecture.</a:t>
-            </a:r>
-          </a:p>
-          <a:p>
-            <a:r>
-              <a:rPr lang="en-US" dirty="0"/>
-              <a:t>2. Integrate different leadership perspectives into one shared enterprise position.</a:t>
+              <a:t>1. Integrate the elements of Strategy Architecture into a coherent enterprise strategy.</a:t>
+            </a:r>
+          </a:p>
+          <a:p>
+            <a:r>
+              <a:rPr lang="en-US" dirty="0"/>
+              <a:t>2. Synthesise diverse leadership perspectives into an agreed enterprise position.</a:t>
             </a:r>
           </a:p>
           <a:p>
@@ -8643,13 +8643,13 @@
           <a:p>
             <a:r>
               <a:rPr lang="en-US" dirty="0"/>
-              <a:t>1. Apply the agreed Success in Practice to specific executive roles.</a:t>
-            </a:r>
-          </a:p>
-          <a:p>
-            <a:r>
-              <a:rPr lang="en-US" dirty="0"/>
-              <a:t>2. Define what each leadership role must contribute to make the Strategy Intent real.</a:t>
+              <a:t>1. Translate Success in Practice into clear executive contribution expectations.</a:t>
+            </a:r>
+          </a:p>
+          <a:p>
+            <a:r>
+              <a:rPr lang="en-US" dirty="0"/>
+              <a:t>2. Coordinate leadership contributions required to realise strategic intent.</a:t>
             </a:r>
           </a:p>
           <a:p>
@@ -9949,8 +9949,8 @@
             <a:r>
               <a:rPr lang="en-US" b="1" dirty="0"/>
               <a:t>SECTION LEARNING OUTCOMES:
-1. Define strategy through the architecture that connects direction to success.
-2. Distinguish the direction an organisation sets from the future position that defines its success.
+1. Frame strategic direction in terms of the value and success the organisation intends to create.
+2. Differentiate strategic direction from the future position it seeks while maintaining coherence between them.
 </a:t>
             </a:r>
             <a:r>
@@ -13856,7 +13856,7 @@
                 <a:ea typeface="Calibri" pitchFamily="34" charset="-122"/>
                 <a:cs typeface="Calibri" pitchFamily="34" charset="-120"/>
               </a:rPr>
-              <a:t>Align leaders and functions around a shared strategic ambition and a shared picture of success.</a:t>
+              <a:t>Reconcile leadership perspectives into a shared strategic ambition and picture of success.</a:t>
             </a:r>
             <a:endParaRPr lang="en-US" sz="2400" dirty="0"/>
           </a:p>
@@ -13951,7 +13951,7 @@
                 <a:ea typeface="Calibri" pitchFamily="34" charset="-122"/>
                 <a:cs typeface="Calibri" pitchFamily="34" charset="-120"/>
               </a:rPr>
-              <a:t>Recognise how a shared direction filters decisions throughout execution.</a:t>
+              <a:t>Apply strategic direction as a consistent basis for enterprise decisions.</a:t>
             </a:r>
             <a:endParaRPr lang="en-US" sz="2400" dirty="0"/>
           </a:p>
@@ -16901,7 +16901,7 @@
                 <a:ea typeface="Calibri" pitchFamily="34" charset="-122"/>
                 <a:cs typeface="Calibri" pitchFamily="34" charset="-120"/>
               </a:rPr>
-              <a:t>Use observable indicators to examine what success looks like within each of the four SiP domains.</a:t>
+              <a:t>Specify observable evidence of success across the four SiP domains.</a:t>
             </a:r>
             <a:endParaRPr lang="en-US" sz="2400" dirty="0"/>
           </a:p>
@@ -16996,7 +16996,7 @@
                 <a:ea typeface="Calibri" pitchFamily="34" charset="-122"/>
                 <a:cs typeface="Calibri" pitchFamily="34" charset="-120"/>
               </a:rPr>
-              <a:t>Distinguish between conditions that demonstrate success and signals that those conditions are absent.</a:t>
+              <a:t>Interpret gaps between intended success and current conditions to identify strategic misalignment.</a:t>
             </a:r>
             <a:endParaRPr lang="en-US" sz="2400" dirty="0"/>
           </a:p>
@@ -18476,7 +18476,7 @@
                 <a:ea typeface="Calibri" pitchFamily="34" charset="-122"/>
                 <a:cs typeface="Calibri" pitchFamily="34" charset="-120"/>
               </a:rPr>
-              <a:t>Define strategy architecture and articulate strategic intent in relation to the organisation’s purpose, long-term value and stakeholder relevance.</a:t>
+              <a:t>Design a coherent strategic direction that connects organisational purpose, stakeholder value and long-term ambition.</a:t>
             </a:r>
             <a:endParaRPr lang="en-US" sz="2400" dirty="0"/>
           </a:p>
@@ -18571,7 +18571,7 @@
                 <a:ea typeface="Calibri" pitchFamily="34" charset="-122"/>
                 <a:cs typeface="Calibri" pitchFamily="34" charset="-120"/>
               </a:rPr>
-              <a:t>Define a coherent future position and the organisational meaning of success.</a:t>
+              <a:t>Articulate a shared future position and define what organisational success will look like in practice.</a:t>
             </a:r>
             <a:endParaRPr lang="en-US" sz="2400" dirty="0"/>
           </a:p>
@@ -18666,7 +18666,7 @@
                 <a:ea typeface="Calibri" pitchFamily="34" charset="-122"/>
                 <a:cs typeface="Calibri" pitchFamily="34" charset="-120"/>
               </a:rPr>
-              <a:t>Evaluate the consistency between strategic ambition, organisational identity and the realities of the operating environment.</a:t>
+              <a:t>Test strategic ambition against organisational identity and operating realities to strengthen its feasibility.</a:t>
             </a:r>
             <a:endParaRPr lang="en-US" sz="2400" dirty="0"/>
           </a:p>
@@ -18761,7 +18761,7 @@
                 <a:ea typeface="Calibri" pitchFamily="34" charset="-122"/>
                 <a:cs typeface="Calibri" pitchFamily="34" charset="-120"/>
               </a:rPr>
-              <a:t>Establish a shared strategic direction that supports consistent enterprise interpretation and decision-making.</a:t>
+              <a:t>Align enterprise decisions and leadership interpretation around a common strategic direction.</a:t>
             </a:r>
             <a:endParaRPr lang="en-US" sz="2400" dirty="0"/>
           </a:p>
@@ -22211,7 +22211,7 @@
                 <a:ea typeface="Calibri" pitchFamily="34" charset="-122"/>
                 <a:cs typeface="Calibri" pitchFamily="34" charset="-120"/>
               </a:rPr>
-              <a:t>Build a coherent Strategy Architecture.</a:t>
+              <a:t>Integrate the elements of Strategy Architecture into a coherent enterprise strategy.</a:t>
             </a:r>
             <a:endParaRPr lang="en-US" sz="2400" dirty="0"/>
           </a:p>
@@ -22306,7 +22306,7 @@
                 <a:ea typeface="Calibri" pitchFamily="34" charset="-122"/>
                 <a:cs typeface="Calibri" pitchFamily="34" charset="-120"/>
               </a:rPr>
-              <a:t>Integrate different leadership perspectives into one shared enterprise position.</a:t>
+              <a:t>Synthesise diverse leadership perspectives into an agreed enterprise position.</a:t>
             </a:r>
             <a:endParaRPr lang="en-US" sz="2400" dirty="0"/>
           </a:p>
@@ -29269,7 +29269,7 @@
                 <a:ea typeface="Calibri" pitchFamily="34" charset="-122"/>
                 <a:cs typeface="Calibri" pitchFamily="34" charset="-120"/>
               </a:rPr>
-              <a:t>Apply the agreed Success in Practice to specific executive roles.</a:t>
+              <a:t>Translate Success in Practice into clear executive contribution expectations.</a:t>
             </a:r>
             <a:endParaRPr lang="en-US" sz="2400" dirty="0"/>
           </a:p>
@@ -29364,7 +29364,7 @@
                 <a:ea typeface="Calibri" pitchFamily="34" charset="-122"/>
                 <a:cs typeface="Calibri" pitchFamily="34" charset="-120"/>
               </a:rPr>
-              <a:t>Define what each leadership role must contribute to make the Strategy Intent real.</a:t>
+              <a:t>Coordinate leadership contributions required to realise strategic intent.</a:t>
             </a:r>
             <a:endParaRPr lang="en-US" sz="2400" dirty="0"/>
           </a:p>
@@ -30919,7 +30919,7 @@
                 <a:ea typeface="Calibri" pitchFamily="34" charset="-122"/>
                 <a:cs typeface="Calibri" pitchFamily="34" charset="-120"/>
               </a:rPr>
-              <a:t>Define strategy through the architecture that connects direction to success.</a:t>
+              <a:t>Frame strategic direction in terms of the value and success the organisation intends to create.</a:t>
             </a:r>
             <a:endParaRPr lang="en-US" sz="2400" dirty="0"/>
           </a:p>
@@ -31014,7 +31014,7 @@
                 <a:ea typeface="Calibri" pitchFamily="34" charset="-122"/>
                 <a:cs typeface="Calibri" pitchFamily="34" charset="-120"/>
               </a:rPr>
-              <a:t>Distinguish the direction an organisation sets from the future position that defines its success.</a:t>
+              <a:t>Differentiate strategic direction from the future position it seeks while maintaining coherence between them.</a:t>
             </a:r>
             <a:endParaRPr lang="en-US" sz="2400" dirty="0"/>
           </a:p>

--- a/Unit decks/Unit 02 - Strategy Visioning & Success in Practice (SiP).pptx
+++ b/Unit decks/Unit 02 - Strategy Visioning & Success in Practice (SiP).pptx
@@ -317,102 +317,134 @@
           <a:lstStyle/>
           <a:p>
             <a:r>
-              <a:rPr lang="en-US" dirty="0"/>
-              <a:t>UNIT 2 · STRATEGY VISIONING &amp; SUCCESS IN PRACTICE (SiP)
-Module 2 · Direction · Unit 2
-</a:t>
-            </a:r>
-            <a:r>
-              <a:rPr lang="en-US" b="1" dirty="0"/>
+              <a:t>UNIT 2 · STRATEGY VISIONING &amp; SUCCESS IN PRACTICE (SiP)</a:t>
+            </a:r>
+          </a:p>
+          <a:p>
+            <a:r>
+              <a:t>Module 2 · Direction · Unit 2</a:t>
+            </a:r>
+          </a:p>
+          <a:p/>
+          <a:p>
+            <a:r>
+              <a:rPr b="1"/>
               <a:t>UNIT INTENT</a:t>
             </a:r>
-            <a:r>
-              <a:rPr lang="en-US" dirty="0"/>
-              <a:t>
-Unit overview (facilitator file): This unit helps leaders to determine the organisation’s strategy architecture, articulate its strategic intent and define the Success in Practice (SiP) of the chosen Strategy Intent.</a:t>
-            </a:r>
-          </a:p>
-          <a:p>
-            <a:endParaRPr lang="en-US" dirty="0"/>
-          </a:p>
-          <a:p>
-            <a:r>
-              <a:rPr lang="en-US" dirty="0"/>
+          </a:p>
+          <a:p>
+            <a:r>
+              <a:t>Unit overview (facilitator file): This unit helps leaders to determine the organisation’s strategy architecture, articulate its strategic intent and define the Success in Practice (SiP) of the chosen Strategy Intent.</a:t>
+            </a:r>
+          </a:p>
+          <a:p/>
+          <a:p>
+            <a:r>
               <a:t>Before the organisation can define where it is going, leaders must agree on what strategy actually means, in the precise, strategic sense, translated to operational reality, that makes every subsequent decision coherent.</a:t>
             </a:r>
           </a:p>
-          <a:p>
-            <a:r>
-              <a:rPr lang="en-US" dirty="0"/>
-              <a:t>
-Three connected outputs carry the unit: the Strategy Architecture, the Strategy Intent Statement and Success in Practice. </a:t>
-            </a:r>
-          </a:p>
-          <a:p>
-            <a:r>
-              <a:rPr lang="en-US" dirty="0"/>
-              <a:t>
-</a:t>
-            </a:r>
-            <a:r>
-              <a:rPr lang="en-US" b="1" dirty="0"/>
+          <a:p/>
+          <a:p>
+            <a:r>
+              <a:t>Three connected outputs carry the unit: the Strategy Architecture, the Strategy Intent Statement and Success in Practice.</a:t>
+            </a:r>
+          </a:p>
+          <a:p/>
+          <a:p>
+            <a:r>
+              <a:rPr b="1"/>
               <a:t>WHAT THE UNIT PRODUCES:</a:t>
             </a:r>
-            <a:r>
-              <a:rPr lang="en-US" dirty="0"/>
-              <a:t>
-Each group builds three connected outputs, in this order.
-1. The Strategy Architecture: the integrated strategic logic constructed from the 14 elements of the Strategy2Results® definition of strategy.
-2. The Strategy Intent Statement: one crisp statement of strategic ambition derived from WHAT, WHY, HOW and WHEN.
-3. Success in Practice (SiP): four confirmed statements, one for each SiP domain, read together as one picture of success.
-The Architecture provides the logic. The Intent crystallises the ambition. Success in Practice makes the ambition observable.
-</a:t>
-            </a:r>
-            <a:r>
-              <a:rPr lang="en-US" b="1" dirty="0"/>
+          </a:p>
+          <a:p>
+            <a:r>
+              <a:t>Each group builds three connected outputs, in this order.</a:t>
+            </a:r>
+          </a:p>
+          <a:p>
+            <a:r>
+              <a:rPr b="1"/>
+              <a:t>1. The Strategy Architecture: the integrated strategic logic constructed from the 14 elements of the Strategy2Results® definition of strategy.</a:t>
+            </a:r>
+          </a:p>
+          <a:p>
+            <a:r>
+              <a:rPr b="1"/>
+              <a:t>2. The Strategy Intent Statement: one crisp statement of strategic ambition derived from WHAT, WHY, HOW and WHEN.</a:t>
+            </a:r>
+          </a:p>
+          <a:p>
+            <a:r>
+              <a:rPr b="1"/>
+              <a:t>3. Success in Practice (SiP): four confirmed statements, one for each SiP domain, read together as one picture of success.</a:t>
+            </a:r>
+          </a:p>
+          <a:p>
+            <a:r>
+              <a:t>The Architecture provides the logic. The Intent crystallises the ambition. Success in Practice makes the ambition observable.</a:t>
+            </a:r>
+          </a:p>
+          <a:p/>
+          <a:p>
+            <a:r>
+              <a:rPr b="1"/>
               <a:t>HOW THE UNIT RUNS:</a:t>
             </a:r>
-            <a:r>
-              <a:rPr lang="en-US" dirty="0"/>
-              <a:t>
-1. You teach the whole unit from this deck first, from Section 1 to the Unit Summary. The deck is the teaching material.
-2. Participants then go to the portal and complete their own page, in the session or after it: the opening definition of strategy, the reflections, the three Section 4 outputs, the role contribution and the 5.2 observations.
-3. Section 4 on the portal is group work. The group agrees each entry and one member acts as scribe. </a:t>
-            </a:r>
-          </a:p>
-          <a:p>
-            <a:r>
-              <a:rPr lang="en-US" dirty="0"/>
-              <a:t>Every member then types the agreed entries into their own page.
-4. Section 5 on the portal is individual work from an assigned executive role, followed by each group sharing with the room.
-</a:t>
-            </a:r>
-          </a:p>
-          <a:p>
-            <a:r>
-              <a:rPr lang="en-US" dirty="0"/>
-              <a:t>Each slide's notes end with a block headed "On the portal, after the teaching" wherever participants have something to complete for that part.
-Your preparation as facilitator:
-- Read the Facilitator Guide tab and every section of the facilitator file. 
-</a:t>
-            </a:r>
-            <a:r>
-              <a:rPr lang="en-US" b="1" dirty="0"/>
+          </a:p>
+          <a:p>
+            <a:r>
+              <a:rPr b="1"/>
+              <a:t>1. You teach the whole unit from this deck first, from Section 1 to the Unit Summary. The deck is the teaching material.</a:t>
+            </a:r>
+          </a:p>
+          <a:p>
+            <a:r>
+              <a:rPr b="1"/>
+              <a:t>2. Participants then go to the portal and complete their own page, in the session or after it: the opening definition of strategy, the reflections and the group work of Section 5.</a:t>
+            </a:r>
+          </a:p>
+          <a:p>
+            <a:r>
+              <a:rPr b="1"/>
+              <a:t>3. Section 4 is one worked example, Kestrel Point Services, read on the portal and taught from the deck.</a:t>
+            </a:r>
+          </a:p>
+          <a:p>
+            <a:r>
+              <a:rPr b="1"/>
+              <a:t>4. Section 5 on the portal is group work for the Capstone. The group builds its own simulated company's Strategy Architecture, Strategy Intent Statement and Success in Practice. The group chooses its scribe for this work; the scribe types what the group agrees, and the entries appear on every member's page. Each member then selects Agree.</a:t>
+            </a:r>
+          </a:p>
+          <a:p/>
+          <a:p>
+            <a:r>
+              <a:t>Each slide's notes end with a block headed "On the portal, after the teaching" wherever participants have something to complete for that part.</a:t>
+            </a:r>
+          </a:p>
+          <a:p/>
+          <a:p>
+            <a:r>
+              <a:t>Your preparation as facilitator:</a:t>
+            </a:r>
+          </a:p>
+          <a:p>
+            <a:r>
+              <a:t>- Read the Facilitator Guide tab and every section of the facilitator file.</a:t>
+            </a:r>
+          </a:p>
+          <a:p/>
+          <a:p>
+            <a:r>
               <a:t>Where the outputs go next:</a:t>
             </a:r>
-            <a:r>
-              <a:rPr lang="en-US" dirty="0"/>
-              <a:t>
-- The three confirmed outputs feed the team's Capstone Blueprint. </a:t>
-            </a:r>
-          </a:p>
-          <a:p>
-            <a:r>
-              <a:rPr lang="en-US" dirty="0"/>
-              <a:t>
-</a:t>
-            </a:r>
-          </a:p>
+          </a:p>
+          <a:p>
+            <a:r>
+              <a:t>- When every member has agreed, the three outputs feed the team's Capstone Blueprint, boxes 2A to 2F.</a:t>
+            </a:r>
+          </a:p>
+          <a:p/>
+          <a:p/>
         </p:txBody>
       </p:sp>
       <p:sp>
@@ -496,178 +528,133 @@
           <a:lstStyle/>
           <a:p>
             <a:r>
-              <a:rPr lang="en-US" b="1" dirty="0"/>
+              <a:rPr b="1"/>
               <a:t>SECTION 1 REFLECTIONS</a:t>
             </a:r>
           </a:p>
-          <a:p>
-            <a:endParaRPr lang="en-US" dirty="0"/>
-          </a:p>
-          <a:p>
-            <a:r>
-              <a:rPr lang="en-US" b="1" dirty="0"/>
+          <a:p/>
+          <a:p>
+            <a:r>
+              <a:rPr b="1"/>
               <a:t>HOW TO USE THIS SLIDE:</a:t>
             </a:r>
           </a:p>
-          <a:p>
-            <a:endParaRPr lang="en-US" dirty="0"/>
-          </a:p>
-          <a:p>
-            <a:r>
-              <a:rPr lang="en-US" b="1" dirty="0"/>
-              <a:t>1. Show the slide and read the two prompts aloud.</a:t>
-            </a:r>
-          </a:p>
-          <a:p>
-            <a:r>
-              <a:rPr lang="en-US" dirty="0"/>
+          <a:p/>
+          <a:p>
+            <a:r>
+              <a:rPr b="1"/>
+              <a:t>1. Show the slide and read the prompt aloud.</a:t>
+            </a:r>
+          </a:p>
+          <a:p>
+            <a:r>
               <a:t>1.1 Reflection — Strategy Architecture: "Which part of your organisation's strategy architecture is least well defined today? What is the consequence?"</a:t>
             </a:r>
           </a:p>
-          <a:p>
-            <a:r>
-              <a:rPr lang="en-US" dirty="0"/>
-              <a:t>1.2 Reflection — Strategy Intent: "From your assigned executive leader perspective: which dimension (WHAT, WHY, HOW, WHEN) is least clearly defined in your organisation's current strategy? What would clarifying it change?"</a:t>
-            </a:r>
-          </a:p>
-          <a:p>
-            <a:endParaRPr lang="en-US" dirty="0"/>
-          </a:p>
-          <a:p>
-            <a:r>
-              <a:rPr lang="en-US" b="1" dirty="0"/>
-              <a:t>2. Say what the reflections are for.</a:t>
-            </a:r>
-          </a:p>
-          <a:p>
-            <a:r>
-              <a:rPr lang="en-US" dirty="0"/>
-              <a:t>Point learners to the portal section that they will be required to complete with as much depth as possible. </a:t>
-            </a:r>
-          </a:p>
-          <a:p>
-            <a:r>
-              <a:rPr lang="en-US" dirty="0"/>
+          <a:p/>
+          <a:p>
+            <a:r>
+              <a:rPr b="1"/>
+              <a:t>2. Say what the reflection is for.</a:t>
+            </a:r>
+          </a:p>
+          <a:p>
+            <a:r>
+              <a:t>Point learners to the portal section that they will be required to complete with as much depth as possible.</a:t>
+            </a:r>
+          </a:p>
+          <a:p>
+            <a:r>
               <a:t>The reflections build the learning portfolio they receive at the end of the programme.</a:t>
             </a:r>
           </a:p>
-          <a:p>
-            <a:endParaRPr lang="en-US" dirty="0"/>
-          </a:p>
-          <a:p>
-            <a:r>
-              <a:rPr lang="en-US" b="1" dirty="0"/>
-              <a:t>Say</a:t>
-            </a:r>
-            <a:r>
-              <a:rPr lang="en-US" dirty="0"/>
-              <a:t>: "You write these reflections on the portal after the teaching, with as much depth as you can."</a:t>
-            </a:r>
-          </a:p>
-          <a:p>
-            <a:endParaRPr lang="en-US" dirty="0"/>
-          </a:p>
-          <a:p>
-            <a:r>
-              <a:rPr lang="en-US" b="1" dirty="0"/>
+          <a:p/>
+          <a:p>
+            <a:r>
+              <a:rPr b="1"/>
+              <a:t>Say: </a:t>
+            </a:r>
+            <a:r>
+              <a:rPr/>
+              <a:t>"You write this reflection on the portal after the teaching, with as much depth as you can."</a:t>
+            </a:r>
+          </a:p>
+          <a:p/>
+          <a:p>
+            <a:r>
+              <a:rPr b="1"/>
               <a:t>3. Set the standard for 1.1.</a:t>
             </a:r>
           </a:p>
           <a:p>
             <a:r>
-              <a:rPr lang="en-US" b="1" dirty="0"/>
+              <a:rPr b="1"/>
               <a:t>Say: </a:t>
             </a:r>
             <a:r>
-              <a:rPr lang="en-US" dirty="0"/>
+              <a:rPr/>
               <a:t>"Name one concept from the nine, give evidence from your own organisation, and name one consequence you have seen: what the gap costs, slows down or leaves undecided.“</a:t>
             </a:r>
           </a:p>
-          <a:p>
-            <a:endParaRPr lang="en-US" dirty="0"/>
-          </a:p>
-          <a:p>
-            <a:r>
-              <a:rPr lang="en-US" dirty="0"/>
-              <a:t>Deepen, say: "Strategy begins with an accurate understanding of present reality. </a:t>
-            </a:r>
-          </a:p>
-          <a:p>
-            <a:r>
-              <a:rPr lang="en-US" dirty="0"/>
-              <a:t>Leaders who avoid difficult information protect their comfort at the expense of the institution. </a:t>
-            </a:r>
-          </a:p>
-          <a:p>
-            <a:r>
-              <a:rPr lang="en-US" dirty="0"/>
+          <a:p/>
+          <a:p>
+            <a:r>
+              <a:rPr b="1"/>
+              <a:t>Deepen, say: </a:t>
+            </a:r>
+            <a:r>
+              <a:rPr/>
+              <a:t>"Strategy begins with an accurate understanding of present reality.</a:t>
+            </a:r>
+          </a:p>
+          <a:p>
+            <a:r>
+              <a:t>Leaders who avoid difficult information protect their comfort at the expense of the institution.</a:t>
+            </a:r>
+          </a:p>
+          <a:p>
+            <a:r>
               <a:t>Name the true condition without minimising it."</a:t>
             </a:r>
           </a:p>
           <a:p>
             <a:r>
-              <a:rPr lang="en-US" dirty="0"/>
               <a:t>(Insight: An honest baseline. Source: Journal, 4 August 2026 — Professional Insights: Strategy)</a:t>
             </a:r>
           </a:p>
-          <a:p>
-            <a:endParaRPr lang="en-US" dirty="0"/>
-          </a:p>
-          <a:p>
-            <a:r>
-              <a:rPr lang="en-US" b="1" dirty="0"/>
-              <a:t>4. Set the standard for 1.2.</a:t>
-            </a:r>
-          </a:p>
-          <a:p>
-            <a:r>
-              <a:rPr lang="en-US" dirty="0"/>
-              <a:t>Say: "Answer from your assigned executive leader perspective. Name one dimension, and say what clarifying it would change."</a:t>
-            </a:r>
-          </a:p>
-          <a:p>
-            <a:r>
-              <a:rPr lang="en-US" dirty="0"/>
-              <a:t>Tell participants: they can start from the dimension they named in the show of hands.</a:t>
-            </a:r>
-          </a:p>
-          <a:p>
-            <a:endParaRPr lang="en-US" dirty="0"/>
-          </a:p>
-          <a:p>
-            <a:r>
-              <a:rPr lang="en-US" b="1" dirty="0"/>
-              <a:t>5. Bridge to Section 2.</a:t>
-            </a:r>
-          </a:p>
-          <a:p>
-            <a:r>
-              <a:rPr lang="en-US" dirty="0"/>
-              <a:t>Say: "We now have the three building blocks: the architecture, the intent and the picture of success. </a:t>
-            </a:r>
-          </a:p>
-          <a:p>
-            <a:endParaRPr lang="en-US" dirty="0"/>
-          </a:p>
-          <a:p>
-            <a:r>
-              <a:rPr lang="en-US" dirty="0"/>
+          <a:p/>
+          <a:p>
+            <a:r>
+              <a:rPr b="1"/>
+              <a:t>4. Bridge to Section 2.</a:t>
+            </a:r>
+          </a:p>
+          <a:p>
+            <a:r>
+              <a:rPr b="1"/>
+              <a:t>Say: </a:t>
+            </a:r>
+            <a:r>
+              <a:rPr/>
+              <a:t>"We now have the three building blocks: the architecture, the intent and the picture of success.</a:t>
+            </a:r>
+          </a:p>
+          <a:p/>
+          <a:p>
+            <a:r>
               <a:t>Section 2 asks why the Strategy Intent and SiP matter once they are defined."</a:t>
             </a:r>
           </a:p>
-          <a:p>
-            <a:endParaRPr lang="en-US" dirty="0"/>
-          </a:p>
-          <a:p>
-            <a:r>
-              <a:rPr lang="en-US" b="1" dirty="0"/>
+          <a:p/>
+          <a:p>
+            <a:r>
+              <a:rPr b="1"/>
               <a:t>ON THE PORTAL, AFTER THE TEACHING:</a:t>
             </a:r>
           </a:p>
           <a:p>
             <a:r>
-              <a:rPr lang="en-US" dirty="0"/>
-              <a:t>Participants write the two reflections in Section 1 of the participant file: 1.1 Reflection — Strategy Architecture and 1.2 Reflection — Strategy Intent.</a:t>
+              <a:t>Participants write the reflection in Section 1 of the participant file: 1.1 Reflection — Strategy Architecture.</a:t>
             </a:r>
           </a:p>
         </p:txBody>
@@ -5846,279 +5833,181 @@
           <a:lstStyle/>
           <a:p>
             <a:r>
-              <a:rPr lang="en-US" b="1" dirty="0"/>
+              <a:rPr b="1"/>
               <a:t>SECTION 4 · INTEGRATION — COLLECTIVE</a:t>
             </a:r>
           </a:p>
-          <a:p>
-            <a:endParaRPr lang="en-US" dirty="0"/>
-          </a:p>
-          <a:p>
-            <a:r>
-              <a:rPr lang="en-US" b="1" dirty="0"/>
+          <a:p/>
+          <a:p>
+            <a:r>
+              <a:rPr b="1"/>
               <a:t>HOW THIS SECTION RUNS:</a:t>
             </a:r>
           </a:p>
           <a:p>
             <a:r>
-              <a:rPr lang="en-US" dirty="0"/>
-              <a:t>1. 4.1a: how the group works. One scribe, agreed entries, every member's own page.</a:t>
-            </a:r>
-          </a:p>
-          <a:p>
-            <a:r>
-              <a:rPr lang="en-US" dirty="0"/>
-              <a:t>2. 4.1b to 4.1i, Step 1: the routine for one element, the 14 elements in four groups, the Strategy Architecture output and its six checks.</a:t>
-            </a:r>
-          </a:p>
-          <a:p>
-            <a:r>
-              <a:rPr lang="en-US" dirty="0"/>
-              <a:t>3. 4.2, Step 2: the Strategy Intent Statement, derived from the group's own WHAT, WHY, HOW and WHEN.</a:t>
-            </a:r>
-          </a:p>
-          <a:p>
-            <a:r>
-              <a:rPr lang="en-US" dirty="0"/>
-              <a:t>4. 4.3a to 4.3c, Step 3: Success in Practice, one statement for each of the four SiP domains, confirmed and then read as one.</a:t>
-            </a:r>
-          </a:p>
-          <a:p>
-            <a:r>
-              <a:rPr lang="en-US" dirty="0"/>
-              <a:t>You explain all three steps from the slides. The groups do the work itself on the portal after the teaching, in the session or after it.</a:t>
-            </a:r>
-          </a:p>
-          <a:p>
-            <a:endParaRPr lang="en-US" dirty="0"/>
-          </a:p>
-          <a:p>
-            <a:r>
-              <a:rPr lang="en-US" b="1" dirty="0"/>
+              <a:rPr b="1"/>
+              <a:t>1. 4.1a: the company of the worked example, Kestrel Point Services.</a:t>
+            </a:r>
+          </a:p>
+          <a:p>
+            <a:r>
+              <a:rPr b="1"/>
+              <a:t>2. 4.1b to 4.1d, Step 1: how each element works, the 14 elements and the six checks on the Strategy Architecture, shown through the example.</a:t>
+            </a:r>
+          </a:p>
+          <a:p>
+            <a:r>
+              <a:rPr b="1"/>
+              <a:t>3. 4.2, Step 2: how the example's WHAT, WHY, HOW and WHEN became one Strategy Intent Statement.</a:t>
+            </a:r>
+          </a:p>
+          <a:p>
+            <a:r>
+              <a:rPr b="1"/>
+              <a:t>4. 4.3a and 4.3b, Step 3: the example's four SiP statements, and the three outputs read together.</a:t>
+            </a:r>
+          </a:p>
+          <a:p>
+            <a:r>
+              <a:t>Section 4 teaches the three steps once, completed for one company. Each group builds the same three outputs for its own simulated company in Section 5.</a:t>
+            </a:r>
+          </a:p>
+          <a:p/>
+          <a:p>
+            <a:r>
+              <a:rPr b="1"/>
               <a:t>HOW TO OPEN THE SECTION:</a:t>
             </a:r>
           </a:p>
-          <a:p>
-            <a:endParaRPr lang="en-US" dirty="0"/>
-          </a:p>
-          <a:p>
-            <a:r>
-              <a:rPr lang="en-US" b="1" dirty="0"/>
+          <a:p/>
+          <a:p>
+            <a:r>
+              <a:rPr b="1"/>
               <a:t>1. State the section intent.</a:t>
             </a:r>
           </a:p>
           <a:p>
             <a:r>
-              <a:rPr lang="en-US" dirty="0"/>
-              <a:t>Say: "This is the production section of the unit. </a:t>
-            </a:r>
-          </a:p>
-          <a:p>
-            <a:r>
-              <a:rPr lang="en-US" dirty="0"/>
-              <a:t>You now apply the concepts developed through Awareness, Intelligence and Extrapolating to construct the organisation's Strategy Intent Design.“</a:t>
-            </a:r>
-          </a:p>
-          <a:p>
-            <a:endParaRPr lang="en-US" dirty="0"/>
-          </a:p>
-          <a:p>
-            <a:pPr marL="0" marR="0" lvl="0" indent="0" algn="l" defTabSz="914400" rtl="0" eaLnBrk="1" fontAlgn="auto" latinLnBrk="0" hangingPunct="1">
-              <a:lnSpc>
-                <a:spcPct val="100000"/>
-              </a:lnSpc>
-              <a:spcBef>
-                <a:spcPts val="0"/>
-              </a:spcBef>
-              <a:spcAft>
-                <a:spcPts val="0"/>
-              </a:spcAft>
-              <a:buClrTx/>
-              <a:buSzTx/>
-              <a:buFontTx/>
-              <a:buNone/>
-              <a:tabLst/>
-              <a:defRPr/>
-            </a:pPr>
-            <a:r>
-              <a:rPr lang="en-US" b="1" dirty="0"/>
+              <a:rPr b="1"/>
+              <a:t>Say: </a:t>
+            </a:r>
+            <a:r>
+              <a:rPr/>
+              <a:t>"This section shows the whole Strategy Intent Design completed once, for one company: Strategy Architecture, then Strategy Intent, then Success in Practice.</a:t>
+            </a:r>
+          </a:p>
+          <a:p>
+            <a:r>
+              <a:t>In Section 5 your group builds the same three outputs for the company of your Problem Charter."</a:t>
+            </a:r>
+          </a:p>
+          <a:p/>
+          <a:p>
+            <a:r>
+              <a:rPr b="1"/>
               <a:t>2. Read the two section learning outcomes from the slide.</a:t>
             </a:r>
           </a:p>
           <a:p>
             <a:r>
-              <a:rPr lang="en-US" b="1" dirty="0"/>
+              <a:rPr b="1"/>
               <a:t>SECTION LEARNING OUTCOMES:</a:t>
             </a:r>
           </a:p>
           <a:p>
             <a:r>
-              <a:rPr lang="en-US" dirty="0"/>
+              <a:rPr b="1"/>
               <a:t>1. Integrate the elements of Strategy Architecture into a coherent enterprise strategy.</a:t>
             </a:r>
           </a:p>
           <a:p>
             <a:r>
-              <a:rPr lang="en-US" dirty="0"/>
+              <a:rPr b="1"/>
               <a:t>2. Synthesise diverse leadership perspectives into an agreed enterprise position.</a:t>
             </a:r>
           </a:p>
-          <a:p>
-            <a:endParaRPr lang="en-US" dirty="0"/>
-          </a:p>
-          <a:p>
-            <a:r>
-              <a:rPr lang="en-US" b="1" dirty="0"/>
-              <a:t>3. Say why the work is collective.</a:t>
-            </a:r>
-          </a:p>
-          <a:p>
-            <a:r>
-              <a:rPr lang="en-US" dirty="0"/>
-              <a:t>Say: "The work happens collectively because strategy requires more than agreement with a finished statement. </a:t>
-            </a:r>
-          </a:p>
-          <a:p>
-            <a:r>
-              <a:rPr lang="en-US" dirty="0"/>
-              <a:t>Leaders need to contribute to the thinking, surface different interpretations, work through tensions and arrive at a position they can collectively own."</a:t>
-            </a:r>
-          </a:p>
-          <a:p>
-            <a:endParaRPr lang="en-US" dirty="0"/>
-          </a:p>
-          <a:p>
-            <a:r>
-              <a:rPr lang="en-US" b="1" dirty="0"/>
+          <a:p/>
+          <a:p>
+            <a:r>
+              <a:rPr b="1"/>
+              <a:t>3. Emphasise the sequence.</a:t>
+            </a:r>
+          </a:p>
+          <a:p>
+            <a:r>
+              <a:rPr b="1"/>
+              <a:t>Say: </a:t>
+            </a:r>
+            <a:r>
+              <a:rPr/>
+              <a:t>"Each output provides the foundation for the next.</a:t>
+            </a:r>
+          </a:p>
+          <a:p>
+            <a:r>
+              <a:t>The quality of the SiP depends on the quality of the Intent, and the quality of the Intent depends on the thinking captured in the Architecture.</a:t>
+            </a:r>
+          </a:p>
+          <a:p>
+            <a:r>
+              <a:t>The example shows that chain: the client promise named in WHAT returns in the Intent and again in the first SiP statement."</a:t>
+            </a:r>
+          </a:p>
+          <a:p/>
+          <a:p>
+            <a:r>
+              <a:rPr b="1"/>
+              <a:t>4. Say why the work is collective.</a:t>
+            </a:r>
+          </a:p>
+          <a:p>
+            <a:r>
+              <a:rPr b="1"/>
+              <a:t>Say: </a:t>
+            </a:r>
+            <a:r>
+              <a:rPr/>
+              <a:t>"Strategy requires more than agreement with a finished statement.</a:t>
+            </a:r>
+          </a:p>
+          <a:p>
+            <a:r>
+              <a:t>Leaders contribute to the thinking, surface different interpretations, work through tensions and arrive at a position they can collectively own."</a:t>
+            </a:r>
+          </a:p>
+          <a:p/>
+          <a:p>
+            <a:r>
+              <a:rPr b="1"/>
               <a:t>Deepen, say: </a:t>
             </a:r>
             <a:r>
-              <a:rPr lang="en-US" dirty="0"/>
-              <a:t>"Lasting influence grows when people understand the significance of the mission and commit to it voluntarily. </a:t>
-            </a:r>
-          </a:p>
-          <a:p>
-            <a:r>
-              <a:rPr lang="en-US" dirty="0"/>
+              <a:rPr/>
+              <a:t>"Lasting influence grows when people understand the significance of the mission and commit to it voluntarily.</a:t>
+            </a:r>
+          </a:p>
+          <a:p>
+            <a:r>
               <a:t>Willing commitment produces ownership."</a:t>
             </a:r>
           </a:p>
           <a:p>
             <a:r>
-              <a:rPr lang="en-US" dirty="0"/>
               <a:t>(Insight: Willing commitment. Source: Journal, 29 July 2026 — Professional Insights: Leadership)</a:t>
             </a:r>
           </a:p>
-          <a:p>
-            <a:endParaRPr lang="en-US" dirty="0"/>
-          </a:p>
-          <a:p>
-            <a:r>
-              <a:rPr lang="en-US" b="1" dirty="0"/>
-              <a:t>4. Give the three connected stages.</a:t>
-            </a:r>
-          </a:p>
-          <a:p>
-            <a:r>
-              <a:rPr lang="en-US" b="1" dirty="0"/>
-              <a:t>Say</a:t>
-            </a:r>
-            <a:r>
-              <a:rPr lang="en-US" dirty="0"/>
-              <a:t>: "Each group will work through three connected stages."</a:t>
-            </a:r>
-          </a:p>
-          <a:p>
-            <a:endParaRPr lang="en-US" dirty="0"/>
-          </a:p>
-          <a:p>
-            <a:r>
-              <a:rPr lang="en-US" dirty="0"/>
-              <a:t>- 4.1 — Build the Strategy Architecture: Work through the 14 elements, then write the group's Strategy Architecture output.</a:t>
-            </a:r>
-          </a:p>
-          <a:p>
-            <a:endParaRPr lang="en-US" dirty="0"/>
-          </a:p>
-          <a:p>
-            <a:r>
-              <a:rPr lang="en-US" dirty="0"/>
-              <a:t>- 4.2 — Derive the Strategy Intent Statement: Use the completed architecture to crystallise WHAT, WHY, HOW and WHEN into one clear statement of strategic ambition.</a:t>
-            </a:r>
-          </a:p>
-          <a:p>
-            <a:endParaRPr lang="en-US" dirty="0"/>
-          </a:p>
-          <a:p>
-            <a:r>
-              <a:rPr lang="en-US" dirty="0"/>
-              <a:t>- 4.3 — Build Success in Practice: Define what must be seen, experienced and executed across the four SiP domains, confirm each domain statement, and bring the four together into the group's SiP.</a:t>
-            </a:r>
-          </a:p>
-          <a:p>
-            <a:endParaRPr lang="en-US" dirty="0"/>
-          </a:p>
-          <a:p>
-            <a:r>
-              <a:rPr lang="en-US" b="1" dirty="0"/>
-              <a:t>5. Emphasise the sequence.</a:t>
-            </a:r>
-          </a:p>
-          <a:p>
-            <a:r>
-              <a:rPr lang="en-US" b="1" dirty="0"/>
-              <a:t>Say: </a:t>
-            </a:r>
-            <a:r>
-              <a:rPr lang="en-US" dirty="0"/>
-              <a:t>"Each output provides the foundation for the next: Strategy Architecture, then Strategy Intent, then Success in Practice. </a:t>
-            </a:r>
-          </a:p>
-          <a:p>
-            <a:r>
-              <a:rPr lang="en-US" dirty="0"/>
-              <a:t>The quality of the final SiP therefore depends on the quality of the Intent, and the quality of the Intent depends on the thinking captured in the Architecture."</a:t>
-            </a:r>
-          </a:p>
-          <a:p>
-            <a:endParaRPr lang="en-US" dirty="0"/>
-          </a:p>
-          <a:p>
-            <a:r>
-              <a:rPr lang="en-US" b="1" dirty="0"/>
-              <a:t>6. Say how the groups work.</a:t>
-            </a:r>
-          </a:p>
-          <a:p>
-            <a:r>
-              <a:rPr lang="en-US" b="1" dirty="0"/>
-              <a:t>Say: </a:t>
-            </a:r>
-            <a:r>
-              <a:rPr lang="en-US" dirty="0"/>
-              <a:t>"You work in your assigned groups throughout the exercise. </a:t>
-            </a:r>
-          </a:p>
-          <a:p>
-            <a:r>
-              <a:rPr lang="en-US" dirty="0"/>
-              <a:t>Surface your differences before you resolve them. </a:t>
-            </a:r>
-          </a:p>
-          <a:p>
-            <a:r>
-              <a:rPr lang="en-US" dirty="0"/>
-              <a:t>Different interpretations are useful because they expose assumptions, trade-offs and areas where the organisation's strategic thinking is not yet coherent. </a:t>
-            </a:r>
-          </a:p>
-          <a:p>
-            <a:r>
-              <a:rPr lang="en-US" dirty="0"/>
-              <a:t>The objective is collective construction of one enterprise position."</a:t>
-            </a:r>
-          </a:p>
-          <a:p>
-            <a:endParaRPr lang="en-US" dirty="0"/>
+          <a:p/>
+          <a:p>
+            <a:r>
+              <a:rPr b="1"/>
+              <a:t>ON THE PORTAL, AFTER THE TEACHING:</a:t>
+            </a:r>
+          </a:p>
+          <a:p>
+            <a:r>
+              <a:t>Section 4 of the participant file holds the worked example, read-only, for participants to return to while they build their own in Section 5.</a:t>
+            </a:r>
           </a:p>
         </p:txBody>
       </p:sp>
@@ -6203,191 +6092,110 @@
           <a:lstStyle/>
           <a:p>
             <a:r>
-              <a:rPr lang="en-US" b="1" dirty="0"/>
-              <a:t>4.1 — STEP 1: BUILD THE STRATEGY ARCHITECTURE · HOW THE GROUP WORKS</a:t>
-            </a:r>
-          </a:p>
-          <a:p>
-            <a:endParaRPr lang="en-US" dirty="0"/>
-          </a:p>
-          <a:p>
-            <a:r>
-              <a:rPr lang="en-US" b="1" dirty="0"/>
+              <a:rPr b="1"/>
+              <a:t>4.1 — STEP 1 · THE WORKED EXAMPLE: KESTREL POINT SERVICES</a:t>
+            </a:r>
+          </a:p>
+          <a:p/>
+          <a:p>
+            <a:r>
+              <a:rPr b="1"/>
               <a:t>HOW TO TEACH IT:</a:t>
             </a:r>
           </a:p>
-          <a:p>
-            <a:endParaRPr lang="en-US" dirty="0"/>
-          </a:p>
-          <a:p>
-            <a:r>
-              <a:rPr lang="en-US" b="1" dirty="0"/>
-              <a:t>1. Explain how the group works, using the four lines on the slide.</a:t>
-            </a:r>
-          </a:p>
-          <a:p>
-            <a:r>
-              <a:rPr lang="en-US" dirty="0"/>
-              <a:t>Say: "Your group agrees each entry. One member acts as scribe and types the agreed wording. </a:t>
-            </a:r>
-          </a:p>
-          <a:p>
-            <a:r>
-              <a:rPr lang="en-US" dirty="0"/>
-              <a:t>Every member then types the agreed entries into their own page, in the session or after it."</a:t>
-            </a:r>
-          </a:p>
-          <a:p>
-            <a:endParaRPr lang="en-US" dirty="0"/>
-          </a:p>
-          <a:p>
-            <a:r>
-              <a:rPr lang="en-US" b="1" dirty="0"/>
-              <a:t>2. Say why every member’s page matters.</a:t>
-            </a:r>
-          </a:p>
-          <a:p>
-            <a:r>
-              <a:rPr lang="en-US" dirty="0"/>
-              <a:t>Say: "Your own page is what I review. It is also where your team’s Capstone Blueprint later takes the three confirmed outputs from."</a:t>
-            </a:r>
-          </a:p>
-          <a:p>
-            <a:endParaRPr lang="en-US" dirty="0"/>
-          </a:p>
-          <a:p>
-            <a:r>
-              <a:rPr lang="en-US" b="1" dirty="0"/>
-              <a:t>3. Ask for every voice.</a:t>
-            </a:r>
-          </a:p>
-          <a:p>
-            <a:r>
-              <a:rPr lang="en-US" dirty="0"/>
-              <a:t>Say: "The scribe types what the whole group has agreed. Every member speaks before an entry is typed."</a:t>
-            </a:r>
-          </a:p>
-          <a:p>
-            <a:r>
-              <a:rPr lang="en-US" dirty="0"/>
-              <a:t>Deepen, say: "When the senior voice ends the conversation, the intelligence that lives at every level of the organisation never reaches the strategy."</a:t>
-            </a:r>
-          </a:p>
-          <a:p>
-            <a:r>
-              <a:rPr lang="en-US" dirty="0"/>
-              <a:t>(Insight: Top-down cultures. Source: Journal, 9 January 2026 — Professional Insights: Culture)</a:t>
-            </a:r>
-          </a:p>
-          <a:p>
-            <a:endParaRPr lang="en-US" dirty="0"/>
-          </a:p>
-          <a:p>
-            <a:r>
-              <a:rPr lang="en-US" b="1" dirty="0"/>
-              <a:t>4. Tell participants about the two boxes at the top of 4.1.</a:t>
-            </a:r>
-          </a:p>
-          <a:p>
-            <a:r>
-              <a:rPr lang="en-US" dirty="0"/>
-              <a:t>Say: "At the top of 4.1 there are two boxes: </a:t>
-            </a:r>
-          </a:p>
-          <a:p>
-            <a:r>
-              <a:rPr lang="en-US" dirty="0"/>
-              <a:t>Organisation and Strategy period. Every member enters the same two entries. </a:t>
-            </a:r>
-          </a:p>
-          <a:p>
-            <a:r>
-              <a:rPr lang="en-US" dirty="0"/>
-              <a:t>They print at the top of your group’s reports."</a:t>
-            </a:r>
-          </a:p>
-          <a:p>
-            <a:endParaRPr lang="en-US" dirty="0"/>
-          </a:p>
-          <a:p>
-            <a:r>
-              <a:rPr lang="en-US" b="1" dirty="0"/>
-              <a:t>5. Explain confirmation.</a:t>
-            </a:r>
-          </a:p>
-          <a:p>
-            <a:r>
-              <a:rPr lang="en-US" dirty="0"/>
-              <a:t>Say: "Your group confirms each element, each statement and each output once it says what your group means."</a:t>
-            </a:r>
-          </a:p>
-          <a:p>
-            <a:endParaRPr lang="en-US" dirty="0"/>
-          </a:p>
-          <a:p>
-            <a:r>
-              <a:rPr lang="en-US" b="1" dirty="0"/>
-              <a:t>6. Confirm the groups.</a:t>
-            </a:r>
-          </a:p>
-          <a:p>
-            <a:r>
-              <a:rPr lang="en-US" dirty="0"/>
-              <a:t>Confirm who is in each group, and ask each group to name its scribe before the work begins.</a:t>
-            </a:r>
-          </a:p>
-          <a:p>
-            <a:endParaRPr lang="en-US" dirty="0"/>
-          </a:p>
-          <a:p>
-            <a:r>
-              <a:rPr lang="en-US" b="1" dirty="0"/>
+          <a:p/>
+          <a:p>
+            <a:r>
+              <a:rPr b="1"/>
+              <a:t>1. Introduce the company, using the four lines on the slide.</a:t>
+            </a:r>
+          </a:p>
+          <a:p>
+            <a:r>
+              <a:rPr b="1"/>
+              <a:t>Say: </a:t>
+            </a:r>
+            <a:r>
+              <a:rPr/>
+              <a:t>"Kestrel Point Services provides facilities management and technical maintenance to corporate clients.</a:t>
+            </a:r>
+          </a:p>
+          <a:p>
+            <a:r>
+              <a:t>It has about 1,200 employees in eight regional service hubs, and its strategy runs from 2027 to 2029."</a:t>
+            </a:r>
+          </a:p>
+          <a:p/>
+          <a:p>
+            <a:r>
+              <a:rPr b="1"/>
+              <a:t>2. Give its central problem.</a:t>
+            </a:r>
+          </a:p>
+          <a:p>
+            <a:r>
+              <a:rPr b="1"/>
+              <a:t>Say: </a:t>
+            </a:r>
+            <a:r>
+              <a:rPr/>
+              <a:t>"Kestrel Point wins clients on relationships and loses them on service.</a:t>
+            </a:r>
+          </a:p>
+          <a:p>
+            <a:r>
+              <a:t>Response times vary from team to team, requests stall in handovers between functions, decisions that involve more than one function wait for escalation, and margins swing with the cost of rework."</a:t>
+            </a:r>
+          </a:p>
+          <a:p/>
+          <a:p>
+            <a:r>
+              <a:rPr b="1"/>
+              <a:t>3. Link the example to the Problem Charter.</a:t>
+            </a:r>
+          </a:p>
+          <a:p>
+            <a:r>
+              <a:rPr b="1"/>
+              <a:t>Say: </a:t>
+            </a:r>
+            <a:r>
+              <a:rPr/>
+              <a:t>"This is the kind of central problem your group stated in its Problem Charter in Unit 1.</a:t>
+            </a:r>
+          </a:p>
+          <a:p>
+            <a:r>
+              <a:t>Here you see how one company builds a strategy that answers its problem. In Section 5 your group does the same for its own company."</a:t>
+            </a:r>
+          </a:p>
+          <a:p/>
+          <a:p>
+            <a:r>
+              <a:rPr b="1"/>
+              <a:t>4. Link the example to the units that follow.</a:t>
+            </a:r>
+          </a:p>
+          <a:p>
+            <a:r>
+              <a:rPr b="1"/>
+              <a:t>Say: </a:t>
+            </a:r>
+            <a:r>
+              <a:rPr/>
+              <a:t>"You will meet Kestrel Point again. Its SiP leads into the worked example of Unit 3, and its Key Results are tested in Unit 4."</a:t>
+            </a:r>
+          </a:p>
+          <a:p/>
+          <a:p>
+            <a:r>
+              <a:rPr b="1"/>
               <a:t>ON THE PORTAL, AFTER THE TEACHING:</a:t>
             </a:r>
           </a:p>
           <a:p>
             <a:r>
-              <a:rPr lang="en-US" dirty="0"/>
-              <a:t>The group agrees each entry and one member acts as scribe. </a:t>
-            </a:r>
-          </a:p>
-          <a:p>
-            <a:r>
-              <a:rPr lang="en-US" dirty="0"/>
-              <a:t>Every member then types the agreed entries into their own page of the participant file, in the session or after it.</a:t>
-            </a:r>
-          </a:p>
-          <a:p>
-            <a:endParaRPr lang="en-US" dirty="0"/>
-          </a:p>
-          <a:p>
-            <a:r>
-              <a:rPr lang="en-US" b="1" dirty="0"/>
-              <a:t>LATER, WHEN THE GROUPS DO THE WORK ON THE PORTAL:</a:t>
-            </a:r>
-          </a:p>
-          <a:p>
-            <a:r>
-              <a:rPr lang="en-US" dirty="0"/>
-              <a:t>- Move between the groups. Listen to a group before you speak to it.</a:t>
-            </a:r>
-          </a:p>
-          <a:p>
-            <a:r>
-              <a:rPr lang="en-US" dirty="0"/>
-              <a:t>- Ask for choices. When a group offers a broad aspiration, ask: "What has the organisation decided?"</a:t>
-            </a:r>
-          </a:p>
-          <a:p>
-            <a:r>
-              <a:rPr lang="en-US" dirty="0"/>
-              <a:t>- Protect the sequence. A group that writes its Strategy Intent Statement before its Architecture is confirmed is working without its source.</a:t>
-            </a:r>
-          </a:p>
-          <a:p>
-            <a:r>
-              <a:rPr lang="en-US" dirty="0"/>
-              <a:t>- Hold every group to one enterprise position. A set of functional positions placed side by side falls short of collective construction.</a:t>
+              <a:t>The company cards open Section 4 of the participant file.</a:t>
             </a:r>
           </a:p>
         </p:txBody>
@@ -6473,273 +6281,192 @@
           <a:lstStyle/>
           <a:p>
             <a:r>
-              <a:rPr lang="en-US" b="1" dirty="0"/>
-              <a:t>4.1 — STEP 1: BUILD THE STRATEGY ARCHITECTURE · HOW EACH ELEMENT WORKS</a:t>
-            </a:r>
-          </a:p>
-          <a:p>
-            <a:endParaRPr lang="en-US" dirty="0"/>
-          </a:p>
-          <a:p>
-            <a:r>
-              <a:rPr lang="en-US" b="1" dirty="0"/>
+              <a:rPr b="1"/>
+              <a:t>4.1 — STEP 1 · HOW EACH ELEMENT WORKS</a:t>
+            </a:r>
+          </a:p>
+          <a:p/>
+          <a:p>
+            <a:r>
+              <a:rPr b="1"/>
               <a:t>HOW TO TEACH IT:</a:t>
             </a:r>
           </a:p>
-          <a:p>
-            <a:endParaRPr lang="en-US" dirty="0"/>
-          </a:p>
-          <a:p>
-            <a:r>
-              <a:rPr lang="en-US" b="1" dirty="0"/>
+          <a:p/>
+          <a:p>
+            <a:r>
+              <a:rPr b="1"/>
               <a:t>1. State the purpose.</a:t>
             </a:r>
           </a:p>
           <a:p>
             <a:r>
-              <a:rPr lang="en-US" b="1" dirty="0"/>
+              <a:rPr b="1"/>
               <a:t>Say: </a:t>
             </a:r>
             <a:r>
-              <a:rPr lang="en-US" dirty="0"/>
-              <a:t>"This is the foundation of the exercise. </a:t>
-            </a:r>
-          </a:p>
-          <a:p>
-            <a:r>
-              <a:rPr lang="en-US" dirty="0"/>
-              <a:t>Each group works through the 14 elements of the Strategy2Results® Strategy Definition. </a:t>
-            </a:r>
-          </a:p>
-          <a:p>
-            <a:r>
-              <a:rPr lang="en-US" dirty="0"/>
-              <a:t>The purpose is to establish the thinking and logic underneath the organisation's strategic position before attempting to express that position concisely."</a:t>
-            </a:r>
-          </a:p>
-          <a:p>
-            <a:endParaRPr lang="en-US" dirty="0"/>
-          </a:p>
-          <a:p>
-            <a:r>
-              <a:rPr lang="en-US" b="1" dirty="0"/>
-              <a:t>2. Walk the routine for one element, using the lines on the slide.</a:t>
-            </a:r>
-          </a:p>
-          <a:p>
-            <a:r>
-              <a:rPr lang="en-US" b="1" dirty="0"/>
+              <a:rPr/>
+              <a:t>"Step 1 is the foundation.</a:t>
+            </a:r>
+          </a:p>
+          <a:p>
+            <a:r>
+              <a:t>The 14 elements of the Strategy2Results® Strategy Definition establish the thinking and logic underneath the strategic position before that position is expressed concisely."</a:t>
+            </a:r>
+          </a:p>
+          <a:p/>
+          <a:p>
+            <a:r>
+              <a:rPr b="1"/>
+              <a:t>2. Walk the routine for one element, using the lines on the slide, with WHAT from the example.</a:t>
+            </a:r>
+          </a:p>
+          <a:p>
+            <a:r>
+              <a:rPr b="1"/>
               <a:t>Say: </a:t>
             </a:r>
             <a:r>
-              <a:rPr lang="en-US" dirty="0"/>
-              <a:t>"For each element your group answers its four questions. </a:t>
-            </a:r>
-          </a:p>
-          <a:p>
-            <a:r>
-              <a:rPr lang="en-US" dirty="0"/>
-              <a:t>You then select Generate what this is saying, and one member reads the result aloud. </a:t>
-            </a:r>
-          </a:p>
-          <a:p>
-            <a:r>
-              <a:rPr lang="en-US" dirty="0"/>
-              <a:t>Your group asks: Is this what we mean? You confirm, or you refine and state what the position should say."</a:t>
-            </a:r>
-          </a:p>
-          <a:p>
-            <a:endParaRPr lang="en-US" dirty="0"/>
-          </a:p>
-          <a:p>
-            <a:r>
-              <a:rPr lang="en-US" b="1" dirty="0"/>
+              <a:rPr/>
+              <a:t>"Each element has four questions. THE FORCES has five.</a:t>
+            </a:r>
+          </a:p>
+          <a:p>
+            <a:r>
+              <a:t>Kestrel Point answered WHAT like this: what business are we actually in? Keeping corporate buildings and their technical systems running without disruption.</a:t>
+            </a:r>
+          </a:p>
+          <a:p>
+            <a:r>
+              <a:t>What value are we choosing to create? Fast, consistent and effortless service that clients can rely on first."</a:t>
+            </a:r>
+          </a:p>
+          <a:p/>
+          <a:p>
+            <a:r>
+              <a:rPr b="1"/>
+              <a:t>Say: </a:t>
+            </a:r>
+            <a:r>
+              <a:rPr/>
+              <a:t>"Then one or two sentences state what the element is saying:</a:t>
+            </a:r>
+          </a:p>
+          <a:p>
+            <a:r>
+              <a:t>Kestrel Point is in the business of keeping client buildings running, and it chooses to win on fast, consistent and effortless service through one client team per key account."</a:t>
+            </a:r>
+          </a:p>
+          <a:p/>
+          <a:p>
+            <a:r>
+              <a:rPr b="1"/>
               <a:t>3. Set the standard for an answer.</a:t>
             </a:r>
           </a:p>
           <a:p>
             <a:r>
-              <a:rPr lang="en-US" b="1" dirty="0"/>
+              <a:rPr b="1"/>
               <a:t>Say: </a:t>
             </a:r>
             <a:r>
-              <a:rPr lang="en-US" dirty="0"/>
-              <a:t>"Capture actual strategic choices and leave broad organisational aspirations out. </a:t>
-            </a:r>
-          </a:p>
-          <a:p>
-            <a:r>
-              <a:rPr lang="en-US" dirty="0"/>
-              <a:t>A strategic choice names what the organisation will do and what it leaves out."</a:t>
-            </a:r>
-          </a:p>
-          <a:p>
-            <a:endParaRPr lang="en-US" dirty="0"/>
-          </a:p>
-          <a:p>
-            <a:r>
-              <a:rPr lang="en-US" b="1" dirty="0"/>
-              <a:t>4. Explain confirmation.</a:t>
-            </a:r>
-          </a:p>
-          <a:p>
-            <a:r>
-              <a:rPr lang="en-US" b="1" dirty="0"/>
+              <a:rPr/>
+              <a:t>"Capture actual strategic choices and leave broad aspirations out.</a:t>
+            </a:r>
+          </a:p>
+          <a:p>
+            <a:r>
+              <a:t>A strategic choice names what the organisation will do and what it leaves out. Kestrel Point leaves once-off construction projects and low-value contracts out."</a:t>
+            </a:r>
+          </a:p>
+          <a:p/>
+          <a:p>
+            <a:r>
+              <a:rPr b="1"/>
+              <a:t>4. Give the question that closes each element.</a:t>
+            </a:r>
+          </a:p>
+          <a:p>
+            <a:r>
+              <a:rPr b="1"/>
               <a:t>Say: </a:t>
             </a:r>
             <a:r>
-              <a:rPr lang="en-US" dirty="0"/>
-              <a:t>"The purpose of confirmation is to ensure that the written position represents your group’s thinking before it becomes part of the architecture."</a:t>
-            </a:r>
-          </a:p>
-          <a:p>
-            <a:endParaRPr lang="en-US" dirty="0"/>
-          </a:p>
-          <a:p>
-            <a:r>
-              <a:rPr lang="en-US" b="1" dirty="0"/>
+              <a:rPr/>
+              <a:t>"Before moving on, the group asks: Is this what we mean? It revises the sentences until they say what the group means."</a:t>
+            </a:r>
+          </a:p>
+          <a:p/>
+          <a:p>
+            <a:r>
+              <a:rPr b="1"/>
               <a:t>Deepen, say: </a:t>
             </a:r>
             <a:r>
-              <a:rPr lang="en-US" dirty="0"/>
-              <a:t>"The leader who is present when a commitment is made and does not challenge it has endorsed it. </a:t>
-            </a:r>
-          </a:p>
-          <a:p>
-            <a:r>
-              <a:rPr lang="en-US" dirty="0"/>
+              <a:rPr/>
+              <a:t>"The leader who is present when a commitment is made and does not challenge it has endorsed it.</a:t>
+            </a:r>
+          </a:p>
+          <a:p>
+            <a:r>
               <a:t>A plan received without objection binds the organisation to an outcome the leader could have shaped."</a:t>
             </a:r>
           </a:p>
           <a:p>
             <a:r>
-              <a:rPr lang="en-US" dirty="0"/>
               <a:t>(Insight: Silence is a decision. Source: Journal, 15 March 2026 — Professional Insights)</a:t>
             </a:r>
           </a:p>
-          <a:p>
-            <a:endParaRPr lang="en-US" dirty="0"/>
-          </a:p>
-          <a:p>
-            <a:r>
-              <a:rPr lang="en-US" b="1" dirty="0"/>
-              <a:t>5. Explain the count.</a:t>
-            </a:r>
-          </a:p>
-          <a:p>
-            <a:r>
-              <a:rPr lang="en-US" b="1" dirty="0"/>
+          <a:p/>
+          <a:p>
+            <a:r>
+              <a:rPr b="1"/>
+              <a:t>5. Say that the elements test one another.</a:t>
+            </a:r>
+          </a:p>
+          <a:p>
+            <a:r>
+              <a:rPr b="1"/>
               <a:t>Say: </a:t>
             </a:r>
             <a:r>
-              <a:rPr lang="en-US" dirty="0"/>
-              <a:t>"Your group confirms the elements one by one. At 14 of 14 the Strategy Architecture output opens."</a:t>
-            </a:r>
-          </a:p>
-          <a:p>
-            <a:endParaRPr lang="en-US" dirty="0"/>
-          </a:p>
-          <a:p>
-            <a:r>
-              <a:rPr lang="en-US" b="1" dirty="0"/>
-              <a:t>6. Say that the elements test one another.</a:t>
-            </a:r>
-          </a:p>
-          <a:p>
-            <a:r>
-              <a:rPr lang="en-US" b="1" dirty="0"/>
+              <a:rPr/>
+              <a:t>"The elements are interconnected. The value an organisation intends to create must be supported by its HOW; its WHEN must reflect the capabilities it needs to build; its approach to sustaining value must respond to the forces in its operating environment.</a:t>
+            </a:r>
+          </a:p>
+          <a:p>
+            <a:r>
+              <a:t>When one element exposes a weakness in another, return to the earlier element and revise it."</a:t>
+            </a:r>
+          </a:p>
+          <a:p/>
+          <a:p>
+            <a:r>
+              <a:rPr b="1"/>
+              <a:t>6. Explain the count.</a:t>
+            </a:r>
+          </a:p>
+          <a:p>
+            <a:r>
+              <a:rPr b="1"/>
               <a:t>Say: </a:t>
             </a:r>
             <a:r>
-              <a:rPr lang="en-US" dirty="0"/>
-              <a:t>"The elements are interconnected. A strong answer to one element can expose a weakness or contradiction in another. </a:t>
-            </a:r>
-          </a:p>
-          <a:p>
-            <a:r>
-              <a:rPr lang="en-US" dirty="0"/>
-              <a:t>For example, the value the organisation intends to create must be supported by its HOW;</a:t>
-            </a:r>
-          </a:p>
-          <a:p>
-            <a:r>
-              <a:rPr lang="en-US" dirty="0"/>
-              <a:t> its WHEN must reflect the capabilities that need to be built; and its approach to sustaining value must respond to the forces within its operating environment.“</a:t>
-            </a:r>
-          </a:p>
-          <a:p>
-            <a:endParaRPr lang="en-US" dirty="0"/>
-          </a:p>
-          <a:p>
-            <a:r>
-              <a:rPr lang="en-US" b="1" dirty="0"/>
-              <a:t>Say: </a:t>
-            </a:r>
-            <a:r>
-              <a:rPr lang="en-US" dirty="0"/>
-              <a:t>"When that happens, return to the earlier element and revise it. An element that is edited after confirmation must be confirmed again."</a:t>
-            </a:r>
-          </a:p>
-          <a:p>
-            <a:endParaRPr lang="en-US" dirty="0"/>
-          </a:p>
-          <a:p>
-            <a:r>
-              <a:rPr lang="en-US" b="1" dirty="0"/>
-              <a:t>7. Bridge to the next slide.</a:t>
-            </a:r>
-          </a:p>
-          <a:p>
-            <a:r>
-              <a:rPr lang="en-US" b="1" dirty="0"/>
-              <a:t>Say: </a:t>
-            </a:r>
-            <a:r>
-              <a:rPr lang="en-US" dirty="0"/>
-              <a:t>"The next slide shows the 14 elements as one list."</a:t>
-            </a:r>
-          </a:p>
-          <a:p>
-            <a:endParaRPr lang="en-US" dirty="0"/>
-          </a:p>
-          <a:p>
-            <a:r>
-              <a:rPr lang="en-US" b="1" dirty="0"/>
+              <a:rPr/>
+              <a:t>"When all 14 elements say what they mean, they come together under five headings: the Strategy Architecture."</a:t>
+            </a:r>
+          </a:p>
+          <a:p/>
+          <a:p>
+            <a:r>
+              <a:rPr b="1"/>
               <a:t>ON THE PORTAL, AFTER THE TEACHING:</a:t>
             </a:r>
           </a:p>
           <a:p>
             <a:r>
-              <a:rPr lang="en-US" dirty="0"/>
-              <a:t>Each group works in 4.1 of the participant file, one element at a time:</a:t>
-            </a:r>
-          </a:p>
-          <a:p>
-            <a:r>
-              <a:rPr lang="en-US" dirty="0"/>
-              <a:t>It answers the four questions of the element and selects Generate what this is saying.</a:t>
-            </a:r>
-          </a:p>
-          <a:p>
-            <a:r>
-              <a:rPr lang="en-US" dirty="0"/>
-              <a:t>The page shows what the group's inputs are saying and asks: "Is this what you mean?"</a:t>
-            </a:r>
-          </a:p>
-          <a:p>
-            <a:r>
-              <a:rPr lang="en-US" dirty="0"/>
-              <a:t>The group selects Yes, confirm, or No, refine and states what the position should say.</a:t>
-            </a:r>
-          </a:p>
-          <a:p>
-            <a:r>
-              <a:rPr lang="en-US" dirty="0"/>
-              <a:t>A progress bar counts the confirmed elements. When all 14 are confirmed, the Strategy Architecture output unlocks. The group reviews it, refines it and confirms it. It can then be printed.</a:t>
-            </a:r>
-          </a:p>
-          <a:p>
-            <a:endParaRPr lang="en-US" dirty="0"/>
+              <a:t>In Section 4, each of the 14 elements of the example opens to show its answers and what it is saying.</a:t>
+            </a:r>
           </a:p>
         </p:txBody>
       </p:sp>
@@ -6824,212 +6551,190 @@
           <a:lstStyle/>
           <a:p>
             <a:r>
-              <a:rPr lang="en-US" b="1" dirty="0"/>
-              <a:t>4.1 — STEP 1: BUILD THE STRATEGY ARCHITECTURE · THE 14 ELEMENTS</a:t>
-            </a:r>
-          </a:p>
-          <a:p>
-            <a:endParaRPr lang="en-US" dirty="0"/>
-          </a:p>
-          <a:p>
-            <a:r>
-              <a:rPr lang="en-US" b="1" dirty="0"/>
+              <a:rPr b="1"/>
+              <a:t>4.1 — STEP 1 · THE 14 ELEMENTS</a:t>
+            </a:r>
+          </a:p>
+          <a:p/>
+          <a:p>
+            <a:r>
+              <a:rPr b="1"/>
               <a:t>HOW TO TEACH IT:</a:t>
             </a:r>
           </a:p>
-          <a:p>
-            <a:endParaRPr lang="en-US" dirty="0"/>
-          </a:p>
-          <a:p>
-            <a:r>
-              <a:rPr lang="en-US" b="1" dirty="0"/>
+          <a:p/>
+          <a:p>
+            <a:r>
+              <a:rPr b="1"/>
               <a:t>1. Show the 14 elements as one list.</a:t>
             </a:r>
           </a:p>
           <a:p>
             <a:r>
-              <a:rPr lang="en-US" b="1" dirty="0"/>
+              <a:rPr b="1"/>
               <a:t>Say: </a:t>
             </a:r>
             <a:r>
-              <a:rPr lang="en-US" dirty="0"/>
-              <a:t>"The 14 elements follow the Strategy2Results® definition of strategy. </a:t>
-            </a:r>
-          </a:p>
-          <a:p>
-            <a:r>
-              <a:rPr lang="en-US" dirty="0"/>
+              <a:rPr/>
+              <a:t>"The 14 elements follow the Strategy2Results® definition of strategy.</a:t>
+            </a:r>
+          </a:p>
+          <a:p>
+            <a:r>
               <a:t>OUTPUT, the first concept in 1.1, is what the 14 elements produce: the Strategy Architecture."</a:t>
             </a:r>
           </a:p>
-          <a:p>
-            <a:endParaRPr lang="en-US" dirty="0"/>
-          </a:p>
-          <a:p>
-            <a:r>
-              <a:rPr lang="en-US" b="1" dirty="0"/>
+          <a:p/>
+          <a:p>
+            <a:r>
+              <a:rPr b="1"/>
               <a:t>2. Link back to 1.1.</a:t>
             </a:r>
           </a:p>
           <a:p>
             <a:r>
-              <a:rPr lang="en-US" b="1" dirty="0"/>
-              <a:t>Say</a:t>
-            </a:r>
-            <a:r>
-              <a:rPr lang="en-US" dirty="0"/>
-              <a:t>: "In 1.1 we met nine concepts. </a:t>
-            </a:r>
-          </a:p>
-          <a:p>
-            <a:r>
-              <a:rPr lang="en-US" dirty="0"/>
-              <a:t>Here the same definition is worked as 14 elements. </a:t>
-            </a:r>
-          </a:p>
-          <a:p>
-            <a:r>
-              <a:rPr lang="en-US" dirty="0"/>
-              <a:t>WHAT, WHY, HOW and WHEN are four elements. </a:t>
-            </a:r>
-          </a:p>
-          <a:p>
-            <a:r>
-              <a:rPr lang="en-US" dirty="0"/>
-              <a:t>CREATES, DELIVERS and SUSTAINS VALUE are three. </a:t>
-            </a:r>
-          </a:p>
-          <a:p>
-            <a:r>
-              <a:rPr lang="en-US" dirty="0"/>
-              <a:t>OPERATING ENVIRONMENT has an element of its own."</a:t>
-            </a:r>
-          </a:p>
-          <a:p>
-            <a:endParaRPr lang="en-US" dirty="0"/>
-          </a:p>
-          <a:p>
-            <a:r>
-              <a:rPr lang="en-US" b="1" dirty="0"/>
-              <a:t>3. Say what each element gives the group.</a:t>
-            </a:r>
-          </a:p>
-          <a:p>
-            <a:r>
-              <a:rPr lang="en-US" b="1" dirty="0"/>
+              <a:rPr b="1"/>
               <a:t>Say: </a:t>
             </a:r>
             <a:r>
-              <a:rPr lang="en-US" dirty="0"/>
-              <a:t>"Each element comes with a short guide and four questions."</a:t>
-            </a:r>
-          </a:p>
-          <a:p>
-            <a:endParaRPr lang="en-US" dirty="0"/>
-          </a:p>
-          <a:p>
-            <a:r>
-              <a:rPr lang="en-US" b="1" dirty="0"/>
-              <a:t>4. If a participant asks where an element goes in the Strategy Architecture output, use this list.</a:t>
-            </a:r>
-          </a:p>
-          <a:p>
-            <a:r>
-              <a:rPr lang="en-US" dirty="0"/>
-              <a:t>1 · ITERATIVE — Continuously refined → Strategy Discipline</a:t>
-            </a:r>
-          </a:p>
-          <a:p>
-            <a:r>
-              <a:rPr lang="en-US" dirty="0"/>
-              <a:t>2 · THINKING &amp; LOGIC — The cognitive engine → Strategy Discipline</a:t>
-            </a:r>
-          </a:p>
-          <a:p>
-            <a:r>
-              <a:rPr lang="en-US" dirty="0"/>
-              <a:t>3 · PROCESS — Structured container → Strategy Discipline</a:t>
-            </a:r>
-          </a:p>
-          <a:p>
-            <a:r>
-              <a:rPr lang="en-US" dirty="0"/>
-              <a:t>4 · WHAT — Scope &amp; definition → Strategic Position</a:t>
-            </a:r>
-          </a:p>
-          <a:p>
-            <a:r>
-              <a:rPr lang="en-US" dirty="0"/>
-              <a:t>5 · WHY — Purpose &amp; rationale → Strategic Position</a:t>
-            </a:r>
-          </a:p>
-          <a:p>
-            <a:r>
-              <a:rPr lang="en-US" dirty="0"/>
-              <a:t>6 · HOW — Mechanism &amp; model → Strategic Model</a:t>
-            </a:r>
-          </a:p>
-          <a:p>
-            <a:r>
-              <a:rPr lang="en-US" dirty="0"/>
-              <a:t>7 · WHEN — Timing &amp; sequencing → Strategic Model</a:t>
-            </a:r>
-          </a:p>
-          <a:p>
-            <a:r>
-              <a:rPr lang="en-US" dirty="0"/>
-              <a:t>8 · CREATES VALUE — Origination layer → Value Architecture</a:t>
-            </a:r>
-          </a:p>
-          <a:p>
-            <a:r>
-              <a:rPr lang="en-US" dirty="0"/>
-              <a:t>9 · DELIVERS VALUE — Distribution &amp; access layer → Value Architecture</a:t>
-            </a:r>
-          </a:p>
-          <a:p>
-            <a:r>
-              <a:rPr lang="en-US" dirty="0"/>
-              <a:t>10 · SUSTAINS VALUE — Durability &amp; compounding layer → Value Architecture</a:t>
-            </a:r>
-          </a:p>
-          <a:p>
-            <a:r>
-              <a:rPr lang="en-US" dirty="0"/>
-              <a:t>11 · STAKEHOLDERS — Full universe of value recipients → Value Architecture</a:t>
-            </a:r>
-          </a:p>
-          <a:p>
-            <a:r>
-              <a:rPr lang="en-US" dirty="0"/>
-              <a:t>12 · NAVIGATING — Active, skilful movement → Strategic Navigation</a:t>
-            </a:r>
-          </a:p>
-          <a:p>
-            <a:r>
-              <a:rPr lang="en-US" dirty="0"/>
-              <a:t>13 · THE FORCES — What must be navigated → Strategic Navigation</a:t>
-            </a:r>
-          </a:p>
-          <a:p>
-            <a:r>
-              <a:rPr lang="en-US" dirty="0"/>
-              <a:t>14 · OPERATING ENVIRONMENT — The bounded context → Strategic Navigation</a:t>
-            </a:r>
-          </a:p>
-          <a:p>
-            <a:endParaRPr lang="en-US" dirty="0"/>
-          </a:p>
-          <a:p>
-            <a:r>
-              <a:rPr lang="en-US" b="1" dirty="0"/>
-              <a:t>5. Bridge to the next slide.</a:t>
-            </a:r>
-          </a:p>
-          <a:p>
-            <a:r>
-              <a:rPr lang="en-US" dirty="0"/>
-              <a:t>Say: "The next four slides take the elements in four groups."</a:t>
+              <a:rPr/>
+              <a:t>"In 1.1 we met nine concepts. Here the same definition is worked as 14 elements.</a:t>
+            </a:r>
+          </a:p>
+          <a:p>
+            <a:r>
+              <a:t>WHAT, WHY, HOW and WHEN are four elements. CREATES, DELIVERS and SUSTAINS VALUE are three. OPERATING ENVIRONMENT has an element of its own."</a:t>
+            </a:r>
+          </a:p>
+          <a:p/>
+          <a:p>
+            <a:r>
+              <a:rPr b="1"/>
+              <a:t>3. Show the five headings, with what Kestrel Point's elements say.</a:t>
+            </a:r>
+          </a:p>
+          <a:p>
+            <a:r>
+              <a:rPr b="1"/>
+              <a:t>Say: </a:t>
+            </a:r>
+            <a:r>
+              <a:rPr/>
+              <a:t>"The elements come together under five headings."</a:t>
+            </a:r>
+          </a:p>
+          <a:p>
+            <a:r>
+              <a:t>- Strategic Position · WHAT and WHY: the business of keeping client buildings running, won on fast, consistent and effortless service, so that clients can focus on their own business.</a:t>
+            </a:r>
+          </a:p>
+          <a:p>
+            <a:r>
+              <a:t>- Strategic Model · HOW and WHEN: integrated client teams, decision rights at hub level and one weekly cross-functional rhythm; responsiveness first, scalable service models last.</a:t>
+            </a:r>
+          </a:p>
+          <a:p>
+            <a:r>
+              <a:t>- Value Architecture · CREATES, DELIVERS, SUSTAINS VALUE and STAKEHOLDERS: faster resolution and preventive maintenance, delivered through one client team, one number and one portal, protected by removing silos.</a:t>
+            </a:r>
+          </a:p>
+          <a:p>
+            <a:r>
+              <a:t>- Strategic Navigation · NAVIGATING, THE FORCES and OPERATING ENVIRONMENT: service data and client reviews read every week, and the strongest force named as internal: silos and the habit of escalation.</a:t>
+            </a:r>
+          </a:p>
+          <a:p>
+            <a:r>
+              <a:t>- Strategy Discipline · ITERATIVE, THINKING &amp; LOGIC and PROCESS: one hypothesis, that clients value speed and consistency above the lowest price, tested every quarter.</a:t>
+            </a:r>
+          </a:p>
+          <a:p/>
+          <a:p>
+            <a:r>
+              <a:rPr b="1"/>
+              <a:t>4. If a participant asks where an element goes, use this list.</a:t>
+            </a:r>
+          </a:p>
+          <a:p>
+            <a:r>
+              <a:t>1 · ITERATIVE → Strategy Discipline</a:t>
+            </a:r>
+          </a:p>
+          <a:p>
+            <a:r>
+              <a:t>2 · THINKING &amp; LOGIC → Strategy Discipline</a:t>
+            </a:r>
+          </a:p>
+          <a:p>
+            <a:r>
+              <a:t>3 · PROCESS → Strategy Discipline</a:t>
+            </a:r>
+          </a:p>
+          <a:p>
+            <a:r>
+              <a:t>4 · WHAT → Strategic Position</a:t>
+            </a:r>
+          </a:p>
+          <a:p>
+            <a:r>
+              <a:t>5 · WHY → Strategic Position</a:t>
+            </a:r>
+          </a:p>
+          <a:p>
+            <a:r>
+              <a:t>6 · HOW → Strategic Model</a:t>
+            </a:r>
+          </a:p>
+          <a:p>
+            <a:r>
+              <a:t>7 · WHEN → Strategic Model</a:t>
+            </a:r>
+          </a:p>
+          <a:p>
+            <a:r>
+              <a:t>8 · CREATES VALUE → Value Architecture</a:t>
+            </a:r>
+          </a:p>
+          <a:p>
+            <a:r>
+              <a:t>9 · DELIVERS VALUE → Value Architecture</a:t>
+            </a:r>
+          </a:p>
+          <a:p>
+            <a:r>
+              <a:t>10 · SUSTAINS VALUE → Value Architecture</a:t>
+            </a:r>
+          </a:p>
+          <a:p>
+            <a:r>
+              <a:t>11 · STAKEHOLDERS → Value Architecture</a:t>
+            </a:r>
+          </a:p>
+          <a:p>
+            <a:r>
+              <a:t>12 · NAVIGATING → Strategic Navigation</a:t>
+            </a:r>
+          </a:p>
+          <a:p>
+            <a:r>
+              <a:t>13 · THE FORCES → Strategic Navigation</a:t>
+            </a:r>
+          </a:p>
+          <a:p>
+            <a:r>
+              <a:t>14 · OPERATING ENVIRONMENT → Strategic Navigation</a:t>
+            </a:r>
+          </a:p>
+          <a:p/>
+          <a:p>
+            <a:r>
+              <a:rPr b="1"/>
+              <a:t>ON THE PORTAL, AFTER THE TEACHING:</a:t>
+            </a:r>
+          </a:p>
+          <a:p>
+            <a:r>
+              <a:t>In Section 4 the example's Strategy Architecture is shown under its five headings.</a:t>
             </a:r>
           </a:p>
         </p:txBody>
@@ -7115,236 +6820,211 @@
           <a:lstStyle/>
           <a:p>
             <a:r>
-              <a:rPr lang="en-US" b="1" dirty="0"/>
-              <a:t>4.1 — STEP 1: BUILD THE STRATEGY ARCHITECTURE · SIX CHECKS BEFORE FINALISING</a:t>
-            </a:r>
-          </a:p>
-          <a:p>
-            <a:endParaRPr lang="en-US" dirty="0"/>
-          </a:p>
-          <a:p>
-            <a:r>
-              <a:rPr lang="en-US" b="1" dirty="0"/>
+              <a:rPr b="1"/>
+              <a:t>4.1 — STEP 1 · SIX CHECKS ON THE ARCHITECTURE</a:t>
+            </a:r>
+          </a:p>
+          <a:p/>
+          <a:p>
+            <a:r>
+              <a:rPr b="1"/>
               <a:t>HOW TO TEACH IT:</a:t>
             </a:r>
           </a:p>
-          <a:p>
-            <a:endParaRPr lang="en-US" dirty="0"/>
-          </a:p>
-          <a:p>
-            <a:r>
-              <a:rPr lang="en-US" b="1" dirty="0"/>
+          <a:p/>
+          <a:p>
+            <a:r>
+              <a:rPr b="1"/>
               <a:t>1. Introduce the checks.</a:t>
             </a:r>
           </a:p>
           <a:p>
             <a:r>
-              <a:rPr lang="en-US" b="1" dirty="0"/>
-              <a:t>Say</a:t>
-            </a:r>
-            <a:r>
-              <a:rPr lang="en-US" dirty="0"/>
-              <a:t>: "Before finalising your Strategy Architecture output, your group checks six things."</a:t>
-            </a:r>
-          </a:p>
-          <a:p>
-            <a:endParaRPr lang="en-US" dirty="0"/>
-          </a:p>
-          <a:p>
-            <a:r>
-              <a:rPr lang="en-US" b="1" dirty="0"/>
-              <a:t>2. Check 1.</a:t>
-            </a:r>
-          </a:p>
-          <a:p>
-            <a:r>
-              <a:rPr lang="en-US" b="1" dirty="0"/>
-              <a:t>Read from the slide</a:t>
-            </a:r>
-            <a:r>
-              <a:rPr lang="en-US" dirty="0"/>
-              <a:t>: "Do our choices reinforce one another?"</a:t>
-            </a:r>
-          </a:p>
-          <a:p>
-            <a:r>
-              <a:rPr lang="en-US" dirty="0"/>
-              <a:t>Say how the group checks: "Read the Strategic Position (WHAT, WHY) against the Strategic Model (HOW, WHEN)."</a:t>
-            </a:r>
-          </a:p>
-          <a:p>
-            <a:endParaRPr lang="en-US" dirty="0"/>
-          </a:p>
-          <a:p>
-            <a:r>
-              <a:rPr lang="en-US" b="1" dirty="0"/>
-              <a:t>3. Check 2.</a:t>
-            </a:r>
-          </a:p>
-          <a:p>
-            <a:r>
-              <a:rPr lang="en-US" b="1" dirty="0"/>
-              <a:t>Read from the slide</a:t>
-            </a:r>
-            <a:r>
-              <a:rPr lang="en-US" dirty="0"/>
-              <a:t>: "Where are there contradictions or unresolved tensions?"</a:t>
-            </a:r>
-          </a:p>
-          <a:p>
-            <a:r>
-              <a:rPr lang="en-US" dirty="0"/>
-              <a:t>Say how the group checks: "Each of you names one. Resolve it in the element concerned before you confirm."</a:t>
-            </a:r>
-          </a:p>
-          <a:p>
-            <a:endParaRPr lang="en-US" dirty="0"/>
-          </a:p>
-          <a:p>
-            <a:r>
-              <a:rPr lang="en-US" b="1" dirty="0"/>
-              <a:t>4. Check 3.</a:t>
-            </a:r>
-          </a:p>
-          <a:p>
-            <a:r>
-              <a:rPr lang="en-US" b="1" dirty="0"/>
+              <a:rPr b="1"/>
+              <a:t>Say: </a:t>
+            </a:r>
+            <a:r>
+              <a:rPr/>
+              <a:t>"When the 14 elements are together, the Architecture is read as one strategic system: What is this architecture collectively saying about our organisation's strategy? Six checks guide that reading."</a:t>
+            </a:r>
+          </a:p>
+          <a:p/>
+          <a:p>
+            <a:r>
+              <a:rPr b="1"/>
+              <a:t>2. Take each check, with the example.</a:t>
+            </a:r>
+          </a:p>
+          <a:p>
+            <a:r>
+              <a:rPr b="1"/>
               <a:t>Read from the slide: </a:t>
             </a:r>
             <a:r>
-              <a:rPr lang="en-US" dirty="0"/>
+              <a:rPr/>
+              <a:t>"Do our choices reinforce one another?"</a:t>
+            </a:r>
+          </a:p>
+          <a:p>
+            <a:r>
+              <a:rPr b="1"/>
+              <a:t>Say: </a:t>
+            </a:r>
+            <a:r>
+              <a:rPr/>
+              <a:t>"Kestrel Point's WHAT chooses responsiveness, and its HOW supplies the mechanism: integrated client teams and one operating rhythm."</a:t>
+            </a:r>
+          </a:p>
+          <a:p/>
+          <a:p>
+            <a:r>
+              <a:rPr b="1"/>
+              <a:t>Read from the slide: </a:t>
+            </a:r>
+            <a:r>
+              <a:rPr/>
+              <a:t>"Where are there contradictions or unresolved tensions?"</a:t>
+            </a:r>
+          </a:p>
+          <a:p>
+            <a:r>
+              <a:rPr b="1"/>
+              <a:t>Say: </a:t>
+            </a:r>
+            <a:r>
+              <a:rPr/>
+              <a:t>"STAKEHOLDERS names one: faster service can conflict with margin when it requires extra visits. The Architecture names the tension and holds it."</a:t>
+            </a:r>
+          </a:p>
+          <a:p/>
+          <a:p>
+            <a:r>
+              <a:rPr b="1"/>
+              <a:t>Read from the slide: </a:t>
+            </a:r>
+            <a:r>
+              <a:rPr/>
               <a:t>"Does our HOW support what we have chosen to achieve?"</a:t>
             </a:r>
           </a:p>
           <a:p>
             <a:r>
-              <a:rPr lang="en-US" dirty="0"/>
-              <a:t>Say how the group checks: "Read element 6 against elements 4 and 8."</a:t>
-            </a:r>
-          </a:p>
-          <a:p>
-            <a:endParaRPr lang="en-US" dirty="0"/>
-          </a:p>
-          <a:p>
-            <a:r>
-              <a:rPr lang="en-US" b="1" dirty="0"/>
-              <a:t>5. Check 4.</a:t>
-            </a:r>
-          </a:p>
-          <a:p>
-            <a:r>
-              <a:rPr lang="en-US" b="1" dirty="0"/>
+              <a:rPr b="1"/>
+              <a:t>Say: </a:t>
+            </a:r>
+            <a:r>
+              <a:rPr/>
+              <a:t>"Read element 6 against elements 4 and 8."</a:t>
+            </a:r>
+          </a:p>
+          <a:p/>
+          <a:p>
+            <a:r>
+              <a:rPr b="1"/>
               <a:t>Read from the slide: </a:t>
             </a:r>
             <a:r>
-              <a:rPr lang="en-US" dirty="0"/>
+              <a:rPr/>
               <a:t>"Does our timing and sequencing reflect the realities of our capability and environment?"</a:t>
             </a:r>
           </a:p>
           <a:p>
             <a:r>
-              <a:rPr lang="en-US" dirty="0"/>
-              <a:t>Say how the group checks: "Read element 7 against elements 6, 13 and 14."</a:t>
-            </a:r>
-          </a:p>
-          <a:p>
-            <a:endParaRPr lang="en-US" dirty="0"/>
-          </a:p>
-          <a:p>
-            <a:r>
-              <a:rPr lang="en-US" b="1" dirty="0"/>
-              <a:t>6. Check 5.</a:t>
-            </a:r>
-          </a:p>
-          <a:p>
-            <a:r>
-              <a:rPr lang="en-US" b="1" dirty="0"/>
+              <a:rPr b="1"/>
+              <a:t>Say: </a:t>
+            </a:r>
+            <a:r>
+              <a:rPr/>
+              <a:t>"Kestrel Point's WHEN puts the request system in place before decision rights move to the hubs."</a:t>
+            </a:r>
+          </a:p>
+          <a:p/>
+          <a:p>
+            <a:r>
+              <a:rPr b="1"/>
               <a:t>Read from the slide: </a:t>
             </a:r>
             <a:r>
-              <a:rPr lang="en-US" dirty="0"/>
+              <a:rPr/>
               <a:t>"Have we addressed how value will be created, delivered and sustained?"</a:t>
             </a:r>
           </a:p>
           <a:p>
             <a:r>
-              <a:rPr lang="en-US" dirty="0"/>
-              <a:t>Say how the group checks: "Read elements 8, 9 and 10 side by side. Look hardest at element 10."</a:t>
-            </a:r>
-          </a:p>
-          <a:p>
-            <a:endParaRPr lang="en-US" dirty="0"/>
-          </a:p>
-          <a:p>
-            <a:r>
-              <a:rPr lang="en-US" b="1" dirty="0"/>
-              <a:t>7. Check 6.</a:t>
-            </a:r>
-          </a:p>
-          <a:p>
-            <a:r>
-              <a:rPr lang="en-US" b="1" dirty="0"/>
+              <a:rPr b="1"/>
+              <a:t>Say: </a:t>
+            </a:r>
+            <a:r>
+              <a:rPr/>
+              <a:t>"Read elements 8, 9 and 10 side by side. Look hardest at element 10."</a:t>
+            </a:r>
+          </a:p>
+          <a:p/>
+          <a:p>
+            <a:r>
+              <a:rPr b="1"/>
               <a:t>Read from the slide: </a:t>
             </a:r>
             <a:r>
-              <a:rPr lang="en-US" dirty="0"/>
+              <a:rPr/>
               <a:t>"Does the architecture represent the strategic position we collectively intend?"</a:t>
             </a:r>
           </a:p>
           <a:p>
             <a:r>
-              <a:rPr lang="en-US" dirty="0"/>
-              <a:t>Say how the group checks: "Each of you answers yes or no aloud."</a:t>
-            </a:r>
-          </a:p>
-          <a:p>
-            <a:endParaRPr lang="en-US" dirty="0"/>
-          </a:p>
-          <a:p>
-            <a:r>
-              <a:rPr lang="en-US" b="1" dirty="0"/>
-              <a:t>8. Say what a group does when a check fails.</a:t>
-            </a:r>
-          </a:p>
-          <a:p>
-            <a:r>
-              <a:rPr lang="en-US" dirty="0"/>
-              <a:t>Say: "Return to the element concerned, revise it and confirm it again. Then carry the change into the text of the output."</a:t>
-            </a:r>
-          </a:p>
-          <a:p>
-            <a:endParaRPr lang="en-US" dirty="0"/>
-          </a:p>
-          <a:p>
-            <a:r>
-              <a:rPr lang="en-US" b="1" dirty="0"/>
-              <a:t>9. Bridge to 4.2.</a:t>
-            </a:r>
-          </a:p>
-          <a:p>
-            <a:r>
-              <a:rPr lang="en-US" b="1" dirty="0"/>
+              <a:rPr b="1"/>
               <a:t>Say: </a:t>
             </a:r>
             <a:r>
-              <a:rPr lang="en-US" dirty="0"/>
-              <a:t>"The completed Strategy Architecture becomes the source for Step 2. </a:t>
-            </a:r>
-          </a:p>
-          <a:p>
-            <a:r>
-              <a:rPr lang="en-US" dirty="0"/>
-              <a:t>The Architecture holds the logic. </a:t>
-            </a:r>
-          </a:p>
-          <a:p>
-            <a:r>
-              <a:rPr lang="en-US" dirty="0"/>
-              <a:t>Step 2 takes four of its elements, WHAT, WHY, HOW and WHEN, and crystallises them into one statement."</a:t>
-            </a:r>
-          </a:p>
-          <a:p>
-            <a:endParaRPr lang="en-US" dirty="0"/>
+              <a:rPr/>
+              <a:t>"Each member answers yes or no aloud."</a:t>
+            </a:r>
+          </a:p>
+          <a:p/>
+          <a:p>
+            <a:r>
+              <a:rPr b="1"/>
+              <a:t>3. Say what a group does when a check fails.</a:t>
+            </a:r>
+          </a:p>
+          <a:p>
+            <a:r>
+              <a:rPr b="1"/>
+              <a:t>Say: </a:t>
+            </a:r>
+            <a:r>
+              <a:rPr/>
+              <a:t>"Return to the element concerned, revise it, and carry the change into the Architecture."</a:t>
+            </a:r>
+          </a:p>
+          <a:p/>
+          <a:p>
+            <a:r>
+              <a:rPr b="1"/>
+              <a:t>4. Bridge to 4.2.</a:t>
+            </a:r>
+          </a:p>
+          <a:p>
+            <a:r>
+              <a:rPr b="1"/>
+              <a:t>Say: </a:t>
+            </a:r>
+            <a:r>
+              <a:rPr/>
+              <a:t>"The Architecture becomes the source for Step 2. Step 2 takes four of its elements, WHAT, WHY, HOW and WHEN, and crystallises them into one statement."</a:t>
+            </a:r>
+          </a:p>
+          <a:p/>
+          <a:p>
+            <a:r>
+              <a:rPr b="1"/>
+              <a:t>ON THE PORTAL, AFTER THE TEACHING:</a:t>
+            </a:r>
+          </a:p>
+          <a:p>
+            <a:r>
+              <a:t>The six checks sit beside the Strategy Architecture box in Section 5, Step 1.</a:t>
+            </a:r>
           </a:p>
         </p:txBody>
       </p:sp>
@@ -7582,268 +7262,154 @@
           <a:lstStyle/>
           <a:p>
             <a:r>
-              <a:rPr lang="en-US" b="1" dirty="0"/>
-              <a:t>4.2 — STEP 2: DERIVE THE STRATEGY INTENT STATEMENT (WHAT · WHY · HOW · WHEN → ONE STRATEGIC AMBITION)</a:t>
-            </a:r>
-          </a:p>
-          <a:p>
-            <a:endParaRPr lang="en-US" dirty="0"/>
-          </a:p>
-          <a:p>
-            <a:r>
-              <a:rPr lang="en-US" b="1" dirty="0"/>
+              <a:rPr b="1"/>
+              <a:t>4.2 — STEP 2 · THE STRATEGY INTENT STATEMENT (WHAT · WHY · HOW · WHEN → ONE STRATEGIC AMBITION)</a:t>
+            </a:r>
+          </a:p>
+          <a:p/>
+          <a:p>
+            <a:r>
+              <a:rPr b="1"/>
               <a:t>HOW TO TEACH IT:</a:t>
             </a:r>
           </a:p>
-          <a:p>
-            <a:endParaRPr lang="en-US" dirty="0"/>
-          </a:p>
-          <a:p>
-            <a:r>
-              <a:rPr lang="en-US" b="1" dirty="0"/>
+          <a:p/>
+          <a:p>
+            <a:r>
+              <a:rPr b="1"/>
               <a:t>1. State the step.</a:t>
             </a:r>
           </a:p>
           <a:p>
             <a:r>
-              <a:rPr lang="en-US" b="1" dirty="0"/>
+              <a:rPr b="1"/>
               <a:t>Say: </a:t>
             </a:r>
             <a:r>
-              <a:rPr lang="en-US" dirty="0"/>
-              <a:t>"With the Strategy Architecture established, each group now crystallises that thinking into a Strategy Intent Statement. </a:t>
-            </a:r>
-          </a:p>
-          <a:p>
-            <a:r>
-              <a:rPr lang="en-US" dirty="0"/>
-              <a:t>The Architecture contains the depth. The Intent must provide the clarity."</a:t>
-            </a:r>
-          </a:p>
-          <a:p>
-            <a:endParaRPr lang="en-US" dirty="0"/>
-          </a:p>
-          <a:p>
-            <a:r>
-              <a:rPr lang="en-US" b="1" dirty="0"/>
-              <a:t>2. Bring forward the four dimensions on the slide.</a:t>
-            </a:r>
-          </a:p>
-          <a:p>
-            <a:r>
-              <a:rPr lang="en-US" b="1" dirty="0"/>
+              <a:rPr/>
+              <a:t>"The Architecture contains the depth. The Intent must provide the clarity."</a:t>
+            </a:r>
+          </a:p>
+          <a:p/>
+          <a:p>
+            <a:r>
+              <a:rPr b="1"/>
+              <a:t>2. Bring forward the four dimensions on the slide, with what Kestrel Point's elements say.</a:t>
+            </a:r>
+          </a:p>
+          <a:p>
+            <a:r>
+              <a:t>- WHAT gave the ambition: fast, consistent and effortless service that clients rely on first.</a:t>
+            </a:r>
+          </a:p>
+          <a:p>
+            <a:r>
+              <a:t>- WHY gave the reason it holds together: clients reward responsiveness with renewals and new sites.</a:t>
+            </a:r>
+          </a:p>
+          <a:p>
+            <a:r>
+              <a:t>- HOW gave the mechanism: integrated client teams and one cross-functional operating rhythm.</a:t>
+            </a:r>
+          </a:p>
+          <a:p>
+            <a:r>
+              <a:t>- WHEN gave the order: responsiveness first, scalable service models after, within 2027 to 2029.</a:t>
+            </a:r>
+          </a:p>
+          <a:p/>
+          <a:p>
+            <a:r>
+              <a:rPr b="1"/>
+              <a:t>3. Read the statement the four produced.</a:t>
+            </a:r>
+          </a:p>
+          <a:p>
+            <a:r>
+              <a:rPr b="1"/>
               <a:t>Say: </a:t>
             </a:r>
             <a:r>
-              <a:rPr lang="en-US" dirty="0"/>
-              <a:t>"These are the four dimensions already established through your architecture. They are your group’s own answers to elements 4 to 7."</a:t>
-            </a:r>
-          </a:p>
-          <a:p>
-            <a:r>
-              <a:rPr lang="en-US" dirty="0"/>
-              <a:t>- WHAT — the value the organisation has chosen to create and its field of play.</a:t>
-            </a:r>
-          </a:p>
-          <a:p>
-            <a:r>
-              <a:rPr lang="en-US" dirty="0"/>
-              <a:t>- WHY — the rationale for those choices and why they matter.</a:t>
-            </a:r>
-          </a:p>
-          <a:p>
-            <a:r>
-              <a:rPr lang="en-US" dirty="0"/>
-              <a:t>- HOW — the operating model, capabilities and mechanisms through which the value will be delivered.</a:t>
-            </a:r>
-          </a:p>
-          <a:p>
-            <a:r>
-              <a:rPr lang="en-US" dirty="0"/>
-              <a:t>- WHEN — the timing, sequencing and strategic moves through which the ambition will be pursued.</a:t>
-            </a:r>
-          </a:p>
-          <a:p>
-            <a:endParaRPr lang="en-US" dirty="0"/>
-          </a:p>
-          <a:p>
-            <a:r>
-              <a:rPr lang="en-US" b="1" dirty="0"/>
-              <a:t>3. Give the task.</a:t>
-            </a:r>
-          </a:p>
-          <a:p>
-            <a:r>
-              <a:rPr lang="en-US" b="1" dirty="0"/>
+              <a:rPr/>
+              <a:t>"Kestrel Point's Strategy Intent Statement reads: By the end of 2029, Kestrel Point will be the service partner its corporate clients rely on first, delivering fast, consistent and effortless facilities and technical service through integrated client teams and one cross-functional operating rhythm, building responsiveness first and scalable service models after."</a:t>
+            </a:r>
+          </a:p>
+          <a:p/>
+          <a:p>
+            <a:r>
+              <a:rPr b="1"/>
+              <a:t>4. Protect the Intent from overload.</a:t>
+            </a:r>
+          </a:p>
+          <a:p>
+            <a:r>
+              <a:rPr b="1"/>
               <a:t>Say: </a:t>
             </a:r>
             <a:r>
-              <a:rPr lang="en-US" dirty="0"/>
-              <a:t>"Review these four dimensions together and derive one crisp Strategy Intent Statement."</a:t>
-            </a:r>
-          </a:p>
-          <a:p>
-            <a:endParaRPr lang="en-US" dirty="0"/>
-          </a:p>
-          <a:p>
-            <a:r>
-              <a:rPr lang="en-US" b="1" dirty="0"/>
-              <a:t>4. Protect the Intent from becoming overloaded.</a:t>
-            </a:r>
-          </a:p>
-          <a:p>
-            <a:r>
-              <a:rPr lang="en-US" b="1" dirty="0"/>
-              <a:t>Say</a:t>
-            </a:r>
-            <a:r>
-              <a:rPr lang="en-US" dirty="0"/>
-              <a:t>: "You may want to carry every important point from the Architecture into the statement. </a:t>
-            </a:r>
-          </a:p>
-          <a:p>
-            <a:r>
-              <a:rPr lang="en-US" dirty="0"/>
-              <a:t>The Architecture already holds that detail. The Strategy Intent Statement crystallises the ambition. The Architecture keeps the detail."</a:t>
-            </a:r>
-          </a:p>
-          <a:p>
-            <a:endParaRPr lang="en-US" dirty="0"/>
-          </a:p>
-          <a:p>
-            <a:r>
-              <a:rPr lang="en-US" b="1" dirty="0"/>
-              <a:t>5. Set the standard.</a:t>
-            </a:r>
-          </a:p>
-          <a:p>
-            <a:r>
-              <a:rPr lang="en-US" b="1" dirty="0"/>
+              <a:rPr/>
+              <a:t>"Notice what the statement leaves out: the request system, the hub decision rights and the subcontractor standards stay in the Architecture.</a:t>
+            </a:r>
+          </a:p>
+          <a:p>
+            <a:r>
+              <a:t>The statement carries the ambition. A strong Intent lets a leader understand the strategic position without a paragraph of explanation."</a:t>
+            </a:r>
+          </a:p>
+          <a:p/>
+          <a:p>
+            <a:r>
+              <a:rPr b="1"/>
+              <a:t>Deepen, say: </a:t>
+            </a:r>
+            <a:r>
+              <a:rPr/>
+              <a:t>"What the people who carry a strategy have understood and internalised survives the loss of any document.</a:t>
+            </a:r>
+          </a:p>
+          <a:p>
+            <a:r>
+              <a:t>Build the strategy into their knowledge and conviction."</a:t>
+            </a:r>
+          </a:p>
+          <a:p>
+            <a:r>
+              <a:t>(Insight: Strategy carried by people. Source: Journal, 16 February 2026 — Professional Insights: Strategy)</a:t>
+            </a:r>
+          </a:p>
+          <a:p/>
+          <a:p>
+            <a:r>
+              <a:rPr b="1"/>
+              <a:t>5. Give the test, from the foot of the slide.</a:t>
+            </a:r>
+          </a:p>
+          <a:p>
+            <a:r>
+              <a:rPr b="1"/>
               <a:t>Say: </a:t>
             </a:r>
             <a:r>
-              <a:rPr lang="en-US" dirty="0"/>
-              <a:t>"A strong Intent should allow a leader to understand the organisation's strategic position without needing a paragraph of explanation."</a:t>
-            </a:r>
-          </a:p>
-          <a:p>
-            <a:endParaRPr lang="en-US" dirty="0"/>
-          </a:p>
-          <a:p>
-            <a:r>
-              <a:rPr lang="en-US" b="1" dirty="0"/>
-              <a:t>Add: </a:t>
-            </a:r>
-            <a:r>
-              <a:rPr lang="en-US" dirty="0"/>
-              <a:t>"A strong statement carries all four dimensions: the value chosen and the field of play, the rationale, the mechanism and the timing. It is crisp, directional and easy to express.“</a:t>
-            </a:r>
-          </a:p>
-          <a:p>
-            <a:endParaRPr lang="en-US" dirty="0"/>
-          </a:p>
-          <a:p>
-            <a:r>
-              <a:rPr lang="en-US" b="1" dirty="0"/>
-              <a:t>Deepen, say</a:t>
-            </a:r>
-            <a:r>
-              <a:rPr lang="en-US" dirty="0"/>
-              <a:t>: "What the people who carry a strategy have understood and internalised survives the loss of any document. </a:t>
-            </a:r>
-          </a:p>
-          <a:p>
-            <a:r>
-              <a:rPr lang="en-US" dirty="0"/>
-              <a:t>Build the strategy into their knowledge and conviction."</a:t>
-            </a:r>
-          </a:p>
-          <a:p>
-            <a:r>
-              <a:rPr lang="en-US" dirty="0"/>
-              <a:t>(Insight: Strategy carried by people. Source: Journal, 16 February 2026 — Professional Insights: Strategy)</a:t>
-            </a:r>
-          </a:p>
-          <a:p>
-            <a:endParaRPr lang="en-US" dirty="0"/>
-          </a:p>
-          <a:p>
-            <a:r>
-              <a:rPr lang="en-US" b="1" dirty="0"/>
-              <a:t>6. Give the confirmation question, from the foot of the slide.</a:t>
-            </a:r>
-          </a:p>
-          <a:p>
-            <a:r>
-              <a:rPr lang="en-US" dirty="0"/>
-              <a:t>Say: "Once the statement is drafted, read it against your completed Architecture and confirm: </a:t>
-            </a:r>
-          </a:p>
-          <a:p>
-            <a:r>
-              <a:rPr lang="en-US" dirty="0"/>
-              <a:t>Does this statement faithfully express the strategic ambition contained in our Architecture?"</a:t>
-            </a:r>
-          </a:p>
-          <a:p>
-            <a:endParaRPr lang="en-US" dirty="0"/>
-          </a:p>
-          <a:p>
-            <a:r>
-              <a:rPr lang="en-US" b="1" dirty="0"/>
-              <a:t>7. Say what a group does when the statement exposes a contradiction.</a:t>
-            </a:r>
-          </a:p>
-          <a:p>
-            <a:r>
-              <a:rPr lang="en-US" dirty="0"/>
-              <a:t>Say: "Where the statement exposes a contradiction in the Architecture, resolve the underlying contradiction before finalising the Intent."</a:t>
-            </a:r>
-          </a:p>
-          <a:p>
-            <a:endParaRPr lang="en-US" dirty="0"/>
-          </a:p>
-          <a:p>
-            <a:r>
-              <a:rPr lang="en-US" b="1" dirty="0"/>
-              <a:t>8. Bridge to 4.3.</a:t>
-            </a:r>
-          </a:p>
-          <a:p>
-            <a:r>
-              <a:rPr lang="en-US" dirty="0"/>
-              <a:t>Say: "The confirmed Strategy Intent becomes the source for Step 3."</a:t>
-            </a:r>
-          </a:p>
-          <a:p>
-            <a:endParaRPr lang="en-US" dirty="0"/>
-          </a:p>
-          <a:p>
-            <a:r>
-              <a:rPr lang="en-US" b="1" dirty="0"/>
+              <a:rPr/>
+              <a:t>"The statement is read against the Architecture: Does this statement faithfully express the strategic ambition contained in our Architecture?</a:t>
+            </a:r>
+          </a:p>
+          <a:p>
+            <a:r>
+              <a:t>Where it exposes a contradiction, the contradiction is resolved in the Architecture first."</a:t>
+            </a:r>
+          </a:p>
+          <a:p/>
+          <a:p>
+            <a:r>
+              <a:rPr b="1"/>
               <a:t>ON THE PORTAL, AFTER THE TEACHING:</a:t>
             </a:r>
           </a:p>
           <a:p>
             <a:r>
-              <a:rPr lang="en-US" dirty="0"/>
-              <a:t>In 4.2 of the participant file each group sees its own answers for WHAT, WHY, HOW and WHEN, deduces one crisp Strategy Intent Statement from them and types it in. </a:t>
-            </a:r>
-          </a:p>
-          <a:p>
-            <a:r>
-              <a:rPr lang="en-US" dirty="0"/>
-              <a:t>The group confirms the statement. </a:t>
-            </a:r>
-          </a:p>
-          <a:p>
-            <a:r>
-              <a:rPr lang="en-US" dirty="0"/>
-              <a:t>It can then be printed. Every member types the agreed statement into their own page.</a:t>
-            </a:r>
-          </a:p>
-          <a:p>
-            <a:endParaRPr lang="en-US" dirty="0"/>
+              <a:t>Section 4.2 of the participant file shows the four cards and the example's statement.</a:t>
+            </a:r>
           </a:p>
         </p:txBody>
       </p:sp>
@@ -7928,302 +7494,127 @@
           <a:lstStyle/>
           <a:p>
             <a:r>
-              <a:rPr lang="en-US" b="1" dirty="0"/>
-              <a:t>4.3 — STEP 3: BUILD SUCCESS IN PRACTICE · THE FOUR DOMAINS</a:t>
-            </a:r>
-          </a:p>
-          <a:p>
-            <a:endParaRPr lang="en-US" dirty="0"/>
-          </a:p>
-          <a:p>
-            <a:r>
-              <a:rPr lang="en-US" b="1" dirty="0"/>
+              <a:rPr b="1"/>
+              <a:t>4.3 — STEP 3 · SUCCESS IN PRACTICE</a:t>
+            </a:r>
+          </a:p>
+          <a:p/>
+          <a:p>
+            <a:r>
+              <a:rPr b="1"/>
               <a:t>HOW TO TEACH IT:</a:t>
             </a:r>
           </a:p>
-          <a:p>
-            <a:endParaRPr lang="en-US" dirty="0"/>
-          </a:p>
-          <a:p>
-            <a:r>
-              <a:rPr lang="en-US" b="1" dirty="0"/>
-              <a:t>1. Link the step to the one before it.</a:t>
-            </a:r>
-          </a:p>
-          <a:p>
-            <a:r>
-              <a:rPr lang="en-US" b="1" dirty="0"/>
-              <a:t>Say: "</a:t>
-            </a:r>
-            <a:r>
-              <a:rPr lang="en-US" dirty="0"/>
-              <a:t>The Strategy Intent Statement establishes the ambition. Each group now defines what must be seen, experienced and executed for that ambition to become reality within the agreed time horizon."</a:t>
-            </a:r>
-          </a:p>
-          <a:p>
-            <a:endParaRPr lang="en-US" dirty="0"/>
-          </a:p>
-          <a:p>
-            <a:r>
-              <a:rPr lang="en-US" b="1" dirty="0"/>
-              <a:t>2. Position the group inside the future.</a:t>
-            </a:r>
-          </a:p>
-          <a:p>
-            <a:r>
-              <a:rPr lang="en-US" b="1" dirty="0"/>
-              <a:t>Say</a:t>
-            </a:r>
-            <a:r>
-              <a:rPr lang="en-US" dirty="0"/>
-              <a:t>: "Stand inside the future described by your Strategy Intent. </a:t>
-            </a:r>
-          </a:p>
-          <a:p>
-            <a:r>
-              <a:rPr lang="en-US" dirty="0"/>
-              <a:t>One central question guides the work: If our Strategy Intent is successful, what should we see in practice?"</a:t>
-            </a:r>
-          </a:p>
-          <a:p>
-            <a:endParaRPr lang="en-US" dirty="0"/>
-          </a:p>
-          <a:p>
-            <a:r>
-              <a:rPr lang="en-US" b="1" dirty="0"/>
+          <a:p/>
+          <a:p>
+            <a:r>
+              <a:rPr b="1"/>
+              <a:t>1. Position the room inside the future.</a:t>
+            </a:r>
+          </a:p>
+          <a:p>
+            <a:r>
+              <a:rPr b="1"/>
+              <a:t>Say: </a:t>
+            </a:r>
+            <a:r>
+              <a:rPr/>
+              <a:t>"Stand inside the future Kestrel Point's Intent describes. One central question guides the step: If our Strategy Intent is successful, what should we see in practice?"</a:t>
+            </a:r>
+          </a:p>
+          <a:p/>
+          <a:p>
+            <a:r>
+              <a:rPr b="1"/>
               <a:t>Deepen, say: </a:t>
             </a:r>
             <a:r>
-              <a:rPr lang="en-US" dirty="0"/>
+              <a:rPr/>
               <a:t>"Long-term direction sometimes requires acting on a credible promise before the outcomes are visible, while still facing current facts honestly."</a:t>
             </a:r>
           </a:p>
           <a:p>
             <a:r>
-              <a:rPr lang="en-US" dirty="0"/>
               <a:t>(Insight: Credible promise, honest facts. Source: Journal, 17 August 2026 — Professional Insights: Strategy)</a:t>
             </a:r>
           </a:p>
-          <a:p>
-            <a:endParaRPr lang="en-US" dirty="0"/>
-          </a:p>
-          <a:p>
-            <a:r>
-              <a:rPr lang="en-US" b="1" dirty="0"/>
-              <a:t>3. Explain the method.</a:t>
-            </a:r>
-          </a:p>
-          <a:p>
-            <a:r>
-              <a:rPr lang="en-US" b="1" dirty="0"/>
+          <a:p/>
+          <a:p>
+            <a:r>
+              <a:rPr b="1"/>
+              <a:t>2. Explain the method.</a:t>
+            </a:r>
+          </a:p>
+          <a:p>
+            <a:r>
+              <a:rPr b="1"/>
               <a:t>Say: </a:t>
             </a:r>
             <a:r>
-              <a:rPr lang="en-US" dirty="0"/>
-              <a:t>"Your group works through the four SiP domains. </a:t>
-            </a:r>
-          </a:p>
-          <a:p>
-            <a:r>
-              <a:rPr lang="en-US" dirty="0"/>
-              <a:t>In each domain you answer three input questions, then derive one statement for the domain from your answers. </a:t>
-            </a:r>
-          </a:p>
-          <a:p>
-            <a:endParaRPr lang="en-US" dirty="0"/>
-          </a:p>
-          <a:p>
-            <a:r>
-              <a:rPr lang="en-US" dirty="0"/>
-              <a:t>The statement describes what is happening when the Strategy Intent is working."</a:t>
-            </a:r>
-          </a:p>
-          <a:p>
-            <a:endParaRPr lang="en-US" dirty="0"/>
-          </a:p>
-          <a:p>
-            <a:r>
-              <a:rPr lang="en-US" b="1" dirty="0"/>
-              <a:t>4. D1 · Customer Experience &amp; Value.</a:t>
-            </a:r>
-          </a:p>
-          <a:p>
-            <a:r>
-              <a:rPr lang="en-US" b="1" dirty="0"/>
+              <a:rPr/>
+              <a:t>"Each domain has three questions. The answers lead to one statement for the domain, describing what is happening when the Intent is working."</a:t>
+            </a:r>
+          </a:p>
+          <a:p/>
+          <a:p>
+            <a:r>
+              <a:rPr b="1"/>
+              <a:t>3. Read the example's four statements, one domain at a time.</a:t>
+            </a:r>
+          </a:p>
+          <a:p>
+            <a:r>
+              <a:t>D1 · Customer Experience &amp; Value. Say: "Every client experiences fast, consistent and effortless service: requests are acknowledged at once, most are resolved at first contact, and key accounts are engaged before problems surface."</a:t>
+            </a:r>
+          </a:p>
+          <a:p>
+            <a:r>
+              <a:t>D2 · Operational Capability &amp; Execution Rhythm. Say: "Kestrel Point moves quickly from insight to action across functions: decisions are taken at the right level within a day, handovers run without delay, and reporting is limited to what drives action."</a:t>
+            </a:r>
+          </a:p>
+          <a:p>
+            <a:r>
+              <a:t>D3 · People &amp; Culture Dynamics. Say: "People hold shared ownership of enterprise priorities: teams work across functions without escalation, and every leader can name how their work serves the client promise."</a:t>
+            </a:r>
+          </a:p>
+          <a:p>
+            <a:r>
+              <a:t>D4 · Enterprise Value Creation. Say: "Scalable, efficient service models strengthen enterprise performance: margins hold steady, growth comes from retained and expanded key accounts, and leadership attention goes to high-value work."</a:t>
+            </a:r>
+          </a:p>
+          <a:p/>
+          <a:p>
+            <a:r>
+              <a:rPr b="1"/>
+              <a:t>4. Test the four, using the two tests from Section 3.</a:t>
+            </a:r>
+          </a:p>
+          <a:p>
+            <a:r>
+              <a:rPr b="1"/>
               <a:t>Say: </a:t>
             </a:r>
             <a:r>
-              <a:rPr lang="en-US" dirty="0"/>
-              <a:t>"Describe what customers and other value recipients experience when the Strategy Intent is working. </a:t>
-            </a:r>
-          </a:p>
-          <a:p>
-            <a:r>
-              <a:rPr lang="en-US" dirty="0"/>
-              <a:t>Use the observable indicators explored in Section 3 to deepen the discussion where useful, but keep your group’s final output focused on your own Strategy Intent. </a:t>
-            </a:r>
-          </a:p>
-          <a:p>
-            <a:r>
-              <a:rPr lang="en-US" dirty="0"/>
-              <a:t>Your group produces one Customer Experience &amp; Value statement."</a:t>
-            </a:r>
-          </a:p>
-          <a:p>
-            <a:r>
-              <a:rPr lang="en-US" dirty="0"/>
-              <a:t>Give the lead question (the slide shows it in short form): "If the intent succeeds, what should customers and other value recipients see and experience?"</a:t>
-            </a:r>
-          </a:p>
-          <a:p>
-            <a:endParaRPr lang="en-US" dirty="0"/>
-          </a:p>
-          <a:p>
-            <a:r>
-              <a:rPr lang="en-US" b="1" dirty="0"/>
-              <a:t>5. D2 · Operational Capability &amp; Execution Rhythm.</a:t>
-            </a:r>
-          </a:p>
-          <a:p>
-            <a:r>
-              <a:rPr lang="en-US" b="1" dirty="0"/>
-              <a:t>Say: </a:t>
-            </a:r>
-            <a:r>
-              <a:rPr lang="en-US" dirty="0"/>
-              <a:t>"Describe how the organisation operates, coordinates, delivers and adapts when the capabilities required by the Strategy Intent are functioning effectively. </a:t>
-            </a:r>
-          </a:p>
-          <a:p>
-            <a:r>
-              <a:rPr lang="en-US" dirty="0"/>
-              <a:t>Your group produces one Operational Capability &amp; Execution Rhythm statement."</a:t>
-            </a:r>
-          </a:p>
-          <a:p>
-            <a:r>
-              <a:rPr lang="en-US" dirty="0"/>
-              <a:t>Give the lead question (the slide shows it in short form): "If the intent succeeds, what should be visible in how the organisation operates and executes?"</a:t>
-            </a:r>
-          </a:p>
-          <a:p>
-            <a:endParaRPr lang="en-US" dirty="0"/>
-          </a:p>
-          <a:p>
-            <a:r>
-              <a:rPr lang="en-US" b="1" dirty="0"/>
-              <a:t>6. D3 · People &amp; Culture Dynamics.</a:t>
-            </a:r>
-          </a:p>
-          <a:p>
-            <a:r>
-              <a:rPr lang="en-US" b="1" dirty="0"/>
-              <a:t>Say: </a:t>
-            </a:r>
-            <a:r>
-              <a:rPr lang="en-US" dirty="0"/>
-              <a:t>"Describe how people understand the Strategy Intent, make decisions, collaborate, take ownership and behave when the intent is embedded in organisational practice. </a:t>
-            </a:r>
-          </a:p>
-          <a:p>
-            <a:r>
-              <a:rPr lang="en-US" dirty="0"/>
-              <a:t>Your group produces one People &amp; Culture Dynamics statement."</a:t>
-            </a:r>
-          </a:p>
-          <a:p>
-            <a:r>
-              <a:rPr lang="en-US" dirty="0"/>
-              <a:t>Give the lead question (the slide shows it in short form): "If the intent succeeds, what should be visible in how people understand, decide and behave?"</a:t>
-            </a:r>
-          </a:p>
-          <a:p>
-            <a:endParaRPr lang="en-US" dirty="0"/>
-          </a:p>
-          <a:p>
-            <a:r>
-              <a:rPr lang="en-US" b="1" dirty="0"/>
-              <a:t>7. D4 · Enterprise Value Creation.</a:t>
-            </a:r>
-          </a:p>
-          <a:p>
-            <a:r>
-              <a:rPr lang="en-US" b="1" dirty="0"/>
-              <a:t>Say: </a:t>
-            </a:r>
-            <a:r>
-              <a:rPr lang="en-US" dirty="0"/>
-              <a:t>"Describe how the organisation is benefiting across the measures of enterprise success that matter to this Strategy Intent. </a:t>
-            </a:r>
-          </a:p>
-          <a:p>
-            <a:r>
-              <a:rPr lang="en-US" dirty="0"/>
-              <a:t>Your group produces one Enterprise Value Creation statement."</a:t>
-            </a:r>
-          </a:p>
-          <a:p>
-            <a:r>
-              <a:rPr lang="en-US" dirty="0"/>
-              <a:t>Give the lead question (the slide shows it in short form): "If the intent succeeds, how should the organisation benefit across its success metrics?"</a:t>
-            </a:r>
-          </a:p>
-          <a:p>
-            <a:endParaRPr lang="en-US" dirty="0"/>
-          </a:p>
-          <a:p>
-            <a:r>
-              <a:rPr lang="en-US" b="1" dirty="0"/>
-              <a:t>8. Bridge to the next slide.</a:t>
-            </a:r>
-          </a:p>
-          <a:p>
-            <a:r>
-              <a:rPr lang="en-US" dirty="0"/>
-              <a:t>Say: "Four statements, one for each domain. The next slide shows how your group confirms and tests them."</a:t>
-            </a:r>
-          </a:p>
-          <a:p>
-            <a:endParaRPr lang="en-US" dirty="0"/>
-          </a:p>
-          <a:p>
-            <a:r>
-              <a:rPr lang="en-US" b="1" dirty="0"/>
+              <a:rPr/>
+              <a:t>"Depth: each statement names conditions a leader could observe in a hub.</a:t>
+            </a:r>
+          </a:p>
+          <a:p>
+            <a:r>
+              <a:t>Balance: customer, operational, people and enterprise success each carry their own statement, so no one perspective defines success for the whole organisation."</a:t>
+            </a:r>
+          </a:p>
+          <a:p/>
+          <a:p>
+            <a:r>
+              <a:rPr b="1"/>
               <a:t>ON THE PORTAL, AFTER THE TEACHING:</a:t>
             </a:r>
           </a:p>
           <a:p>
             <a:r>
-              <a:rPr lang="en-US" dirty="0"/>
-              <a:t>In 4.3 of the participant file, for each SiP domain the group:</a:t>
-            </a:r>
-          </a:p>
-          <a:p>
-            <a:r>
-              <a:rPr lang="en-US" dirty="0"/>
-              <a:t>answers the three input questions;</a:t>
-            </a:r>
-          </a:p>
-          <a:p>
-            <a:r>
-              <a:rPr lang="en-US" dirty="0"/>
-              <a:t>derives one statement for the domain from those answers and types it in;</a:t>
-            </a:r>
-          </a:p>
-          <a:p>
-            <a:r>
-              <a:rPr lang="en-US" dirty="0"/>
-              <a:t>confirms the statement.</a:t>
-            </a:r>
-          </a:p>
-          <a:p>
-            <a:r>
-              <a:rPr lang="en-US" dirty="0"/>
-              <a:t>The group writes every statement, and every member types the agreed entries into their own page. When all four statements are confirmed, they appear together, numbered 1 to 4, as the group's Success in Practice. The group confirms it. It can then print its three outputs as one report: the Strategy Intent Design.</a:t>
-            </a:r>
-          </a:p>
-          <a:p>
-            <a:endParaRPr lang="en-US" dirty="0"/>
+              <a:t>In Section 4.3 each domain opens to show the example's three answers and its statement.</a:t>
+            </a:r>
           </a:p>
         </p:txBody>
       </p:sp>
@@ -8308,140 +7699,78 @@
           <a:lstStyle/>
           <a:p>
             <a:r>
-              <a:rPr lang="en-US" b="1" dirty="0"/>
-              <a:t>4.3 — STEP 3: BUILD SUCCESS IN PRACTICE · THREE CONNECTED OUTPUTS</a:t>
-            </a:r>
-          </a:p>
-          <a:p>
-            <a:endParaRPr lang="en-US" dirty="0"/>
-          </a:p>
-          <a:p>
-            <a:r>
-              <a:rPr lang="en-US" b="1" dirty="0"/>
+              <a:rPr b="1"/>
+              <a:t>4.3 — STEP 3 · THREE CONNECTED OUTPUTS</a:t>
+            </a:r>
+          </a:p>
+          <a:p/>
+          <a:p>
+            <a:r>
+              <a:rPr b="1"/>
               <a:t>HOW TO TEACH IT:</a:t>
             </a:r>
           </a:p>
-          <a:p>
-            <a:endParaRPr lang="en-US" dirty="0"/>
-          </a:p>
-          <a:p>
-            <a:r>
-              <a:rPr lang="en-US" b="1" dirty="0"/>
+          <a:p/>
+          <a:p>
+            <a:r>
+              <a:rPr b="1"/>
               <a:t>1. Show the three outputs side by side.</a:t>
             </a:r>
           </a:p>
           <a:p>
             <a:r>
-              <a:rPr lang="en-US" dirty="0"/>
-              <a:t>Say: "When the work is done, each group holds three connected outputs: its Strategy Architecture, its Strategy Intent Statement and its Success in Practice."</a:t>
-            </a:r>
-          </a:p>
-          <a:p>
-            <a:endParaRPr lang="en-US" dirty="0"/>
-          </a:p>
-          <a:p>
-            <a:r>
-              <a:rPr lang="en-US" b="1" dirty="0"/>
+              <a:rPr b="1"/>
+              <a:t>Say: </a:t>
+            </a:r>
+            <a:r>
+              <a:rPr/>
+              <a:t>"Kestrel Point now holds three connected outputs: its Strategy Architecture, its Strategy Intent Statement and its Success in Practice."</a:t>
+            </a:r>
+          </a:p>
+          <a:p/>
+          <a:p>
+            <a:r>
+              <a:rPr b="1"/>
               <a:t>2. Reinforce the connection, using the three lines on the slide.</a:t>
             </a:r>
           </a:p>
           <a:p>
             <a:r>
-              <a:rPr lang="en-US" dirty="0"/>
-              <a:t>Say: "The Architecture provides the logic. The Intent crystallises the ambition. Success in Practice makes the ambition observable."</a:t>
-            </a:r>
-          </a:p>
-          <a:p>
-            <a:endParaRPr lang="en-US" dirty="0"/>
-          </a:p>
-          <a:p>
-            <a:r>
-              <a:rPr lang="en-US" b="1" dirty="0"/>
-              <a:t>3. Say how the three are displayed.</a:t>
-            </a:r>
-          </a:p>
-          <a:p>
-            <a:r>
-              <a:rPr lang="en-US" dirty="0"/>
-              <a:t>Say: "Each group displays or prints the three together, as one report: the Strategy Intent Design."</a:t>
-            </a:r>
-          </a:p>
-          <a:p>
-            <a:endParaRPr lang="en-US" dirty="0"/>
-          </a:p>
-          <a:p>
-            <a:r>
-              <a:rPr lang="en-US" b="1" dirty="0"/>
-              <a:t>4. Say where the outputs go.</a:t>
-            </a:r>
-          </a:p>
-          <a:p>
-            <a:r>
-              <a:rPr lang="en-US" dirty="0"/>
-              <a:t>Say: "These three outputs become the strategic foundation that subsequent S2R® work will carry into alignment, execution and performance."</a:t>
-            </a:r>
-          </a:p>
-          <a:p>
-            <a:endParaRPr lang="en-US" dirty="0"/>
-          </a:p>
-          <a:p>
-            <a:r>
-              <a:rPr lang="en-US" b="1" dirty="0"/>
-              <a:t>5. Say how the outputs reach the Capstone.</a:t>
-            </a:r>
-          </a:p>
-          <a:p>
-            <a:r>
-              <a:rPr lang="en-US" dirty="0"/>
-              <a:t>Say: "Your three confirmed outputs feed your team’s Capstone Blueprint. Its Unit 2 section opens once every member of your team has completed Unit 2, and brings the three outputs in from a member’s page. Your team reads them together and confirms them there."</a:t>
-            </a:r>
-          </a:p>
-          <a:p>
-            <a:endParaRPr lang="en-US" dirty="0"/>
-          </a:p>
-          <a:p>
-            <a:r>
-              <a:rPr lang="en-US" b="1" dirty="0"/>
-              <a:t>6. Bridge to Section 5.</a:t>
-            </a:r>
-          </a:p>
-          <a:p>
-            <a:r>
-              <a:rPr lang="en-US" dirty="0"/>
-              <a:t>Say: "Once your group has confirmed its Success in Practice, success is defined. Section 5 applies it: from your executive role, what must you contribute for this Success in Practice to become real?"</a:t>
-            </a:r>
-          </a:p>
-          <a:p>
-            <a:endParaRPr lang="en-US" dirty="0"/>
-          </a:p>
-          <a:p>
-            <a:r>
-              <a:rPr lang="en-US" b="1" dirty="0"/>
-              <a:t>LATER, WHEN THE GROUPS HAVE DONE THE WORK:</a:t>
-            </a:r>
-          </a:p>
-          <a:p>
-            <a:r>
-              <a:rPr lang="en-US" dirty="0"/>
-              <a:t>- Each group displays or prints its three outputs together.</a:t>
-            </a:r>
-          </a:p>
-          <a:p>
-            <a:r>
-              <a:rPr lang="en-US" dirty="0"/>
-              <a:t>- Invite each group to read its Strategy Intent Statement to the room.</a:t>
-            </a:r>
-          </a:p>
-          <a:p>
-            <a:r>
-              <a:rPr lang="en-US" dirty="0"/>
-              <a:t>- After each group, ask the room: "Could you recognise this organisation if you walked into it?"</a:t>
-            </a:r>
-          </a:p>
-          <a:p>
-            <a:r>
-              <a:rPr lang="en-US" dirty="0"/>
-              <a:t>- Remind every member to complete their own page with the group’s agreed entries, in the session or after it, and to confirm each output on that page.</a:t>
+              <a:rPr b="1"/>
+              <a:t>Say: </a:t>
+            </a:r>
+            <a:r>
+              <a:rPr/>
+              <a:t>"The Architecture provides the logic. The Intent crystallises the ambition. Success in Practice makes the ambition observable."</a:t>
+            </a:r>
+          </a:p>
+          <a:p/>
+          <a:p>
+            <a:r>
+              <a:rPr b="1"/>
+              <a:t>3. Bridge to Section 5.</a:t>
+            </a:r>
+          </a:p>
+          <a:p>
+            <a:r>
+              <a:rPr b="1"/>
+              <a:t>Say: </a:t>
+            </a:r>
+            <a:r>
+              <a:rPr/>
+              <a:t>"In Section 5 your group builds these three outputs for its own simulated company, in the same order."</a:t>
+            </a:r>
+          </a:p>
+          <a:p/>
+          <a:p>
+            <a:r>
+              <a:rPr b="1"/>
+              <a:t>ON THE PORTAL, AFTER THE TEACHING:</a:t>
+            </a:r>
+          </a:p>
+          <a:p>
+            <a:r>
+              <a:t>Section 4 closes with the three outputs together.</a:t>
             </a:r>
           </a:p>
         </p:txBody>
@@ -8527,238 +7856,131 @@
           <a:lstStyle/>
           <a:p>
             <a:r>
-              <a:rPr lang="en-US" b="1" dirty="0"/>
+              <a:rPr b="1"/>
               <a:t>SECTION 5 · APPLICATION — IN PRACTICE</a:t>
             </a:r>
           </a:p>
-          <a:p>
-            <a:endParaRPr lang="en-US" dirty="0"/>
-          </a:p>
-          <a:p>
-            <a:r>
-              <a:rPr lang="en-US" b="1" dirty="0"/>
+          <a:p/>
+          <a:p>
+            <a:r>
+              <a:rPr b="1"/>
               <a:t>HOW THIS SECTION RUNS:</a:t>
             </a:r>
           </a:p>
           <a:p>
             <a:r>
-              <a:rPr lang="en-US" dirty="0"/>
-              <a:t>1. 5.1a and 5.1b: the role contribution table, and how to write a contribution.</a:t>
-            </a:r>
-          </a:p>
-          <a:p>
-            <a:r>
-              <a:rPr lang="en-US" dirty="0"/>
-              <a:t>2. 5.2: the group sharing, and the four headings participants observe under.</a:t>
-            </a:r>
-          </a:p>
-          <a:p>
-            <a:r>
-              <a:rPr lang="en-US" dirty="0"/>
-              <a:t>3. The Section 5 Reflections slide: the reflection participants write on the portal.</a:t>
-            </a:r>
-          </a:p>
-          <a:p>
-            <a:r>
-              <a:rPr lang="en-US" dirty="0"/>
-              <a:t>The role rows are written on the portal after the teaching. The group sharing in 5.2 takes place once the rows are complete.</a:t>
-            </a:r>
-          </a:p>
-          <a:p>
-            <a:endParaRPr lang="en-US" dirty="0"/>
-          </a:p>
-          <a:p>
-            <a:r>
-              <a:rPr lang="en-US" b="1" dirty="0"/>
+              <a:rPr b="1"/>
+              <a:t>1. 5.1: your company's strategy. Each group builds the Strategy Architecture, the Strategy Intent Statement and the Success in Practice of the simulated company from its Problem Charter.</a:t>
+            </a:r>
+          </a:p>
+          <a:p>
+            <a:r>
+              <a:rPr b="1"/>
+              <a:t>2. The Section 5 Reflections slide: the reflection participants write on the portal.</a:t>
+            </a:r>
+          </a:p>
+          <a:p>
+            <a:r>
+              <a:t>The groups build the three outputs on the portal after the teaching, in the session or after it.</a:t>
+            </a:r>
+          </a:p>
+          <a:p/>
+          <a:p>
+            <a:r>
+              <a:rPr b="1"/>
               <a:t>HOW TO OPEN THE SECTION:</a:t>
             </a:r>
           </a:p>
-          <a:p>
-            <a:endParaRPr lang="en-US" dirty="0"/>
-          </a:p>
-          <a:p>
-            <a:r>
-              <a:rPr lang="en-US" b="1" dirty="0"/>
+          <a:p/>
+          <a:p>
+            <a:r>
+              <a:rPr b="1"/>
               <a:t>1. State the section intent.</a:t>
             </a:r>
           </a:p>
           <a:p>
             <a:r>
-              <a:rPr lang="en-US" dirty="0"/>
-              <a:t>Say: "This section moves you from the agreed Success in Practice into practical executive contribution.“</a:t>
-            </a:r>
-          </a:p>
-          <a:p>
-            <a:pPr marL="0" marR="0" lvl="0" indent="0" algn="l" defTabSz="914400" rtl="0" eaLnBrk="1" fontAlgn="auto" latinLnBrk="0" hangingPunct="1">
-              <a:lnSpc>
-                <a:spcPct val="100000"/>
-              </a:lnSpc>
-              <a:spcBef>
-                <a:spcPts val="0"/>
-              </a:spcBef>
-              <a:spcAft>
-                <a:spcPts val="0"/>
-              </a:spcAft>
-              <a:buClrTx/>
-              <a:buSzTx/>
-              <a:buFontTx/>
-              <a:buNone/>
-              <a:tabLst/>
-              <a:defRPr/>
-            </a:pPr>
-            <a:endParaRPr lang="en-US" b="1" dirty="0"/>
-          </a:p>
-          <a:p>
-            <a:pPr marL="0" marR="0" lvl="0" indent="0" algn="l" defTabSz="914400" rtl="0" eaLnBrk="1" fontAlgn="auto" latinLnBrk="0" hangingPunct="1">
-              <a:lnSpc>
-                <a:spcPct val="100000"/>
-              </a:lnSpc>
-              <a:spcBef>
-                <a:spcPts val="0"/>
-              </a:spcBef>
-              <a:spcAft>
-                <a:spcPts val="0"/>
-              </a:spcAft>
-              <a:buClrTx/>
-              <a:buSzTx/>
-              <a:buFontTx/>
-              <a:buNone/>
-              <a:tabLst/>
-              <a:defRPr/>
-            </a:pPr>
-            <a:r>
-              <a:rPr lang="en-US" b="1" dirty="0"/>
-              <a:t>Read the two section learning outcomes from the slide.</a:t>
-            </a:r>
-          </a:p>
-          <a:p>
-            <a:endParaRPr lang="en-US" dirty="0"/>
-          </a:p>
-          <a:p>
-            <a:r>
-              <a:rPr lang="en-US" b="1" dirty="0"/>
+              <a:rPr b="1"/>
+              <a:t>Say: </a:t>
+            </a:r>
+            <a:r>
+              <a:rPr/>
+              <a:t>"This section is your group's Capstone work for Unit 2. Your group builds the strategy of the company it created in its Problem Charter."</a:t>
+            </a:r>
+          </a:p>
+          <a:p/>
+          <a:p>
+            <a:r>
+              <a:rPr b="1"/>
+              <a:t>2. Read the two section learning outcomes from the slide.</a:t>
+            </a:r>
+          </a:p>
+          <a:p>
+            <a:r>
+              <a:rPr b="1"/>
               <a:t>SECTION LEARNING OUTCOMES:</a:t>
             </a:r>
           </a:p>
           <a:p>
             <a:r>
-              <a:rPr lang="en-US" dirty="0"/>
+              <a:rPr b="1"/>
               <a:t>1. Translate Success in Practice into clear executive contribution expectations.</a:t>
             </a:r>
           </a:p>
           <a:p>
             <a:r>
-              <a:rPr lang="en-US" dirty="0"/>
+              <a:rPr b="1"/>
               <a:t>2. Coordinate leadership contributions required to realise strategic intent.</a:t>
             </a:r>
           </a:p>
-          <a:p>
-            <a:endParaRPr lang="en-US" dirty="0"/>
-          </a:p>
-          <a:p>
-            <a:r>
-              <a:rPr lang="en-US" b="1" dirty="0"/>
-              <a:t>2. Say what Section 4 leaves in place.</a:t>
-            </a:r>
-          </a:p>
-          <a:p>
-            <a:r>
-              <a:rPr lang="en-US" b="1" dirty="0"/>
+          <a:p/>
+          <a:p>
+            <a:r>
+              <a:rPr b="1"/>
+              <a:t>3. Give the order of the work.</a:t>
+            </a:r>
+          </a:p>
+          <a:p>
+            <a:r>
+              <a:rPr b="1"/>
               <a:t>Say: </a:t>
             </a:r>
             <a:r>
-              <a:rPr lang="en-US" dirty="0"/>
-              <a:t>"By the time you reach Section 5, your group has produced the Strategy Architecture, the Strategy Intent and Success in Practice. </a:t>
-            </a:r>
-          </a:p>
-          <a:p>
-            <a:r>
-              <a:rPr lang="en-US" dirty="0"/>
-              <a:t>Success is already defined. The work in this section is to apply it."</a:t>
-            </a:r>
-          </a:p>
-          <a:p>
-            <a:endParaRPr lang="en-US" dirty="0"/>
-          </a:p>
-          <a:p>
-            <a:r>
-              <a:rPr lang="en-US" b="1" dirty="0"/>
-              <a:t>3. Give the question of the section.</a:t>
-            </a:r>
-          </a:p>
-          <a:p>
-            <a:r>
-              <a:rPr lang="en-US" b="1" dirty="0"/>
+              <a:rPr/>
+              <a:t>"Three steps, in the order you saw in the example: Step 1, the Strategy Architecture; Step 2, the Strategy Intent Statement; Step 3, Success in Practice."</a:t>
+            </a:r>
+          </a:p>
+          <a:p/>
+          <a:p>
+            <a:r>
+              <a:rPr b="1"/>
+              <a:t>4. Say why the work is collective.</a:t>
+            </a:r>
+          </a:p>
+          <a:p>
+            <a:r>
+              <a:rPr b="1"/>
               <a:t>Say: </a:t>
             </a:r>
             <a:r>
-              <a:rPr lang="en-US" dirty="0"/>
-              <a:t>"Each of you now asks: From my executive role, what must I contribute for this Success in Practice to become real?"</a:t>
-            </a:r>
-          </a:p>
-          <a:p>
-            <a:endParaRPr lang="en-US" dirty="0"/>
-          </a:p>
-          <a:p>
-            <a:r>
-              <a:rPr lang="en-US" b="1" dirty="0"/>
-              <a:t>4. Name the shift.</a:t>
-            </a:r>
-          </a:p>
-          <a:p>
-            <a:r>
-              <a:rPr lang="en-US" b="1" dirty="0"/>
-              <a:t>Say: </a:t>
-            </a:r>
-            <a:r>
-              <a:rPr lang="en-US" dirty="0"/>
-              <a:t>"Section 4 is collective: one group, one position. Section 5 is individual: one role, one contribution."</a:t>
-            </a:r>
-          </a:p>
-          <a:p>
-            <a:endParaRPr lang="en-US" dirty="0"/>
-          </a:p>
-          <a:p>
-            <a:r>
-              <a:rPr lang="en-US" b="1" dirty="0"/>
-              <a:t>5. Say what the section shows.</a:t>
-            </a:r>
-          </a:p>
-          <a:p>
-            <a:r>
-              <a:rPr lang="en-US" b="1" dirty="0"/>
-              <a:t>Say: </a:t>
-            </a:r>
-            <a:r>
-              <a:rPr lang="en-US" dirty="0"/>
-              <a:t>"The Application section helps your group see whether the agreed strategy is supported by clear leadership contribution, cross-functional ownership and shared accountability."</a:t>
-            </a:r>
-          </a:p>
-          <a:p>
-            <a:endParaRPr lang="en-US" dirty="0"/>
-          </a:p>
-          <a:p>
-            <a:r>
-              <a:rPr lang="en-US" b="1" dirty="0"/>
-              <a:t>7. Give the two activities in order.</a:t>
-            </a:r>
-          </a:p>
-          <a:p>
-            <a:r>
-              <a:rPr lang="en-US" dirty="0"/>
-              <a:t>Say: "There are two activities, in this order."</a:t>
-            </a:r>
-          </a:p>
-          <a:p>
-            <a:r>
-              <a:rPr lang="en-US" dirty="0"/>
-              <a:t>- 5.1 — Role Contribution to SiP: Each participant completes the table from an assigned executive role</a:t>
-            </a:r>
-          </a:p>
-          <a:p>
-            <a:r>
-              <a:rPr lang="en-US" dirty="0"/>
-              <a:t>- 5.2 — SiP Statement Collective Application: Each group shares its SiP statement and explains how the role contributions support it</a:t>
+              <a:rPr/>
+              <a:t>"Surface your differences before you resolve them. Different interpretations expose assumptions, trade-offs and places where the strategic thinking is not yet coherent."</a:t>
+            </a:r>
+          </a:p>
+          <a:p/>
+          <a:p>
+            <a:r>
+              <a:rPr b="1"/>
+              <a:t>Deepen, say: </a:t>
+            </a:r>
+            <a:r>
+              <a:rPr/>
+              <a:t>"When the senior voice ends the conversation, the intelligence that lives at every level of the organisation never reaches the strategy."</a:t>
+            </a:r>
+          </a:p>
+          <a:p>
+            <a:r>
+              <a:t>(Insight: Top-down cultures. Source: Journal, 9 January 2026 — Professional Insights: Culture)</a:t>
             </a:r>
           </a:p>
         </p:txBody>
@@ -8844,142 +8066,132 @@
           <a:lstStyle/>
           <a:p>
             <a:r>
-              <a:rPr lang="en-US" b="1" dirty="0"/>
-              <a:t>5.1 — ROLE CONTRIBUTION TO SiP (10 ROLES · 4 DOMAINS)</a:t>
-            </a:r>
-          </a:p>
-          <a:p>
-            <a:endParaRPr lang="en-US" dirty="0"/>
-          </a:p>
-          <a:p>
-            <a:r>
-              <a:rPr lang="en-US" b="1" dirty="0"/>
+              <a:rPr b="1"/>
+              <a:t>5.1 — YOUR COMPANY'S STRATEGY (CAPSTONE WORK)</a:t>
+            </a:r>
+          </a:p>
+          <a:p/>
+          <a:p>
+            <a:r>
+              <a:rPr b="1"/>
               <a:t>HOW TO TEACH IT:</a:t>
             </a:r>
           </a:p>
-          <a:p>
-            <a:endParaRPr lang="en-US" dirty="0"/>
-          </a:p>
-          <a:p>
-            <a:r>
-              <a:rPr lang="en-US" b="1" dirty="0"/>
-              <a:t>1. State the purpose.</a:t>
-            </a:r>
-          </a:p>
-          <a:p>
-            <a:r>
-              <a:rPr lang="en-US" dirty="0"/>
-              <a:t>Say: "This table captures how each executive role contributes to the agreed Success in Practice."</a:t>
-            </a:r>
-          </a:p>
-          <a:p>
-            <a:endParaRPr lang="en-US" dirty="0"/>
-          </a:p>
-          <a:p>
-            <a:r>
-              <a:rPr lang="en-US" b="1" dirty="0"/>
-              <a:t>2. Return to the four SiP statements.</a:t>
-            </a:r>
-          </a:p>
-          <a:p>
-            <a:r>
-              <a:rPr lang="en-US" b="1" dirty="0"/>
+          <a:p/>
+          <a:p>
+            <a:r>
+              <a:rPr b="1"/>
+              <a:t>1. Show where the group starts.</a:t>
+            </a:r>
+          </a:p>
+          <a:p>
+            <a:r>
+              <a:rPr b="1"/>
               <a:t>Say: </a:t>
             </a:r>
             <a:r>
-              <a:rPr lang="en-US" dirty="0"/>
-              <a:t>"Return to the four SiP statements your group produces in Section 4: Customer Experience &amp; Value · Operational Capability &amp; Execution Rhythm · People &amp; Culture Dynamics · Enterprise Value Creation."</a:t>
-            </a:r>
-          </a:p>
-          <a:p>
-            <a:r>
-              <a:rPr lang="en-US" dirty="0"/>
-              <a:t>Tell participants: these four statements are the reference for every entry in the table.</a:t>
-            </a:r>
-          </a:p>
-          <a:p>
-            <a:endParaRPr lang="en-US" dirty="0"/>
-          </a:p>
-          <a:p>
-            <a:r>
-              <a:rPr lang="en-US" b="1" dirty="0"/>
-              <a:t>3. Put the central question on the slide to the room.</a:t>
-            </a:r>
-          </a:p>
-          <a:p>
-            <a:r>
-              <a:rPr lang="en-US" dirty="0"/>
-              <a:t>Say: "Each of you completes the table from the perspective of your assigned executive role. The central question: From this role, what must be contributed so that the agreed Success in Practice becomes real?"</a:t>
-            </a:r>
-          </a:p>
-          <a:p>
-            <a:endParaRPr lang="en-US" dirty="0"/>
-          </a:p>
-          <a:p>
-            <a:r>
-              <a:rPr lang="en-US" b="1" dirty="0"/>
-              <a:t>4. Confirm the assigned executive role of each participant, using the ten roles on the slide.</a:t>
-            </a:r>
-          </a:p>
-          <a:p>
-            <a:r>
-              <a:rPr lang="en-US" dirty="0"/>
-              <a:t>CEO · CFO · COO · CHRO · CTO · CMO · CCO · CPO · CRO · CSO</a:t>
-            </a:r>
-          </a:p>
-          <a:p>
-            <a:r>
-              <a:rPr lang="en-US" dirty="0"/>
-              <a:t>Say: "You select your assigned role and write one row: four entries, one for each SiP domain."</a:t>
-            </a:r>
-          </a:p>
-          <a:p>
-            <a:endParaRPr lang="en-US" dirty="0"/>
-          </a:p>
-          <a:p>
-            <a:r>
-              <a:rPr lang="en-US" b="1" dirty="0"/>
-              <a:t>5. Give the rule for an entry.</a:t>
-            </a:r>
-          </a:p>
-          <a:p>
-            <a:r>
-              <a:rPr lang="en-US" dirty="0"/>
-              <a:t>Say: "The role sets the perspective and the SiP sets the target. Every entry answers one question: what does this role contribute to that domain statement?"</a:t>
-            </a:r>
-          </a:p>
-          <a:p>
-            <a:endParaRPr lang="en-US" b="1" dirty="0"/>
-          </a:p>
-          <a:p>
-            <a:r>
-              <a:rPr lang="en-US" b="1" dirty="0"/>
-              <a:t>Deepen, say: </a:t>
-            </a:r>
-            <a:r>
-              <a:rPr lang="en-US" dirty="0"/>
-              <a:t>"An organisation that has articulated an extraordinary mission must answer a practical question: how does that mission live in daily practices, hiring decisions, budget allocations and conflict management? The high mission needs the daily practice that sustains it."</a:t>
-            </a:r>
-          </a:p>
-          <a:p>
-            <a:r>
-              <a:rPr lang="en-US" dirty="0"/>
-              <a:t>(Insight: The mission in daily practice. Source: Journal, 21 February 2026 — Professional Insights: Strategy)</a:t>
-            </a:r>
-          </a:p>
-          <a:p>
-            <a:endParaRPr lang="en-US" dirty="0"/>
-          </a:p>
-          <a:p>
-            <a:r>
-              <a:rPr lang="en-US" b="1" dirty="0"/>
+              <a:rPr/>
+              <a:t>"At the top of 5.1 you see your group's simulated company, organisation, executive team and central problem from your Problem Charter. The strategy you build answers that problem."</a:t>
+            </a:r>
+          </a:p>
+          <a:p/>
+          <a:p>
+            <a:r>
+              <a:rPr b="1"/>
+              <a:t>2. Explain the group record, using the picture on the slide.</a:t>
+            </a:r>
+          </a:p>
+          <a:p>
+            <a:r>
+              <a:rPr b="1"/>
+              <a:t>Say: </a:t>
+            </a:r>
+            <a:r>
+              <a:rPr/>
+              <a:t>"Your group chooses its scribe for this work from the drop-down in the group record bar. The scribe types what your group agrees, and the entries appear on every member's page.</a:t>
+            </a:r>
+          </a:p>
+          <a:p>
+            <a:r>
+              <a:t>You can choose a different scribe for each assignment, and change the scribe at any time."</a:t>
+            </a:r>
+          </a:p>
+          <a:p/>
+          <a:p>
+            <a:r>
+              <a:rPr b="1"/>
+              <a:t>3. Give the three steps.</a:t>
+            </a:r>
+          </a:p>
+          <a:p>
+            <a:r>
+              <a:rPr b="1"/>
+              <a:t>Say: </a:t>
+            </a:r>
+            <a:r>
+              <a:rPr/>
+              <a:t>"Step 1: answer the questions of each element and write what the element is saying. When all 14 are written, the scribe brings them together under the five headings, and your group edits the text until it says what you intend.</a:t>
+            </a:r>
+          </a:p>
+          <a:p>
+            <a:r>
+              <a:t>Step 2: deduce one crisp Strategy Intent Statement from WHAT, WHY, HOW and WHEN.</a:t>
+            </a:r>
+          </a:p>
+          <a:p>
+            <a:r>
+              <a:t>Step 3: answer the three questions of each SiP domain and write one statement for each."</a:t>
+            </a:r>
+          </a:p>
+          <a:p/>
+          <a:p>
+            <a:r>
+              <a:rPr b="1"/>
+              <a:t>4. Explain Agree.</a:t>
+            </a:r>
+          </a:p>
+          <a:p>
+            <a:r>
+              <a:rPr b="1"/>
+              <a:t>Say: </a:t>
+            </a:r>
+            <a:r>
+              <a:rPr/>
+              <a:t>"In the Group record tab each member reads the record and selects Agree on their own page.</a:t>
+            </a:r>
+          </a:p>
+          <a:p>
+            <a:r>
+              <a:t>When every member has agreed, the three outputs go into your team's Capstone Blueprint. If the scribe changes an entry after that, the agreements clear and every member agrees again."</a:t>
+            </a:r>
+          </a:p>
+          <a:p/>
+          <a:p>
+            <a:r>
+              <a:rPr b="1"/>
+              <a:t>5. Point to the example.</a:t>
+            </a:r>
+          </a:p>
+          <a:p>
+            <a:r>
+              <a:rPr b="1"/>
+              <a:t>Say: </a:t>
+            </a:r>
+            <a:r>
+              <a:rPr/>
+              <a:t>"Section 4 shows each step completed for Kestrel Point Services. Return to it whenever your group needs it."</a:t>
+            </a:r>
+          </a:p>
+          <a:p/>
+          <a:p>
+            <a:r>
+              <a:rPr b="1"/>
               <a:t>ON THE PORTAL, AFTER THE TEACHING:</a:t>
             </a:r>
           </a:p>
           <a:p>
             <a:r>
-              <a:rPr lang="en-US" dirty="0"/>
-              <a:t>Each participant selects the assigned executive role in 5.1 of the participant file and completes the four domains of the table from that role. The group's four SiP statements from Section 4 are shown above the table.</a:t>
+              <a:t>The group chooses its scribe in 5.1 of the participant file and builds the three steps. Each member reads the Group record and selects Agree. The three outputs feed boxes 2A to 2F of the team's Capstone Blueprint.</a:t>
             </a:r>
           </a:p>
         </p:txBody>
@@ -9065,146 +8277,128 @@
           <a:lstStyle/>
           <a:p>
             <a:r>
-              <a:rPr lang="en-US" b="1" dirty="0"/>
+              <a:rPr b="1"/>
               <a:t>SECTION 5 REFLECTIONS</a:t>
             </a:r>
           </a:p>
-          <a:p>
-            <a:endParaRPr lang="en-US" dirty="0"/>
-          </a:p>
-          <a:p>
-            <a:r>
-              <a:rPr lang="en-US" b="1" dirty="0"/>
+          <a:p/>
+          <a:p>
+            <a:r>
+              <a:rPr b="1"/>
               <a:t>HOW TO USE THIS SLIDE:</a:t>
             </a:r>
           </a:p>
-          <a:p>
-            <a:endParaRPr lang="en-US" dirty="0"/>
-          </a:p>
-          <a:p>
-            <a:r>
-              <a:rPr lang="en-US" b="1" dirty="0"/>
+          <a:p/>
+          <a:p>
+            <a:r>
+              <a:rPr b="1"/>
               <a:t>1. Show the slide and read the prompt aloud.</a:t>
             </a:r>
           </a:p>
           <a:p>
             <a:r>
-              <a:rPr lang="en-US" b="1" dirty="0"/>
-              <a:t>5.2 Reflection </a:t>
-            </a:r>
-            <a:r>
-              <a:rPr lang="en-US" dirty="0"/>
-              <a:t>— Application: "Having completed the full application exercise — what is the single most important shift your organisation must make to close the gap between your current strategic capability and the SiP you have collectively described?"</a:t>
-            </a:r>
-          </a:p>
-          <a:p>
-            <a:endParaRPr lang="en-US" dirty="0"/>
-          </a:p>
-          <a:p>
-            <a:r>
-              <a:rPr lang="en-US" b="1" dirty="0"/>
+              <a:t>5.1 Reflection — Application: "Having completed the full application exercise — what is the single most important shift your organisation must make to close the gap between your current strategic capability and the SiP you have collectively described?"</a:t>
+            </a:r>
+          </a:p>
+          <a:p/>
+          <a:p>
+            <a:r>
+              <a:rPr b="1"/>
               <a:t>2. Say what the reflection is for.</a:t>
             </a:r>
           </a:p>
           <a:p>
             <a:r>
-              <a:rPr lang="en-US" dirty="0"/>
-              <a:t>Point learners to the portal section that they will be required to complete with as much depth as possible. </a:t>
-            </a:r>
-          </a:p>
-          <a:p>
-            <a:r>
-              <a:rPr lang="en-US" dirty="0"/>
+              <a:t>Point learners to the portal section that they will be required to complete with as much depth as possible.</a:t>
+            </a:r>
+          </a:p>
+          <a:p>
+            <a:r>
               <a:t>The reflections build the learning portfolio they receive at the end of the programme.</a:t>
             </a:r>
           </a:p>
-          <a:p>
-            <a:endParaRPr lang="en-US" dirty="0"/>
-          </a:p>
-          <a:p>
-            <a:r>
-              <a:rPr lang="en-US" b="1" dirty="0"/>
+          <a:p/>
+          <a:p>
+            <a:r>
+              <a:rPr b="1"/>
               <a:t>Say: </a:t>
             </a:r>
             <a:r>
-              <a:rPr lang="en-US" dirty="0"/>
-              <a:t>"You write this reflection on the portal after the teaching, once the application exercise is complete, with as much depth as you can."</a:t>
-            </a:r>
-          </a:p>
-          <a:p>
-            <a:endParaRPr lang="en-US" dirty="0"/>
-          </a:p>
-          <a:p>
-            <a:r>
-              <a:rPr lang="en-US" b="1" dirty="0"/>
+              <a:rPr/>
+              <a:t>"You write this reflection on your own after your group has built its three outputs, with as much depth as you can."</a:t>
+            </a:r>
+          </a:p>
+          <a:p/>
+          <a:p>
+            <a:r>
+              <a:rPr b="1"/>
               <a:t>3. Set the standard.</a:t>
             </a:r>
           </a:p>
           <a:p>
             <a:r>
-              <a:rPr lang="en-US" b="1" dirty="0"/>
+              <a:rPr b="1"/>
               <a:t>Say: </a:t>
             </a:r>
             <a:r>
-              <a:rPr lang="en-US" dirty="0"/>
-              <a:t>"Name one shift only. Name it as a change in a decision, a capability or a behaviour. </a:t>
-            </a:r>
-          </a:p>
-          <a:p>
-            <a:r>
-              <a:rPr lang="en-US" dirty="0"/>
+              <a:rPr/>
+              <a:t>"Name one shift only. Name it as a change in a decision, a capability or a behaviour.</a:t>
+            </a:r>
+          </a:p>
+          <a:p>
+            <a:r>
               <a:t>Say which gap it closes between your current strategic capability and the SiP your group described, and what your own role must do first."</a:t>
             </a:r>
           </a:p>
-          <a:p>
-            <a:endParaRPr lang="en-US" dirty="0"/>
-          </a:p>
-          <a:p>
-            <a:r>
-              <a:rPr lang="en-US" b="1" dirty="0"/>
+          <a:p/>
+          <a:p>
+            <a:r>
+              <a:rPr b="1"/>
               <a:t>4. Say why the shift must reach behaviour.</a:t>
             </a:r>
           </a:p>
           <a:p>
             <a:r>
-              <a:rPr lang="en-US" dirty="0"/>
-              <a:t>Say: "Organisations often rebuild structures without correcting the behaviours that caused the original failure. </a:t>
-            </a:r>
-          </a:p>
-          <a:p>
-            <a:r>
-              <a:rPr lang="en-US" dirty="0"/>
+              <a:rPr b="1"/>
+              <a:t>Say: </a:t>
+            </a:r>
+            <a:r>
+              <a:rPr/>
+              <a:t>"Organisations often rebuild structures without correcting the behaviours that caused the original failure."</a:t>
+            </a:r>
+          </a:p>
+          <a:p>
+            <a:r>
               <a:t>(Insight: Rebuilding without correcting. Source: Journal, 2 August 2026 — Professional Insights: Strategy)</a:t>
             </a:r>
           </a:p>
-          <a:p>
-            <a:endParaRPr lang="en-US" dirty="0"/>
-          </a:p>
-          <a:p>
-            <a:r>
-              <a:rPr lang="en-US" b="1" dirty="0"/>
+          <a:p/>
+          <a:p>
+            <a:r>
+              <a:rPr b="1"/>
               <a:t>5. Bridge to the Unit Summary.</a:t>
             </a:r>
           </a:p>
           <a:p>
             <a:r>
-              <a:rPr lang="en-US" dirty="0"/>
-              <a:t>Say: "We close the unit by returning to where we started."</a:t>
-            </a:r>
-          </a:p>
-          <a:p>
-            <a:endParaRPr lang="en-US" dirty="0"/>
-          </a:p>
-          <a:p>
-            <a:r>
-              <a:rPr lang="en-US" b="1" dirty="0"/>
+              <a:rPr b="1"/>
+              <a:t>Say: </a:t>
+            </a:r>
+            <a:r>
+              <a:rPr/>
+              <a:t>"We close the unit by returning to where we started."</a:t>
+            </a:r>
+          </a:p>
+          <a:p/>
+          <a:p>
+            <a:r>
+              <a:rPr b="1"/>
               <a:t>ON THE PORTAL, AFTER THE TEACHING:</a:t>
             </a:r>
           </a:p>
           <a:p>
             <a:r>
-              <a:rPr lang="en-US" dirty="0"/>
-              <a:t>Participants write the reflection in Section 5 of the participant file: 5.2 Reflection — Application.</a:t>
+              <a:t>Participants write the reflection at the end of 5.1 of the participant file.</a:t>
             </a:r>
           </a:p>
         </p:txBody>
@@ -9274,583 +8468,325 @@
           <a:lstStyle/>
           <a:p>
             <a:r>
-              <a:rPr lang="en-US" b="1" dirty="0"/>
+              <a:rPr b="1"/>
               <a:t>UNIT SUMMARY (UNIT 2 SYNTHESIS)</a:t>
             </a:r>
           </a:p>
-          <a:p>
-            <a:endParaRPr lang="en-US" dirty="0"/>
-          </a:p>
-          <a:p>
-            <a:r>
-              <a:rPr lang="en-US" b="1" dirty="0"/>
+          <a:p/>
+          <a:p>
+            <a:r>
+              <a:rPr b="1"/>
               <a:t>HOW TO TEACH IT:</a:t>
             </a:r>
           </a:p>
-          <a:p>
-            <a:endParaRPr lang="en-US" dirty="0"/>
-          </a:p>
-          <a:p>
-            <a:r>
-              <a:rPr lang="en-US" b="1" dirty="0"/>
+          <a:p/>
+          <a:p>
+            <a:r>
+              <a:rPr b="1"/>
               <a:t>1. Return to the opening question, on the slide.</a:t>
             </a:r>
           </a:p>
           <a:p>
             <a:r>
-              <a:rPr lang="en-US" dirty="0"/>
-              <a:t>Go back to the definitions participants wrote when the session opened. </a:t>
-            </a:r>
-          </a:p>
-          <a:p>
-            <a:endParaRPr lang="en-US" dirty="0"/>
-          </a:p>
-          <a:p>
-            <a:r>
-              <a:rPr lang="en-US" dirty="0"/>
+              <a:t>Go back to the definitions participants wrote when the session opened.</a:t>
+            </a:r>
+          </a:p>
+          <a:p/>
+          <a:p>
+            <a:r>
               <a:t>The differences you noted on the chat. Ask two or three participants:</a:t>
             </a:r>
           </a:p>
-          <a:p>
-            <a:endParaRPr lang="en-US" dirty="0"/>
-          </a:p>
-          <a:p>
-            <a:r>
-              <a:rPr lang="en-US" dirty="0"/>
+          <a:p/>
+          <a:p>
+            <a:r>
               <a:t>"Read your original definition of strategy. What would you change in it now — and why?"</a:t>
             </a:r>
           </a:p>
           <a:p>
             <a:r>
-              <a:rPr lang="en-US" dirty="0"/>
-              <a:t>Say: "The difference between your opening answer and your closing answer is the measure of what Unit 2 produced."</a:t>
-            </a:r>
-          </a:p>
-          <a:p>
-            <a:endParaRPr lang="en-US" dirty="0"/>
-          </a:p>
-          <a:p>
-            <a:r>
-              <a:rPr lang="en-US" b="1" dirty="0"/>
+              <a:rPr b="1"/>
+              <a:t>Say: </a:t>
+            </a:r>
+            <a:r>
+              <a:rPr/>
+              <a:t>"The difference between your opening answer and your closing answer is the measure of what Unit 2 produced."</a:t>
+            </a:r>
+          </a:p>
+          <a:p/>
+          <a:p>
+            <a:r>
+              <a:rPr b="1"/>
               <a:t>2. Read the five summary blocks aloud.</a:t>
             </a:r>
           </a:p>
-          <a:p>
-            <a:endParaRPr lang="en-US" dirty="0"/>
-          </a:p>
-          <a:p>
-            <a:r>
-              <a:rPr lang="en-US" dirty="0"/>
-              <a:t>The summary is deliberately concise: its role is to crystallise the arc of the unit. </a:t>
-            </a:r>
-          </a:p>
-          <a:p>
-            <a:endParaRPr lang="en-US" dirty="0"/>
-          </a:p>
-          <a:p>
-            <a:r>
-              <a:rPr lang="en-US" dirty="0"/>
+          <a:p/>
+          <a:p>
+            <a:r>
+              <a:t>The summary is deliberately concise: its role is to crystallise the arc of the unit.</a:t>
+            </a:r>
+          </a:p>
+          <a:p/>
+          <a:p>
+            <a:r>
               <a:t>The blocks describe the whole unit, including the work the groups complete on the portal.</a:t>
             </a:r>
           </a:p>
-          <a:p>
-            <a:endParaRPr lang="en-US" dirty="0"/>
-          </a:p>
-          <a:p>
-            <a:pPr marL="171450" indent="-171450">
-              <a:buFontTx/>
-              <a:buChar char="-"/>
-            </a:pPr>
-            <a:r>
-              <a:rPr lang="en-US" b="1" dirty="0"/>
-              <a:t>Awareness — What · What Was Established: </a:t>
-            </a:r>
-          </a:p>
-          <a:p>
-            <a:pPr marL="0" indent="0">
-              <a:buFontTx/>
-              <a:buNone/>
-            </a:pPr>
-            <a:r>
-              <a:rPr lang="en-US" dirty="0"/>
-              <a:t>Strategy was defined precisely: the output of iterative thinking, logic and process to determine what, why, how and when an organisation creates, delivers and sustains value to its stakeholders while navigating the forces within its operating environment. </a:t>
-            </a:r>
-          </a:p>
-          <a:p>
-            <a:pPr marL="0" indent="0">
-              <a:buFontTx/>
-              <a:buNone/>
-            </a:pPr>
-            <a:r>
-              <a:rPr lang="en-US" dirty="0"/>
-              <a:t>Each concept in the definition is part of the Strategy Architecture: </a:t>
-            </a:r>
-          </a:p>
-          <a:p>
-            <a:pPr marL="0" indent="0">
-              <a:buFontTx/>
-              <a:buNone/>
-            </a:pPr>
-            <a:endParaRPr lang="en-US" dirty="0"/>
-          </a:p>
-          <a:p>
-            <a:pPr marL="0" indent="0">
-              <a:buFontTx/>
-              <a:buNone/>
-            </a:pPr>
-            <a:r>
-              <a:rPr lang="en-US" dirty="0"/>
-              <a:t>The Strategy Intent Statement brings forward four dimensions from that architecture (WHAT, WHY, HOW and WHEN) and crystallises them into one clear statement. </a:t>
-            </a:r>
-          </a:p>
-          <a:p>
-            <a:pPr marL="0" indent="0">
-              <a:buFontTx/>
-              <a:buNone/>
-            </a:pPr>
-            <a:endParaRPr lang="en-US" dirty="0"/>
-          </a:p>
-          <a:p>
-            <a:pPr marL="0" indent="0">
-              <a:buFontTx/>
-              <a:buNone/>
-            </a:pPr>
-            <a:r>
-              <a:rPr lang="en-US" dirty="0"/>
+          <a:p/>
+          <a:p>
+            <a:r>
+              <a:t>Awareness — What · What Was Established:</a:t>
+            </a:r>
+          </a:p>
+          <a:p>
+            <a:r>
+              <a:t>Strategy was defined precisely: the output of iterative thinking, logic and process to determine what, why, how and when an organisation creates, delivers and sustains value to its stakeholders while navigating the forces within its operating environment.</a:t>
+            </a:r>
+          </a:p>
+          <a:p>
+            <a:r>
+              <a:t>Each concept in the definition is part of the Strategy Architecture:</a:t>
+            </a:r>
+          </a:p>
+          <a:p/>
+          <a:p>
+            <a:r>
+              <a:t>The Strategy Intent Statement brings forward four dimensions from that architecture (WHAT, WHY, HOW and WHEN) and crystallises them into one clear statement.</a:t>
+            </a:r>
+          </a:p>
+          <a:p/>
+          <a:p>
+            <a:r>
               <a:t>Success in Practice (SiP) defines what must be seen, experienced and executed for that ambition to become reality, across four observable domains: Customer Experience &amp; Value, Operational Capability &amp; Execution Rhythm, People &amp; Culture Dynamics, and Enterprise Value Creation.</a:t>
             </a:r>
           </a:p>
-          <a:p>
-            <a:pPr marL="0" indent="0">
-              <a:buFontTx/>
-              <a:buNone/>
-            </a:pPr>
-            <a:endParaRPr lang="en-US" dirty="0"/>
-          </a:p>
-          <a:p>
-            <a:pPr marL="171450" indent="-171450">
-              <a:buFontTx/>
-              <a:buChar char="-"/>
-            </a:pPr>
-            <a:r>
-              <a:rPr lang="en-US" b="1" dirty="0"/>
-              <a:t>Intelligence — Why · Why It Matters: </a:t>
-            </a:r>
-          </a:p>
-          <a:p>
-            <a:pPr marL="0" indent="0">
-              <a:buFontTx/>
-              <a:buNone/>
-            </a:pPr>
-            <a:r>
-              <a:rPr lang="en-US" dirty="0"/>
-              <a:t>The Strategy Intent and SiP become useful when they shape how the organisation aligns, makes choices and executes. </a:t>
-            </a:r>
-          </a:p>
-          <a:p>
-            <a:pPr marL="0" indent="0">
-              <a:buFontTx/>
-              <a:buNone/>
-            </a:pPr>
-            <a:endParaRPr lang="en-US" dirty="0"/>
-          </a:p>
-          <a:p>
-            <a:pPr marL="0" indent="0">
-              <a:buFontTx/>
-              <a:buNone/>
-            </a:pPr>
-            <a:r>
-              <a:rPr lang="en-US" dirty="0"/>
-              <a:t>They serve three functions. </a:t>
-            </a:r>
-          </a:p>
-          <a:p>
-            <a:pPr marL="0" indent="0">
-              <a:buFontTx/>
-              <a:buNone/>
-            </a:pPr>
-            <a:r>
-              <a:rPr lang="en-US" dirty="0"/>
+          <a:p/>
+          <a:p>
+            <a:r>
+              <a:t>Intelligence — Why · Why It Matters:</a:t>
+            </a:r>
+          </a:p>
+          <a:p>
+            <a:r>
+              <a:t>The Strategy Intent and SiP become useful when they shape how the organisation aligns, makes choices and executes.</a:t>
+            </a:r>
+          </a:p>
+          <a:p/>
+          <a:p>
+            <a:r>
+              <a:t>They serve three functions.</a:t>
+            </a:r>
+          </a:p>
+          <a:p>
+            <a:r>
               <a:t>Strategic Alignment keeps people and functions oriented around the same ambition and picture of success.</a:t>
             </a:r>
           </a:p>
-          <a:p>
-            <a:pPr marL="0" indent="0">
-              <a:buFontTx/>
-              <a:buNone/>
-            </a:pPr>
-            <a:r>
-              <a:rPr lang="en-US" dirty="0"/>
-              <a:t> </a:t>
-            </a:r>
-          </a:p>
-          <a:p>
-            <a:pPr marL="0" indent="0">
-              <a:buFontTx/>
-              <a:buNone/>
-            </a:pPr>
-            <a:r>
-              <a:rPr lang="en-US" dirty="0"/>
-              <a:t>The Decision Filter gives a basis for determining which choices, opportunities and investments support the strategy: the Strategy Intent tests strategic fit and SiP tests strategic contribution. </a:t>
-            </a:r>
-          </a:p>
-          <a:p>
-            <a:pPr marL="0" indent="0">
-              <a:buFontTx/>
-              <a:buNone/>
-            </a:pPr>
-            <a:endParaRPr lang="en-US" dirty="0"/>
-          </a:p>
-          <a:p>
-            <a:pPr marL="0" indent="0">
-              <a:buFontTx/>
-              <a:buNone/>
-            </a:pPr>
-            <a:r>
-              <a:rPr lang="en-US" dirty="0"/>
+          <a:p/>
+          <a:p>
+            <a:r>
+              <a:t>The Decision Filter gives a basis for determining which choices, opportunities and investments support the strategy: the Strategy Intent tests strategic fit and SiP tests strategic contribution.</a:t>
+            </a:r>
+          </a:p>
+          <a:p/>
+          <a:p>
+            <a:r>
               <a:t>Execution Coherence helps functions understand how their individual contributions connect to produce the enterprise outcome.</a:t>
             </a:r>
           </a:p>
-          <a:p>
-            <a:endParaRPr lang="en-US" dirty="0"/>
-          </a:p>
-          <a:p>
-            <a:pPr marL="171450" indent="-171450">
-              <a:buFontTx/>
-              <a:buChar char="-"/>
-            </a:pPr>
-            <a:r>
-              <a:rPr lang="en-US" b="1" dirty="0"/>
-              <a:t>Extrapolating — Where · Where Success Shows Up: </a:t>
-            </a:r>
-          </a:p>
-          <a:p>
-            <a:pPr marL="0" indent="0">
-              <a:buFontTx/>
-              <a:buNone/>
-            </a:pPr>
-            <a:r>
-              <a:rPr lang="en-US" dirty="0"/>
-              <a:t>Each SiP domain was examined through observable indicators in two positions: When Working and Signal of Absence. </a:t>
-            </a:r>
-          </a:p>
-          <a:p>
-            <a:pPr marL="0" indent="0">
-              <a:buFontTx/>
-              <a:buNone/>
-            </a:pPr>
-            <a:r>
-              <a:rPr lang="en-US" dirty="0"/>
-              <a:t>The indicators help leaders test, deepen and make observable the success they have defined. </a:t>
-            </a:r>
-          </a:p>
-          <a:p>
-            <a:pPr marL="0" indent="0">
-              <a:buFontTx/>
-              <a:buNone/>
-            </a:pPr>
-            <a:endParaRPr lang="en-US" dirty="0"/>
-          </a:p>
-          <a:p>
-            <a:pPr marL="171450" indent="-171450">
-              <a:buFontTx/>
-              <a:buChar char="-"/>
-            </a:pPr>
-            <a:r>
-              <a:rPr lang="en-US" b="1" dirty="0"/>
-              <a:t>Integration — Collective · What Was Built: </a:t>
-            </a:r>
-          </a:p>
-          <a:p>
-            <a:pPr marL="0" indent="0">
-              <a:buFontTx/>
-              <a:buNone/>
-            </a:pPr>
-            <a:r>
-              <a:rPr lang="en-US" dirty="0"/>
-              <a:t>Each group built three connected outputs in sequence. </a:t>
-            </a:r>
-          </a:p>
-          <a:p>
-            <a:pPr marL="0" indent="0">
-              <a:buFontTx/>
-              <a:buNone/>
-            </a:pPr>
-            <a:r>
-              <a:rPr lang="en-US" dirty="0"/>
-              <a:t>The Strategy Architecture: the integrated strategic logic constructed from the 14 elements. </a:t>
-            </a:r>
-          </a:p>
-          <a:p>
-            <a:pPr marL="0" indent="0">
-              <a:buFontTx/>
-              <a:buNone/>
-            </a:pPr>
-            <a:r>
-              <a:rPr lang="en-US" dirty="0"/>
-              <a:t>The Strategy Intent Statement: the crisp expression of the organisation's strategic ambition derived from WHAT, WHY, HOW and WHEN. </a:t>
-            </a:r>
-          </a:p>
-          <a:p>
-            <a:pPr marL="0" indent="0">
-              <a:buFontTx/>
-              <a:buNone/>
-            </a:pPr>
-            <a:r>
-              <a:rPr lang="en-US" dirty="0"/>
-              <a:t>Success in Practice: four confirmed statements describing what successful realisation of that ambition looks like across the organisation. </a:t>
-            </a:r>
-          </a:p>
-          <a:p>
-            <a:pPr marL="0" indent="0">
-              <a:buFontTx/>
-              <a:buNone/>
-            </a:pPr>
-            <a:endParaRPr lang="en-US" dirty="0"/>
-          </a:p>
-          <a:p>
-            <a:pPr marL="0" indent="0">
-              <a:buFontTx/>
-              <a:buNone/>
-            </a:pPr>
-            <a:r>
-              <a:rPr lang="en-US" dirty="0"/>
+          <a:p/>
+          <a:p>
+            <a:r>
+              <a:t>Extrapolating — Where · Where Success Shows Up:</a:t>
+            </a:r>
+          </a:p>
+          <a:p>
+            <a:r>
+              <a:t>Each SiP domain was examined through observable indicators in two positions: When Working and Signal of Absence.</a:t>
+            </a:r>
+          </a:p>
+          <a:p>
+            <a:r>
+              <a:t>The indicators help leaders test, deepen and make observable the success they have defined.</a:t>
+            </a:r>
+          </a:p>
+          <a:p/>
+          <a:p>
+            <a:r>
+              <a:t>Integration — Collective · What Was Shown:</a:t>
+            </a:r>
+          </a:p>
+          <a:p>
+            <a:r>
+              <a:t>One worked example took Kestrel Point Services through the three connected outputs.</a:t>
+            </a:r>
+          </a:p>
+          <a:p>
+            <a:r>
+              <a:t>Its Strategy Architecture: the integrated strategic logic constructed from the 14 elements, each stating what it is saying.</a:t>
+            </a:r>
+          </a:p>
+          <a:p>
+            <a:r>
+              <a:t>Its Strategy Intent Statement: the crisp expression of its ambition deduced from WHAT, WHY, HOW and WHEN.</a:t>
+            </a:r>
+          </a:p>
+          <a:p>
+            <a:r>
+              <a:t>Its Success in Practice: four statements describing what realising that ambition looks like across the organisation, tested for depth and balance.</a:t>
+            </a:r>
+          </a:p>
+          <a:p/>
+          <a:p>
+            <a:r>
+              <a:t>Application — In Practice · What Was Built:</a:t>
+            </a:r>
+          </a:p>
+          <a:p>
+            <a:r>
+              <a:t>Each group built the same three outputs for its own simulated company. Every member agreed the group record, and the three outputs went into the team's Capstone Blueprint.</a:t>
+            </a:r>
+          </a:p>
+          <a:p>
+            <a:r>
               <a:t>The Architecture provides the logic. The Intent crystallises the ambition. Success in Practice makes the ambition observable.</a:t>
             </a:r>
           </a:p>
           <a:p>
-            <a:pPr marL="0" indent="0">
-              <a:buFontTx/>
-              <a:buNone/>
-            </a:pPr>
-            <a:endParaRPr lang="en-US" dirty="0"/>
-          </a:p>
-          <a:p>
-            <a:pPr marL="171450" indent="-171450">
-              <a:buFontTx/>
-              <a:buChar char="-"/>
-            </a:pPr>
-            <a:r>
-              <a:rPr lang="en-US" b="1" dirty="0"/>
-              <a:t>Application — In Practice · </a:t>
-            </a:r>
-          </a:p>
-          <a:p>
-            <a:pPr marL="0" indent="0">
-              <a:buFontTx/>
-              <a:buNone/>
-            </a:pPr>
-            <a:r>
-              <a:rPr lang="en-US" dirty="0"/>
-              <a:t>What Was Applied: Each participant applied the agreed Success in Practice to an assigned executive role and defined, in the present tense of the future, </a:t>
-            </a:r>
-          </a:p>
-          <a:p>
-            <a:pPr marL="0" indent="0">
-              <a:buFontTx/>
-              <a:buNone/>
-            </a:pPr>
-            <a:r>
-              <a:rPr lang="en-US" dirty="0"/>
-              <a:t>Each group then shared its SiP statement and explained how the role contributions support it.</a:t>
-            </a:r>
-          </a:p>
-          <a:p>
-            <a:pPr marL="0" indent="0">
-              <a:buFontTx/>
-              <a:buNone/>
-            </a:pPr>
-            <a:r>
-              <a:rPr lang="en-US" dirty="0"/>
-              <a:t> The group examined alignment, gaps, tensions and the areas where the SiP statement needs clearer execution ownership. </a:t>
-            </a:r>
-          </a:p>
-          <a:p>
-            <a:pPr marL="0" indent="0">
-              <a:buFontTx/>
-              <a:buNone/>
-            </a:pPr>
-            <a:endParaRPr lang="en-US" dirty="0"/>
-          </a:p>
-          <a:p>
-            <a:pPr marL="0" indent="0">
-              <a:buFontTx/>
-              <a:buNone/>
-            </a:pPr>
-            <a:r>
-              <a:rPr lang="en-US" dirty="0"/>
-              <a:t>The three outputs are the strategic foundation that later S2R® work carries into alignment, execution and performance.</a:t>
-            </a:r>
-          </a:p>
-          <a:p>
-            <a:endParaRPr lang="en-US" dirty="0"/>
-          </a:p>
-          <a:p>
-            <a:endParaRPr lang="en-US" dirty="0"/>
-          </a:p>
-          <a:p>
-            <a:r>
-              <a:rPr lang="en-US" b="1" dirty="0"/>
+            <a:r>
+              <a:t>These outputs are the strategic foundation that later S2R® work carries into alignment, execution and performance.</a:t>
+            </a:r>
+          </a:p>
+          <a:p/>
+          <a:p/>
+          <a:p>
+            <a:r>
+              <a:rPr b="1"/>
               <a:t>3. Run the tangible outputs check.</a:t>
             </a:r>
           </a:p>
           <a:p>
             <a:r>
-              <a:rPr lang="en-US" dirty="0"/>
               <a:t>Before closing, confirm with the group that the following have been produced or are in progress:</a:t>
             </a:r>
           </a:p>
           <a:p>
             <a:r>
-              <a:rPr lang="en-US" dirty="0"/>
-              <a:t>- A Strategy Architecture output from each group</a:t>
-            </a:r>
-          </a:p>
-          <a:p>
-            <a:r>
-              <a:rPr lang="en-US" dirty="0"/>
-              <a:t>- A confirmed Strategy Intent Statement from each group</a:t>
-            </a:r>
-          </a:p>
-          <a:p>
-            <a:r>
-              <a:rPr lang="en-US" dirty="0"/>
-              <a:t>- Four confirmed SiP statements from each group</a:t>
-            </a:r>
-          </a:p>
-          <a:p>
-            <a:r>
-              <a:rPr lang="en-US" dirty="0"/>
-              <a:t>- A role contribution row from each participant</a:t>
-            </a:r>
-          </a:p>
-          <a:p>
-            <a:endParaRPr lang="en-US" dirty="0"/>
-          </a:p>
-          <a:p>
-            <a:r>
-              <a:rPr lang="en-US" b="1" dirty="0"/>
+              <a:t>- A Strategy Architecture from each group</a:t>
+            </a:r>
+          </a:p>
+          <a:p>
+            <a:r>
+              <a:t>- A Strategy Intent Statement from each group</a:t>
+            </a:r>
+          </a:p>
+          <a:p>
+            <a:r>
+              <a:t>- Four SiP statements from each group, agreed by every member</a:t>
+            </a:r>
+          </a:p>
+          <a:p/>
+          <a:p>
+            <a:r>
+              <a:rPr b="1"/>
               <a:t>4. Ask for the closing commitment, on the slide.</a:t>
             </a:r>
           </a:p>
           <a:p>
             <a:r>
-              <a:rPr lang="en-US" dirty="0"/>
               <a:t>Ask each participant to complete this sentence privately:</a:t>
             </a:r>
           </a:p>
           <a:p>
             <a:r>
-              <a:rPr lang="en-US" dirty="0"/>
               <a:t>"Based on what Unit 2 revealed, the one thing I am committed to doing differently before our next session is…"</a:t>
             </a:r>
           </a:p>
           <a:p>
             <a:r>
-              <a:rPr lang="en-US" dirty="0"/>
               <a:t>Post in the chat. These become the accountability anchors for Unit 3.</a:t>
             </a:r>
           </a:p>
-          <a:p>
-            <a:endParaRPr lang="en-US" dirty="0"/>
-          </a:p>
-          <a:p>
-            <a:r>
-              <a:rPr lang="en-US" b="1" dirty="0"/>
+          <a:p/>
+          <a:p>
+            <a:r>
+              <a:rPr b="1"/>
               <a:t>5. Give the transition to Unit 3.</a:t>
             </a:r>
           </a:p>
           <a:p>
             <a:r>
-              <a:rPr lang="en-US" dirty="0"/>
-              <a:t>Say: "What we built today is the strategic foundation: the Architecture, the Intent and the Success in Practice. </a:t>
-            </a:r>
-          </a:p>
-          <a:p>
-            <a:endParaRPr lang="en-US" dirty="0"/>
-          </a:p>
-          <a:p>
-            <a:r>
-              <a:rPr lang="en-US" dirty="0"/>
+              <a:rPr b="1"/>
+              <a:t>Say: </a:t>
+            </a:r>
+            <a:r>
+              <a:rPr/>
+              <a:t>"What we built today is the strategic foundation: the Architecture, the Intent and the Success in Practice.</a:t>
+            </a:r>
+          </a:p>
+          <a:p/>
+          <a:p>
+            <a:r>
               <a:t>Unit 3 maps that Success in Practice and defines the Objective Key Results that will measure our progress toward it."</a:t>
             </a:r>
           </a:p>
-          <a:p>
-            <a:endParaRPr lang="en-US" dirty="0"/>
-          </a:p>
-          <a:p>
-            <a:r>
-              <a:rPr lang="en-US" b="1" dirty="0"/>
+          <a:p/>
+          <a:p>
+            <a:r>
+              <a:rPr b="1"/>
               <a:t>6. Hand over to the portal.</a:t>
             </a:r>
           </a:p>
           <a:p>
             <a:r>
-              <a:rPr lang="en-US" dirty="0"/>
-              <a:t>Say: "The teaching ends here. You now go to the portal and complete your own page, in the session or after it."</a:t>
-            </a:r>
-          </a:p>
-          <a:p>
-            <a:r>
-              <a:rPr lang="en-US" dirty="0"/>
-              <a:t>- Section 1: the opening definition of strategy, and the reflections for 1.1 and 1.2.</a:t>
-            </a:r>
-          </a:p>
-          <a:p>
-            <a:r>
-              <a:rPr lang="en-US" dirty="0"/>
+              <a:rPr b="1"/>
+              <a:t>Say: </a:t>
+            </a:r>
+            <a:r>
+              <a:rPr/>
+              <a:t>"The teaching ends here. You now go to the portal and complete your own page, in the session or after it."</a:t>
+            </a:r>
+          </a:p>
+          <a:p>
+            <a:r>
+              <a:t>- Section 1: the opening definition of strategy and the 1.1 reflection.</a:t>
+            </a:r>
+          </a:p>
+          <a:p>
+            <a:r>
               <a:t>- Section 2: the 2.1 reflection.</a:t>
             </a:r>
           </a:p>
           <a:p>
             <a:r>
-              <a:rPr lang="en-US" dirty="0"/>
               <a:t>- Section 3: the 3.1 reflection.</a:t>
             </a:r>
           </a:p>
           <a:p>
             <a:r>
-              <a:rPr lang="en-US" dirty="0"/>
-              <a:t>- Section 4, with the group: the 14 elements and the Strategy Architecture output, the Strategy Intent Statement, and the four SiP statements. The group agrees each entry, one member acts as scribe, and every member types the agreed entries into their own page.</a:t>
-            </a:r>
-          </a:p>
-          <a:p>
-            <a:r>
-              <a:rPr lang="en-US" dirty="0"/>
-              <a:t>- Section 5: the role contribution row in 5.1, the four observation boxes in 5.2 and the 5.2 reflection.</a:t>
-            </a:r>
-          </a:p>
-          <a:p>
-            <a:r>
-              <a:rPr lang="en-US" dirty="0"/>
+              <a:t>- Section 4: the worked example, to read.</a:t>
+            </a:r>
+          </a:p>
+          <a:p>
+            <a:r>
+              <a:t>- Section 5, with the group: the Strategy Architecture, the Strategy Intent Statement and the four SiP statements of the group's simulated company. The group chooses its scribe for this work, the entries appear on every member's page, and each member selects Agree. Then the 5.1 reflection, on their own.</a:t>
+            </a:r>
+          </a:p>
+          <a:p>
+            <a:r>
               <a:t>Participants then submit Unit 2 to the facilitator from their page.</a:t>
             </a:r>
           </a:p>
-          <a:p>
-            <a:r>
-              <a:rPr lang="en-US" dirty="0"/>
-              <a:t>Where the portal work is done in the session, bring the room back together once it is complete, for the reading of the three outputs (4.3c) and the group sharing (5.2).</a:t>
-            </a:r>
-          </a:p>
-          <a:p>
-            <a:endParaRPr lang="en-US" dirty="0"/>
-          </a:p>
-          <a:p>
-            <a:r>
-              <a:rPr lang="en-US" b="1" dirty="0"/>
+          <a:p/>
+          <a:p>
+            <a:r>
+              <a:rPr b="1"/>
               <a:t>AFTER THE SESSION:</a:t>
             </a:r>
           </a:p>
           <a:p>
             <a:r>
-              <a:rPr lang="en-US" dirty="0"/>
-              <a:t>- Review each participant’s submission from the facilitator dashboard. The three outputs appear under their own headings: Strategy Architecture, Strategy Intent Statement and Success in Practice (SiP).</a:t>
-            </a:r>
-          </a:p>
-          <a:p>
-            <a:r>
-              <a:rPr lang="en-US" dirty="0"/>
-              <a:t>- Note the groups whose members hold different versions of an output. Ask them to agree one version and update their pages before the team opens its Capstone Blueprint.</a:t>
+              <a:t>- Review each participant’s reflections from the facilitator dashboard. The group's three outputs are Capstone work and are assessed independently at the capstone.</a:t>
             </a:r>
           </a:p>
         </p:txBody>
@@ -11787,563 +10723,483 @@
           <a:lstStyle/>
           <a:p>
             <a:r>
-              <a:rPr lang="en-US" b="1" dirty="0"/>
+              <a:rPr b="1"/>
               <a:t>1.2 — DEFINING THE STRATEGY INTENT STATEMENT (4 DIMENSIONS)</a:t>
             </a:r>
           </a:p>
-          <a:p>
-            <a:endParaRPr lang="en-US" dirty="0"/>
-          </a:p>
-          <a:p>
-            <a:r>
-              <a:rPr lang="en-US" b="1" dirty="0"/>
+          <a:p/>
+          <a:p>
+            <a:r>
+              <a:rPr b="1"/>
               <a:t>HOW TO TEACH IT:</a:t>
             </a:r>
           </a:p>
-          <a:p>
-            <a:endParaRPr lang="en-US" dirty="0"/>
-          </a:p>
-          <a:p>
-            <a:r>
-              <a:rPr lang="en-US" b="1" dirty="0"/>
+          <a:p/>
+          <a:p>
+            <a:r>
+              <a:rPr b="1"/>
               <a:t>1. Position the statement.</a:t>
             </a:r>
           </a:p>
           <a:p>
             <a:r>
-              <a:rPr lang="en-US" dirty="0"/>
-              <a:t>Say: "The Strategy Architecture provides the foundation from which the Strategy Intent Statement is derived. </a:t>
-            </a:r>
-          </a:p>
-          <a:p>
-            <a:r>
-              <a:rPr lang="en-US" dirty="0"/>
-              <a:t>It has established the organisation's strategic choices and the logic connecting them. </a:t>
-            </a:r>
-          </a:p>
-          <a:p>
-            <a:r>
-              <a:rPr lang="en-US" dirty="0"/>
+              <a:rPr b="1"/>
+              <a:t>Say: </a:t>
+            </a:r>
+            <a:r>
+              <a:rPr/>
+              <a:t>"The Strategy Architecture provides the foundation from which the Strategy Intent Statement is derived.</a:t>
+            </a:r>
+          </a:p>
+          <a:p>
+            <a:r>
+              <a:t>It has established the organisation's strategic choices and the logic connecting them.</a:t>
+            </a:r>
+          </a:p>
+          <a:p>
+            <a:r>
               <a:t>The Strategy Intent Statement brings forward four dimensions from that architecture.“</a:t>
             </a:r>
           </a:p>
-          <a:p>
-            <a:endParaRPr lang="en-US" dirty="0"/>
-          </a:p>
-          <a:p>
-            <a:r>
-              <a:rPr lang="en-US" dirty="0"/>
-              <a:t>Say: "The Strategy Architecture holds the depth and the supporting logic. </a:t>
-            </a:r>
-          </a:p>
-          <a:p>
-            <a:r>
-              <a:rPr lang="en-US" dirty="0"/>
+          <a:p/>
+          <a:p>
+            <a:r>
+              <a:rPr b="1"/>
+              <a:t>Say: </a:t>
+            </a:r>
+            <a:r>
+              <a:rPr/>
+              <a:t>"The Strategy Architecture holds the depth and the supporting logic.</a:t>
+            </a:r>
+          </a:p>
+          <a:p>
+            <a:r>
               <a:t>The Strategy Intent Statement is crisp, directional and easy to express.“</a:t>
             </a:r>
           </a:p>
-          <a:p>
-            <a:endParaRPr lang="en-US" dirty="0"/>
-          </a:p>
-          <a:p>
-            <a:r>
-              <a:rPr lang="en-US" dirty="0"/>
-              <a:t>Tell participants: they derive their own statement in Section 4. Here they learn what it brings forward.</a:t>
-            </a:r>
-          </a:p>
-          <a:p>
-            <a:endParaRPr lang="en-US" dirty="0"/>
-          </a:p>
-          <a:p>
-            <a:r>
-              <a:rPr lang="en-US" b="1" dirty="0"/>
+          <a:p/>
+          <a:p>
+            <a:r>
+              <a:rPr b="1"/>
+              <a:t>Tell participants: </a:t>
+            </a:r>
+            <a:r>
+              <a:rPr/>
+              <a:t>they derive their own statement in Section 5. Here they learn what it brings forward.</a:t>
+            </a:r>
+          </a:p>
+          <a:p/>
+          <a:p>
+            <a:r>
+              <a:rPr b="1"/>
               <a:t>2. Say why the statement must be crisp.</a:t>
             </a:r>
           </a:p>
           <a:p>
             <a:r>
-              <a:rPr lang="en-US" dirty="0"/>
-              <a:t>Say: "A message creates value only if people can receive and understand it. </a:t>
-            </a:r>
-          </a:p>
-          <a:p>
-            <a:r>
-              <a:rPr lang="en-US" dirty="0"/>
+              <a:rPr b="1"/>
+              <a:t>Say: </a:t>
+            </a:r>
+            <a:r>
+              <a:rPr/>
+              <a:t>"A message creates value only if people can receive and understand it.</a:t>
+            </a:r>
+          </a:p>
+          <a:p>
+            <a:r>
               <a:t>Strategy must be both sound and communicable."</a:t>
             </a:r>
           </a:p>
           <a:p>
             <a:r>
-              <a:rPr lang="en-US" dirty="0"/>
               <a:t>(Insight: Sound and communicable. Source: Journal, 23 August 2026 — Professional Insights: Strategy)</a:t>
             </a:r>
           </a:p>
-          <a:p>
-            <a:endParaRPr lang="en-US" dirty="0"/>
-          </a:p>
-          <a:p>
-            <a:r>
-              <a:rPr lang="en-US" b="1" dirty="0"/>
+          <a:p/>
+          <a:p>
+            <a:r>
+              <a:rPr b="1"/>
               <a:t>3. Take the four dimensions one at a time.</a:t>
             </a:r>
           </a:p>
           <a:p>
             <a:r>
-              <a:rPr lang="en-US" b="1" dirty="0"/>
-              <a:t>Say</a:t>
-            </a:r>
-            <a:r>
-              <a:rPr lang="en-US" dirty="0"/>
-              <a:t>: "We walk through WHAT, WHY, HOW and WHEN one at a time, as a group."</a:t>
-            </a:r>
-          </a:p>
-          <a:p>
-            <a:r>
-              <a:rPr lang="en-US" dirty="0"/>
-              <a:t>For each dimension, ask one diagnostic question and take two or three responses. </a:t>
-            </a:r>
-          </a:p>
-          <a:p>
-            <a:r>
-              <a:rPr lang="en-US" dirty="0"/>
+              <a:rPr b="1"/>
+              <a:t>Say: </a:t>
+            </a:r>
+            <a:r>
+              <a:rPr/>
+              <a:t>"We walk through WHAT, WHY, HOW and WHEN one at a time, as a group."</a:t>
+            </a:r>
+          </a:p>
+          <a:p>
+            <a:r>
+              <a:t>For each dimension, ask one diagnostic question and take two or three responses.</a:t>
+            </a:r>
+          </a:p>
+          <a:p>
+            <a:r>
               <a:t>Stay longest on HOW and WHEN: they typically reveal the most significant gaps.</a:t>
             </a:r>
           </a:p>
-          <a:p>
-            <a:endParaRPr lang="en-US" dirty="0"/>
-          </a:p>
-          <a:p>
-            <a:r>
-              <a:rPr lang="en-US" b="1" dirty="0"/>
+          <a:p/>
+          <a:p>
+            <a:r>
+              <a:rPr b="1"/>
               <a:t>4. WHAT — Scope &amp; Definition.</a:t>
             </a:r>
           </a:p>
           <a:p>
             <a:r>
-              <a:rPr lang="en-US" b="1" dirty="0"/>
-              <a:t>Say</a:t>
-            </a:r>
-            <a:r>
-              <a:rPr lang="en-US" dirty="0"/>
-              <a:t>: "WHAT brings forward the value the organisation has chosen to create and its field of play. </a:t>
-            </a:r>
-          </a:p>
-          <a:p>
-            <a:r>
-              <a:rPr lang="en-US" dirty="0"/>
+              <a:rPr b="1"/>
+              <a:t>Say: </a:t>
+            </a:r>
+            <a:r>
+              <a:rPr/>
+              <a:t>"WHAT brings forward the value the organisation has chosen to create and its field of play.</a:t>
+            </a:r>
+          </a:p>
+          <a:p>
+            <a:r>
               <a:t>It governs scope, portfolio, product and service definition, boundary-setting, market choice, capability focus."</a:t>
             </a:r>
           </a:p>
-          <a:p>
-            <a:endParaRPr lang="en-US" dirty="0"/>
-          </a:p>
-          <a:p>
-            <a:r>
-              <a:rPr lang="en-US" dirty="0"/>
+          <a:p/>
+          <a:p>
+            <a:r>
               <a:t>Ask one diagnostic question and take two or three responses: "What arenas are we choosing to compete in?" · "What have we decided not to do?" · Listen for: a WHAT with no boundary.</a:t>
             </a:r>
           </a:p>
-          <a:p>
-            <a:endParaRPr lang="en-US" dirty="0"/>
-          </a:p>
-          <a:p>
-            <a:r>
-              <a:rPr lang="en-US" b="1" dirty="0"/>
+          <a:p/>
+          <a:p>
+            <a:r>
+              <a:rPr b="1"/>
               <a:t>Deepen, say: </a:t>
             </a:r>
             <a:r>
-              <a:rPr lang="en-US" dirty="0"/>
-              <a:t>"Capability without strategic intent produces a spectacular career and an unfinished assignment. </a:t>
-            </a:r>
-          </a:p>
-          <a:p>
-            <a:r>
-              <a:rPr lang="en-US" dirty="0"/>
-              <a:t>Audit where the organisation’s most distinctive strength is being spent. </a:t>
-            </a:r>
-          </a:p>
-          <a:p>
-            <a:r>
-              <a:rPr lang="en-US" dirty="0"/>
+              <a:rPr/>
+              <a:t>"Capability without strategic intent produces a spectacular career and an unfinished assignment.</a:t>
+            </a:r>
+          </a:p>
+          <a:p>
+            <a:r>
+              <a:t>Audit where the organisation’s most distinctive strength is being spent.</a:t>
+            </a:r>
+          </a:p>
+          <a:p>
+            <a:r>
               <a:t>(Insight: Capability without intent. Source: Journal, 25 April 2026 — Professional Insights: Strategy)</a:t>
             </a:r>
           </a:p>
-          <a:p>
-            <a:endParaRPr lang="en-US" dirty="0"/>
-          </a:p>
-          <a:p>
-            <a:r>
-              <a:rPr lang="en-US" b="1" dirty="0"/>
+          <a:p/>
+          <a:p>
+            <a:r>
+              <a:rPr b="1"/>
               <a:t>5. WHY — Purpose &amp; Rationale.</a:t>
             </a:r>
           </a:p>
           <a:p>
             <a:r>
-              <a:rPr lang="en-US" dirty="0"/>
-              <a:t>Say: "WHY brings forward the rationale for those choices and why they matter. </a:t>
-            </a:r>
-          </a:p>
-          <a:p>
-            <a:r>
-              <a:rPr lang="en-US" dirty="0"/>
+              <a:rPr b="1"/>
+              <a:t>Say: </a:t>
+            </a:r>
+            <a:r>
+              <a:rPr/>
+              <a:t>"WHY brings forward the rationale for those choices and why they matter.</a:t>
+            </a:r>
+          </a:p>
+          <a:p>
+            <a:r>
               <a:t>It governs purpose, mission, competitive differentiation, value proposition, organisational identity."</a:t>
             </a:r>
           </a:p>
-          <a:p>
-            <a:endParaRPr lang="en-US" dirty="0"/>
-          </a:p>
-          <a:p>
-            <a:r>
-              <a:rPr lang="en-US" dirty="0"/>
+          <a:p/>
+          <a:p>
+            <a:r>
               <a:t>Ask one diagnostic question and take two or three responses: "Does our WHY actually differentiate us, or could a competitor claim it unchanged?" · "Do our decisions consistently reflect this WHY?" · "Do stakeholders believe and repeat our WHY?"</a:t>
             </a:r>
           </a:p>
-          <a:p>
-            <a:endParaRPr lang="en-US" dirty="0"/>
-          </a:p>
-          <a:p>
-            <a:r>
-              <a:rPr lang="en-US" b="1" dirty="0"/>
+          <a:p/>
+          <a:p>
+            <a:r>
+              <a:rPr b="1"/>
               <a:t>Deepen, say: </a:t>
             </a:r>
             <a:r>
-              <a:rPr lang="en-US" dirty="0"/>
-              <a:t>"Organisations that rush into execution without clarifying purpose create activity without lasting impact. </a:t>
-            </a:r>
-          </a:p>
-          <a:p>
-            <a:r>
-              <a:rPr lang="en-US" dirty="0"/>
+              <a:rPr/>
+              <a:t>"Organisations that rush into execution without clarifying purpose create activity without lasting impact.</a:t>
+            </a:r>
+          </a:p>
+          <a:p>
+            <a:r>
               <a:t>Strategic clarity emerges when leaders understand why the work exists before deciding how it will be done."</a:t>
             </a:r>
           </a:p>
           <a:p>
             <a:r>
-              <a:rPr lang="en-US" dirty="0"/>
               <a:t>(Insight: WHY before HOW. Source: Journal, 28 July 2026 — Professional Insights: Strategy)</a:t>
             </a:r>
           </a:p>
-          <a:p>
-            <a:endParaRPr lang="en-US" dirty="0"/>
-          </a:p>
-          <a:p>
-            <a:r>
-              <a:rPr lang="en-US" b="1" dirty="0"/>
+          <a:p/>
+          <a:p>
+            <a:r>
+              <a:rPr b="1"/>
               <a:t>6. HOW — Mechanism &amp; Model.</a:t>
             </a:r>
           </a:p>
           <a:p>
             <a:r>
-              <a:rPr lang="en-US" b="1" dirty="0"/>
-              <a:t>Say: "</a:t>
-            </a:r>
-            <a:r>
-              <a:rPr lang="en-US" dirty="0"/>
-              <a:t>HOW brings forward the operating model, capabilities and mechanisms through which the value will be delivered. </a:t>
-            </a:r>
-          </a:p>
-          <a:p>
-            <a:r>
-              <a:rPr lang="en-US" dirty="0"/>
+              <a:rPr b="1"/>
+              <a:t>Say: </a:t>
+            </a:r>
+            <a:r>
+              <a:rPr/>
+              <a:t>"HOW brings forward the operating model, capabilities and mechanisms through which the value will be delivered.</a:t>
+            </a:r>
+          </a:p>
+          <a:p>
+            <a:r>
               <a:t>It governs operating model, capabilities, processes, organisational design, technology architecture, partnerships."</a:t>
             </a:r>
           </a:p>
-          <a:p>
-            <a:endParaRPr lang="en-US" dirty="0"/>
-          </a:p>
-          <a:p>
-            <a:r>
-              <a:rPr lang="en-US" dirty="0"/>
+          <a:p/>
+          <a:p>
+            <a:r>
               <a:t>Key facilitation moment. Ask: "Does your operating model currently match your strategy — or is it a legacy structure that predates your current direction?"</a:t>
             </a:r>
           </a:p>
-          <a:p>
-            <a:endParaRPr lang="en-US" dirty="0"/>
-          </a:p>
-          <a:p>
-            <a:r>
-              <a:rPr lang="en-US" dirty="0"/>
+          <a:p/>
+          <a:p>
+            <a:r>
               <a:t>Stay here. This often opens the most honest conversation of the entire Awareness section.</a:t>
             </a:r>
           </a:p>
-          <a:p>
-            <a:endParaRPr lang="en-US" dirty="0"/>
-          </a:p>
-          <a:p>
-            <a:r>
-              <a:rPr lang="en-US" dirty="0"/>
-              <a:t>Further diagnostic questions, if the room needs them: "What capabilities are core and must be owned versus outsourced?" · </a:t>
-            </a:r>
-          </a:p>
-          <a:p>
-            <a:r>
-              <a:rPr lang="en-US" dirty="0"/>
+          <a:p/>
+          <a:p>
+            <a:r>
+              <a:t>Further diagnostic questions, if the room needs them: "What capabilities are core and must be owned versus outsourced?" ·</a:t>
+            </a:r>
+          </a:p>
+          <a:p>
+            <a:r>
               <a:t>"Where are the HOW gaps between strategic ambition and current capability?"</a:t>
             </a:r>
           </a:p>
-          <a:p>
-            <a:endParaRPr lang="en-US" dirty="0"/>
-          </a:p>
-          <a:p>
-            <a:r>
-              <a:rPr lang="en-US" dirty="0"/>
+          <a:p/>
+          <a:p>
+            <a:r>
               <a:t>Listen for: a HOW with no operating model, capability or mechanism named.</a:t>
             </a:r>
           </a:p>
-          <a:p>
-            <a:endParaRPr lang="en-US" dirty="0"/>
-          </a:p>
-          <a:p>
-            <a:r>
-              <a:rPr lang="en-US" dirty="0"/>
-              <a:t>Deepen, say: "A common strategic failure is choosing the right goal and accepting a compromised route to reach it: a deal that delivers the number and burns the relationship, a hire that fits the seat and damages the team. </a:t>
-            </a:r>
-          </a:p>
-          <a:p>
-            <a:endParaRPr lang="en-US" dirty="0"/>
-          </a:p>
-          <a:p>
-            <a:r>
-              <a:rPr lang="en-US" dirty="0"/>
+          <a:p/>
+          <a:p>
+            <a:r>
+              <a:rPr b="1"/>
+              <a:t>Deepen, say: </a:t>
+            </a:r>
+            <a:r>
+              <a:rPr/>
+              <a:t>"A common strategic failure is choosing the right goal and accepting a compromised route to reach it: a deal that delivers the number and burns the relationship, a hire that fits the seat and damages the team.</a:t>
+            </a:r>
+          </a:p>
+          <a:p/>
+          <a:p>
+            <a:r>
               <a:t>Before the next material commitment, write the destination and the route on two separate lines and ask whether you would still defend the route if the outcome failed."</a:t>
             </a:r>
           </a:p>
           <a:p>
             <a:r>
-              <a:rPr lang="en-US" dirty="0"/>
               <a:t>(Insight: Destination and route. Source: Journal, 24 April 2026 — Professional Insights: Strategy)</a:t>
             </a:r>
           </a:p>
-          <a:p>
-            <a:endParaRPr lang="en-US" dirty="0"/>
-          </a:p>
-          <a:p>
-            <a:r>
-              <a:rPr lang="en-US" b="1" dirty="0"/>
+          <a:p/>
+          <a:p>
+            <a:r>
+              <a:rPr b="1"/>
               <a:t>7. WHEN — Timing &amp; Sequencing.</a:t>
             </a:r>
           </a:p>
           <a:p>
             <a:r>
-              <a:rPr lang="en-US" b="1" dirty="0"/>
-              <a:t>Say: "</a:t>
-            </a:r>
-            <a:r>
-              <a:rPr lang="en-US" dirty="0"/>
-              <a:t>WHEN brings forward the timing, sequencing and strategic moves through which the ambition will be pursued. </a:t>
-            </a:r>
-          </a:p>
-          <a:p>
-            <a:r>
-              <a:rPr lang="en-US" dirty="0"/>
+              <a:rPr b="1"/>
+              <a:t>Say: </a:t>
+            </a:r>
+            <a:r>
+              <a:rPr/>
+              <a:t>"WHEN brings forward the timing, sequencing and strategic moves through which the ambition will be pursued.</a:t>
+            </a:r>
+          </a:p>
+          <a:p>
+            <a:r>
               <a:t>It governs timing, sequencing, pacing, prioritisation, horizon planning, entry and exit decisions."</a:t>
             </a:r>
           </a:p>
-          <a:p>
-            <a:endParaRPr lang="en-US" dirty="0"/>
-          </a:p>
-          <a:p>
-            <a:r>
-              <a:rPr lang="en-US" b="1" dirty="0"/>
+          <a:p/>
+          <a:p>
+            <a:r>
+              <a:rPr b="1"/>
               <a:t>Ask: </a:t>
             </a:r>
             <a:r>
-              <a:rPr lang="en-US" dirty="0"/>
+              <a:rPr/>
               <a:t>"Have you actually mapped the sequence of moves needed to achieve your strategy — or does the plan treat all initiatives as running in parallel?"</a:t>
             </a:r>
           </a:p>
-          <a:p>
-            <a:endParaRPr lang="en-US" dirty="0"/>
-          </a:p>
-          <a:p>
-            <a:r>
-              <a:rPr lang="en-US" dirty="0"/>
+          <a:p/>
+          <a:p>
+            <a:r>
               <a:t>Further diagnostic questions, if the room needs them: "Are we moving at the right pace?" · "What signals tell us when to accelerate or pause?"</a:t>
             </a:r>
           </a:p>
-          <a:p>
-            <a:endParaRPr lang="en-US" dirty="0"/>
-          </a:p>
-          <a:p>
-            <a:r>
-              <a:rPr lang="en-US" b="1" dirty="0"/>
+          <a:p/>
+          <a:p>
+            <a:r>
+              <a:rPr b="1"/>
               <a:t>Deepen, say: </a:t>
             </a:r>
             <a:r>
-              <a:rPr lang="en-US" dirty="0"/>
-              <a:t>"Many strategic failures are failures of timing. </a:t>
-            </a:r>
-          </a:p>
-          <a:p>
-            <a:r>
-              <a:rPr lang="en-US" dirty="0"/>
-              <a:t>The leader knew what to do and moved before the conditions favoured it. Identify one important move you are pushing early because you are anxious to resolve uncertainty. </a:t>
-            </a:r>
-          </a:p>
-          <a:p>
-            <a:r>
-              <a:rPr lang="en-US" dirty="0"/>
+              <a:rPr/>
+              <a:t>"Many strategic failures are failures of timing.</a:t>
+            </a:r>
+          </a:p>
+          <a:p>
+            <a:r>
+              <a:t>The leader knew what to do and moved before the conditions favoured it. Identify one important move you are pushing early because you are anxious to resolve uncertainty.</a:t>
+            </a:r>
+          </a:p>
+          <a:p>
+            <a:r>
               <a:t>The same move made at the right moment is a different move."</a:t>
             </a:r>
           </a:p>
           <a:p>
             <a:r>
-              <a:rPr lang="en-US" dirty="0"/>
               <a:t>(Insight: Timing failures. Source: Journal, 1 May 2026 — Professional Insights: Strategy)</a:t>
             </a:r>
           </a:p>
-          <a:p>
-            <a:endParaRPr lang="en-US" dirty="0"/>
-          </a:p>
-          <a:p>
-            <a:r>
-              <a:rPr lang="en-US" b="1" dirty="0"/>
+          <a:p/>
+          <a:p>
+            <a:r>
+              <a:rPr b="1"/>
               <a:t>8. Read the room.</a:t>
             </a:r>
           </a:p>
           <a:p>
             <a:r>
-              <a:rPr lang="en-US" dirty="0"/>
-              <a:t>Ask: "Which of the four dimensions is least clearly defined in your organisation today?"</a:t>
-            </a:r>
-          </a:p>
-          <a:p>
-            <a:r>
-              <a:rPr lang="en-US" dirty="0"/>
-              <a:t>Take a show of hands for each dimension and say what pattern the group shows. </a:t>
-            </a:r>
-          </a:p>
-          <a:p>
-            <a:r>
-              <a:rPr lang="en-US" dirty="0"/>
-              <a:t>Participants answer the same question in their 1.2 reflection.</a:t>
-            </a:r>
-          </a:p>
-          <a:p>
-            <a:endParaRPr lang="en-US" dirty="0"/>
-          </a:p>
-          <a:p>
-            <a:r>
-              <a:rPr lang="en-US" b="1" dirty="0"/>
+              <a:rPr b="1"/>
+              <a:t>Ask: </a:t>
+            </a:r>
+            <a:r>
+              <a:rPr/>
+              <a:t>"Which of the four dimensions is least clearly defined in your organisation today?"</a:t>
+            </a:r>
+          </a:p>
+          <a:p>
+            <a:r>
+              <a:t>Take a show of hands for each dimension and say what pattern the group shows.</a:t>
+            </a:r>
+          </a:p>
+          <a:p/>
+          <a:p>
+            <a:r>
+              <a:rPr b="1"/>
               <a:t>9. Show that the four hold together.</a:t>
             </a:r>
           </a:p>
           <a:p>
             <a:r>
-              <a:rPr lang="en-US" dirty="0"/>
-              <a:t>Say: "The four dimensions are interdependent. Answering only two or three creates a structurally incomplete strategy. </a:t>
-            </a:r>
-          </a:p>
-          <a:p>
-            <a:r>
-              <a:rPr lang="en-US" dirty="0"/>
-              <a:t>A well-formed strategic intent answers all four at once: What value are we creating? </a:t>
-            </a:r>
-          </a:p>
-          <a:p>
-            <a:r>
-              <a:rPr lang="en-US" dirty="0"/>
-              <a:t>Why will stakeholders choose us? </a:t>
-            </a:r>
-          </a:p>
-          <a:p>
-            <a:r>
-              <a:rPr lang="en-US" dirty="0"/>
-              <a:t>How will we deliver this value? </a:t>
-            </a:r>
-          </a:p>
-          <a:p>
-            <a:r>
-              <a:rPr lang="en-US" dirty="0"/>
+              <a:rPr b="1"/>
+              <a:t>Say: </a:t>
+            </a:r>
+            <a:r>
+              <a:rPr/>
+              <a:t>"The four dimensions are interdependent. Answering only two or three creates a structurally incomplete strategy.</a:t>
+            </a:r>
+          </a:p>
+          <a:p>
+            <a:r>
+              <a:t>A well-formed strategic intent answers all four at once: What value are we creating?</a:t>
+            </a:r>
+          </a:p>
+          <a:p>
+            <a:r>
+              <a:t>Why will stakeholders choose us?</a:t>
+            </a:r>
+          </a:p>
+          <a:p>
+            <a:r>
+              <a:t>How will we deliver this value?</a:t>
+            </a:r>
+          </a:p>
+          <a:p>
+            <a:r>
               <a:t>When will we act?"</a:t>
             </a:r>
           </a:p>
-          <a:p>
-            <a:endParaRPr lang="en-US" dirty="0"/>
-          </a:p>
-          <a:p>
-            <a:r>
-              <a:rPr lang="en-US" b="1" dirty="0"/>
+          <a:p/>
+          <a:p>
+            <a:r>
+              <a:rPr b="1"/>
               <a:t>10. Say what is at stake.</a:t>
             </a:r>
           </a:p>
           <a:p>
             <a:r>
-              <a:rPr lang="en-US" dirty="0"/>
-              <a:t>Say: "Without a clear strategic intent, every investment becomes a negotiation without a shared reference point. </a:t>
-            </a:r>
-          </a:p>
-          <a:p>
-            <a:r>
-              <a:rPr lang="en-US" dirty="0"/>
+              <a:rPr b="1"/>
+              <a:t>Say: </a:t>
+            </a:r>
+            <a:r>
+              <a:rPr/>
+              <a:t>"Without a clear strategic intent, every investment becomes a negotiation without a shared reference point.</a:t>
+            </a:r>
+          </a:p>
+          <a:p>
+            <a:r>
               <a:t>Every performance review becomes a contest between competing definitions of success."</a:t>
             </a:r>
           </a:p>
-          <a:p>
-            <a:endParaRPr lang="en-US" dirty="0"/>
-          </a:p>
-          <a:p>
-            <a:r>
-              <a:rPr lang="en-US" b="1" dirty="0"/>
+          <a:p/>
+          <a:p>
+            <a:r>
+              <a:rPr b="1"/>
               <a:t>11. Close and bridge to 1.3.</a:t>
             </a:r>
           </a:p>
           <a:p>
             <a:r>
-              <a:rPr lang="en-US" dirty="0"/>
-              <a:t>Say: "These four dimensions are then crystallised into one clear Strategy Intent Statement. </a:t>
-            </a:r>
-          </a:p>
-          <a:p>
-            <a:r>
-              <a:rPr lang="en-US" dirty="0"/>
-              <a:t>The strength of the statement comes from the architecture beneath it. </a:t>
-            </a:r>
-          </a:p>
-          <a:p>
-            <a:r>
-              <a:rPr lang="en-US" dirty="0"/>
-              <a:t>It should therefore be crisp, directional and easy to express, while the Strategy Architecture holds the depth and supporting logic. </a:t>
-            </a:r>
-          </a:p>
-          <a:p>
-            <a:r>
-              <a:rPr lang="en-US" dirty="0"/>
+              <a:rPr b="1"/>
+              <a:t>Say: </a:t>
+            </a:r>
+            <a:r>
+              <a:rPr/>
+              <a:t>"These four dimensions are then crystallised into one clear Strategy Intent Statement.</a:t>
+            </a:r>
+          </a:p>
+          <a:p>
+            <a:r>
+              <a:t>The strength of the statement comes from the architecture beneath it.</a:t>
+            </a:r>
+          </a:p>
+          <a:p>
+            <a:r>
+              <a:t>It should therefore be crisp, directional and easy to express, while the Strategy Architecture holds the depth and supporting logic.</a:t>
+            </a:r>
+          </a:p>
+          <a:p>
+            <a:r>
               <a:t>The resulting Strategy Intent becomes the organisation's directional anchor for strategic choices, alignment and execution."</a:t>
             </a:r>
           </a:p>
-          <a:p>
-            <a:endParaRPr lang="en-US" dirty="0"/>
-          </a:p>
-          <a:p>
-            <a:r>
-              <a:rPr lang="en-US" b="1" dirty="0"/>
+          <a:p/>
+          <a:p>
+            <a:r>
+              <a:rPr b="1"/>
               <a:t>Say: </a:t>
             </a:r>
             <a:r>
-              <a:rPr lang="en-US" dirty="0"/>
+              <a:rPr/>
               <a:t>"The Intent sets the ambition. Next we ask what we should see in practice when that ambition is realised."</a:t>
-            </a:r>
-          </a:p>
-          <a:p>
-            <a:endParaRPr lang="en-US" dirty="0"/>
-          </a:p>
-          <a:p>
-            <a:r>
-              <a:rPr lang="en-US" b="1" dirty="0"/>
-              <a:t>ON THE PORTAL, AFTER THE TEACHING:</a:t>
-            </a:r>
-          </a:p>
-          <a:p>
-            <a:r>
-              <a:rPr lang="en-US" dirty="0"/>
-              <a:t>Participants write the 1.2 reflection: "From your assigned executive leader perspective: which dimension (WHAT, WHY, HOW, WHEN) is least clearly defined in your organisation's current strategy? </a:t>
-            </a:r>
-          </a:p>
-          <a:p>
-            <a:r>
-              <a:rPr lang="en-US" dirty="0"/>
-              <a:t>What would clarifying it change?"</a:t>
             </a:r>
           </a:p>
         </p:txBody>
@@ -13460,85 +12316,6 @@
           </a:p>
         </p:txBody>
       </p:sp>
-      <p:pic>
-        <p:nvPicPr>
-          <p:cNvPr id="5" name="Reflection 1.2" descr="Reflection — Strategy Intent: From your assigned executive leader perspective: which dimension (WHAT, WHY, HOW, WHEN) is least clearly defined in your organisation's current strategy? What would clarifying it change?"/>
-          <p:cNvPicPr>
-            <a:picLocks noChangeAspect="1"/>
-          </p:cNvPicPr>
-          <p:nvPr/>
-        </p:nvPicPr>
-        <p:blipFill>
-          <a:blip r:embed="rId4"/>
-          <a:stretch>
-            <a:fillRect/>
-          </a:stretch>
-        </p:blipFill>
-        <p:spPr>
-          <a:xfrm>
-            <a:off x="1691640" y="3005748"/>
-            <a:ext cx="9921240" cy="1425466"/>
-          </a:xfrm>
-          <a:prstGeom prst="rect">
-            <a:avLst/>
-          </a:prstGeom>
-        </p:spPr>
-      </p:pic>
-      <p:sp>
-        <p:nvSpPr>
-          <p:cNvPr id="6" name="Part 1.2"/>
-          <p:cNvSpPr/>
-          <p:nvPr/>
-        </p:nvSpPr>
-        <p:spPr>
-          <a:xfrm>
-            <a:off x="548640" y="3284140"/>
-            <a:ext cx="868680" cy="868680"/>
-          </a:xfrm>
-          <a:prstGeom prst="ellipse">
-            <a:avLst/>
-          </a:prstGeom>
-          <a:solidFill>
-            <a:srgbClr val="C6A24C"/>
-          </a:solidFill>
-          <a:ln>
-            <a:solidFill>
-              <a:srgbClr val="C6A24C"/>
-            </a:solidFill>
-          </a:ln>
-          <a:effectLst/>
-        </p:spPr>
-        <p:style>
-          <a:lnRef idx="1">
-            <a:schemeClr val="accent1"/>
-          </a:lnRef>
-          <a:fillRef idx="3">
-            <a:schemeClr val="accent1"/>
-          </a:fillRef>
-          <a:effectRef idx="2">
-            <a:schemeClr val="accent1"/>
-          </a:effectRef>
-          <a:fontRef idx="minor">
-            <a:schemeClr val="lt1"/>
-          </a:fontRef>
-        </p:style>
-        <p:txBody>
-          <a:bodyPr wrap="none" lIns="0" tIns="0" rIns="0" bIns="0" rtlCol="0" anchor="ctr"/>
-          <a:lstStyle/>
-          <a:p>
-            <a:pPr algn="ctr"/>
-            <a:r>
-              <a:rPr sz="2400" b="1">
-                <a:solidFill>
-                  <a:srgbClr val="FFFFFF"/>
-                </a:solidFill>
-                <a:latin typeface="Calibri"/>
-              </a:rPr>
-              <a:t>1.2</a:t>
-            </a:r>
-          </a:p>
-        </p:txBody>
-      </p:sp>
     </p:spTree>
   </p:cSld>
   <p:clrMapOvr>
@@ -22077,7 +20854,7 @@
                 <a:ea typeface="Calibri" pitchFamily="34" charset="-122"/>
                 <a:cs typeface="Calibri" pitchFamily="34" charset="-120"/>
               </a:rPr>
-              <a:t>Build the Architecture · Derive the Intent · Define Success in Practice</a:t>
+              <a:t>One Worked Example: Architecture · Intent · Success in Practice</a:t>
             </a:r>
             <a:endParaRPr lang="en-US" sz="2600" dirty="0"/>
           </a:p>
@@ -22378,7 +21155,7 @@
                 <a:ea typeface="Cambria" pitchFamily="34" charset="-122"/>
                 <a:cs typeface="Cambria" pitchFamily="34" charset="-120"/>
               </a:rPr>
-              <a:t>4.1a · Step 1: how the group works</a:t>
+              <a:t>4.1a · The worked example: Kestrel Point Services</a:t>
             </a:r>
             <a:endParaRPr lang="en-US" sz="3600" dirty="0"/>
           </a:p>
@@ -22473,7 +21250,7 @@
                 <a:ea typeface="Cambria" pitchFamily="34" charset="-122"/>
                 <a:cs typeface="Cambria" pitchFamily="34" charset="-120"/>
               </a:rPr>
-              <a:t>Agree:  </a:t>
+              <a:t>Company:  </a:t>
             </a:r>
             <a:r>
               <a:rPr lang="en-US" sz="2600" dirty="0">
@@ -22484,7 +21261,7 @@
                 <a:ea typeface="Calibri" pitchFamily="34" charset="-122"/>
                 <a:cs typeface="Calibri" pitchFamily="34" charset="-120"/>
               </a:rPr>
-              <a:t>the group agrees each entry</a:t>
+              <a:t>facilities management and technical maintenance</a:t>
             </a:r>
             <a:endParaRPr lang="en-US" sz="2600" dirty="0"/>
           </a:p>
@@ -22579,7 +21356,7 @@
                 <a:ea typeface="Cambria" pitchFamily="34" charset="-122"/>
                 <a:cs typeface="Cambria" pitchFamily="34" charset="-120"/>
               </a:rPr>
-              <a:t>Scribe:  </a:t>
+              <a:t>Size:  </a:t>
             </a:r>
             <a:r>
               <a:rPr lang="en-US" sz="2600" dirty="0">
@@ -22590,7 +21367,7 @@
                 <a:ea typeface="Calibri" pitchFamily="34" charset="-122"/>
                 <a:cs typeface="Calibri" pitchFamily="34" charset="-120"/>
               </a:rPr>
-              <a:t>one member types the agreed wording</a:t>
+              <a:t>about 1,200 employees, eight regional service hubs</a:t>
             </a:r>
             <a:endParaRPr lang="en-US" sz="2600" dirty="0"/>
           </a:p>
@@ -22685,7 +21462,7 @@
                 <a:ea typeface="Cambria" pitchFamily="34" charset="-122"/>
                 <a:cs typeface="Cambria" pitchFamily="34" charset="-120"/>
               </a:rPr>
-              <a:t>Own page:  </a:t>
+              <a:t>Problem:  </a:t>
             </a:r>
             <a:r>
               <a:rPr lang="en-US" sz="2600" dirty="0">
@@ -22696,7 +21473,7 @@
                 <a:ea typeface="Calibri" pitchFamily="34" charset="-122"/>
                 <a:cs typeface="Calibri" pitchFamily="34" charset="-120"/>
               </a:rPr>
-              <a:t>every member types the agreed entries, in the session or after it</a:t>
+              <a:t>service varies, requests stall between functions</a:t>
             </a:r>
             <a:endParaRPr lang="en-US" sz="2600" dirty="0"/>
           </a:p>
@@ -22791,7 +21568,7 @@
                 <a:ea typeface="Cambria" pitchFamily="34" charset="-122"/>
                 <a:cs typeface="Cambria" pitchFamily="34" charset="-120"/>
               </a:rPr>
-              <a:t>Confirm:  </a:t>
+              <a:t>Period:  </a:t>
             </a:r>
             <a:r>
               <a:rPr lang="en-US" sz="2600" dirty="0">
@@ -22802,7 +21579,7 @@
                 <a:ea typeface="Calibri" pitchFamily="34" charset="-122"/>
                 <a:cs typeface="Calibri" pitchFamily="34" charset="-120"/>
               </a:rPr>
-              <a:t>each element, each statement, each output</a:t>
+              <a:t>the 2027–2029 strategy</a:t>
             </a:r>
             <a:endParaRPr lang="en-US" sz="2600" dirty="0"/>
           </a:p>
@@ -23075,7 +21852,7 @@
                 <a:ea typeface="Cambria" pitchFamily="34" charset="-122"/>
                 <a:cs typeface="Cambria" pitchFamily="34" charset="-120"/>
               </a:rPr>
-              <a:t>Generate  </a:t>
+              <a:t>Write  </a:t>
             </a:r>
             <a:r>
               <a:rPr lang="en-US" sz="2600" dirty="0">
@@ -23086,7 +21863,7 @@
                 <a:ea typeface="Calibri" pitchFamily="34" charset="-122"/>
                 <a:cs typeface="Calibri" pitchFamily="34" charset="-120"/>
               </a:rPr>
-              <a:t>what this is saying</a:t>
+              <a:t>what the element is saying, in one or two sentences</a:t>
             </a:r>
             <a:endParaRPr lang="en-US" sz="2600" dirty="0"/>
           </a:p>
@@ -23287,7 +22064,7 @@
                 <a:ea typeface="Cambria" pitchFamily="34" charset="-122"/>
                 <a:cs typeface="Cambria" pitchFamily="34" charset="-120"/>
               </a:rPr>
-              <a:t>Confirm or refine  </a:t>
+              <a:t>Revise  </a:t>
             </a:r>
             <a:r>
               <a:rPr lang="en-US" sz="2600" dirty="0">
@@ -23404,7 +22181,7 @@
                 <a:ea typeface="Calibri" pitchFamily="34" charset="-122"/>
                 <a:cs typeface="Calibri" pitchFamily="34" charset="-120"/>
               </a:rPr>
-              <a:t>the Strategy Architecture output opens</a:t>
+              <a:t>the elements come together under five headings</a:t>
             </a:r>
             <a:endParaRPr lang="en-US" sz="2600" dirty="0"/>
           </a:p>
@@ -25564,7 +24341,7 @@
                 <a:ea typeface="Cambria" pitchFamily="34" charset="-122"/>
                 <a:cs typeface="Cambria" pitchFamily="34" charset="-120"/>
               </a:rPr>
-              <a:t>4.1c · Six checks before finalising</a:t>
+              <a:t>4.1d · Six checks on the Architecture</a:t>
             </a:r>
             <a:endParaRPr lang="en-US" sz="3600" dirty="0"/>
           </a:p>
@@ -27625,7 +26402,7 @@
                 <a:ea typeface="Cambria" pitchFamily="34" charset="-122"/>
                 <a:cs typeface="Cambria" pitchFamily="34" charset="-120"/>
               </a:rPr>
-              <a:t>4.3 · Step 3: Build Success in Practice</a:t>
+              <a:t>4.3a · Step 3: Success in Practice</a:t>
             </a:r>
             <a:endParaRPr lang="en-US" sz="3600" dirty="0"/>
           </a:p>
@@ -28369,7 +27146,7 @@
                 <a:ea typeface="Cambria" pitchFamily="34" charset="-122"/>
                 <a:cs typeface="Cambria" pitchFamily="34" charset="-120"/>
               </a:rPr>
-              <a:t>4.3c · Three connected outputs</a:t>
+              <a:t>4.3b · Three connected outputs</a:t>
             </a:r>
             <a:endParaRPr lang="en-US" sz="3600" dirty="0"/>
           </a:p>
@@ -28946,7 +27723,7 @@
                 <a:ea typeface="Calibri" pitchFamily="34" charset="-122"/>
                 <a:cs typeface="Calibri" pitchFamily="34" charset="-120"/>
               </a:rPr>
-              <a:t>Display or print the three together: the Strategy Intent Design.</a:t>
+              <a:t>In Section 5 each group builds the three for its own company.</a:t>
             </a:r>
             <a:endParaRPr lang="en-US" sz="2400" dirty="0"/>
           </a:p>
@@ -29135,7 +27912,7 @@
                 <a:ea typeface="Calibri" pitchFamily="34" charset="-122"/>
                 <a:cs typeface="Calibri" pitchFamily="34" charset="-120"/>
               </a:rPr>
-              <a:t>From Success in Practice to Leadership Contribution</a:t>
+              <a:t>Build Your Company’s Strategy</a:t>
             </a:r>
             <a:endParaRPr lang="en-US" sz="2600" dirty="0"/>
           </a:p>
@@ -29436,7 +28213,7 @@
                 <a:ea typeface="Cambria" pitchFamily="34" charset="-122"/>
                 <a:cs typeface="Cambria" pitchFamily="34" charset="-120"/>
               </a:rPr>
-              <a:t>5.1 · Role Contribution to SiP</a:t>
+              <a:t>5.1 · Your Company’s Strategy</a:t>
             </a:r>
             <a:endParaRPr lang="en-US" sz="3600" dirty="0"/>
           </a:p>
@@ -29451,7 +28228,7 @@
         <p:spPr>
           <a:xfrm>
             <a:off x="548640" y="1508760"/>
-            <a:ext cx="11091672" cy="1737360"/>
+            <a:ext cx="11091672" cy="965200"/>
           </a:xfrm>
           <a:prstGeom prst="roundRect">
             <a:avLst>
@@ -29485,7 +28262,7 @@
         <p:spPr>
           <a:xfrm>
             <a:off x="822960" y="1508760"/>
-            <a:ext cx="10607040" cy="1737360"/>
+            <a:ext cx="10607040" cy="965200"/>
           </a:xfrm>
           <a:prstGeom prst="rect">
             <a:avLst/>
@@ -29509,742 +28286,36 @@
                 <a:ea typeface="Calibri" pitchFamily="34" charset="-122"/>
                 <a:cs typeface="Calibri" pitchFamily="34" charset="-120"/>
               </a:rPr>
-              <a:t>“From this role, what must be contributed so that the agreed Success in Practice becomes real?”</a:t>
+              <a:t>One scribe per assignment · every member agrees</a:t>
             </a:r>
             <a:endParaRPr lang="en-US" sz="2800" dirty="0"/>
           </a:p>
         </p:txBody>
       </p:sp>
-      <p:sp>
-        <p:nvSpPr>
-          <p:cNvPr id="5" name="Shape 3"/>
-          <p:cNvSpPr/>
-          <p:nvPr/>
-        </p:nvSpPr>
-        <p:spPr>
-          <a:xfrm>
-            <a:off x="548640" y="3657600"/>
-            <a:ext cx="2011680" cy="868680"/>
-          </a:xfrm>
-          <a:prstGeom prst="roundRect">
-            <a:avLst>
-              <a:gd name="adj" fmla="val 10526"/>
-            </a:avLst>
-          </a:prstGeom>
-          <a:solidFill>
-            <a:srgbClr val="EEF4EF"/>
-          </a:solidFill>
-          <a:ln w="12700">
-            <a:solidFill>
-              <a:srgbClr val="EEF4EF"/>
-            </a:solidFill>
-            <a:prstDash val="solid"/>
-          </a:ln>
-        </p:spPr>
-        <p:txBody>
-          <a:bodyPr/>
-          <a:lstStyle/>
-          <a:p>
-            <a:endParaRPr lang="en-ZA"/>
-          </a:p>
-        </p:txBody>
-      </p:sp>
-      <p:sp>
-        <p:nvSpPr>
-          <p:cNvPr id="6" name="Text 4"/>
-          <p:cNvSpPr txBox="1"/>
-          <p:nvPr/>
-        </p:nvSpPr>
-        <p:spPr>
-          <a:xfrm>
-            <a:off x="548640" y="3657600"/>
-            <a:ext cx="2011680" cy="868680"/>
-          </a:xfrm>
-          <a:prstGeom prst="rect">
-            <a:avLst/>
-          </a:prstGeom>
-          <a:noFill/>
-          <a:ln/>
-        </p:spPr>
-        <p:txBody>
-          <a:bodyPr wrap="square" lIns="0" tIns="0" rIns="0" bIns="0" rtlCol="0" anchor="ctr"/>
-          <a:lstStyle/>
-          <a:p>
-            <a:pPr marL="0" indent="0" algn="ctr">
-              <a:buNone/>
-            </a:pPr>
-            <a:r>
-              <a:rPr lang="en-US" sz="2800" b="1" dirty="0">
-                <a:solidFill>
-                  <a:srgbClr val="1A5C2C"/>
-                </a:solidFill>
-                <a:latin typeface="Calibri" pitchFamily="34" charset="0"/>
-                <a:ea typeface="Calibri" pitchFamily="34" charset="-122"/>
-                <a:cs typeface="Calibri" pitchFamily="34" charset="-120"/>
-              </a:rPr>
-              <a:t>CEO</a:t>
-            </a:r>
-            <a:endParaRPr lang="en-US" sz="2800" dirty="0"/>
-          </a:p>
-        </p:txBody>
-      </p:sp>
-      <p:sp>
-        <p:nvSpPr>
-          <p:cNvPr id="7" name="Shape 5"/>
-          <p:cNvSpPr/>
-          <p:nvPr/>
-        </p:nvSpPr>
-        <p:spPr>
-          <a:xfrm>
-            <a:off x="2802636" y="3657600"/>
-            <a:ext cx="2011680" cy="868680"/>
-          </a:xfrm>
-          <a:prstGeom prst="roundRect">
-            <a:avLst>
-              <a:gd name="adj" fmla="val 10526"/>
-            </a:avLst>
-          </a:prstGeom>
-          <a:solidFill>
-            <a:srgbClr val="EEF4EF"/>
-          </a:solidFill>
-          <a:ln w="12700">
-            <a:solidFill>
-              <a:srgbClr val="EEF4EF"/>
-            </a:solidFill>
-            <a:prstDash val="solid"/>
-          </a:ln>
-        </p:spPr>
-        <p:txBody>
-          <a:bodyPr/>
-          <a:lstStyle/>
-          <a:p>
-            <a:endParaRPr lang="en-ZA"/>
-          </a:p>
-        </p:txBody>
-      </p:sp>
-      <p:sp>
-        <p:nvSpPr>
-          <p:cNvPr id="8" name="Text 6"/>
-          <p:cNvSpPr txBox="1"/>
-          <p:nvPr/>
-        </p:nvSpPr>
-        <p:spPr>
-          <a:xfrm>
-            <a:off x="2802636" y="3657600"/>
-            <a:ext cx="2011680" cy="868680"/>
-          </a:xfrm>
-          <a:prstGeom prst="rect">
-            <a:avLst/>
-          </a:prstGeom>
-          <a:noFill/>
-          <a:ln/>
-        </p:spPr>
-        <p:txBody>
-          <a:bodyPr wrap="square" lIns="0" tIns="0" rIns="0" bIns="0" rtlCol="0" anchor="ctr"/>
-          <a:lstStyle/>
-          <a:p>
-            <a:pPr marL="0" indent="0" algn="ctr">
-              <a:buNone/>
-            </a:pPr>
-            <a:r>
-              <a:rPr lang="en-US" sz="2800" b="1" dirty="0">
-                <a:solidFill>
-                  <a:srgbClr val="1A5C2C"/>
-                </a:solidFill>
-                <a:latin typeface="Calibri" pitchFamily="34" charset="0"/>
-                <a:ea typeface="Calibri" pitchFamily="34" charset="-122"/>
-                <a:cs typeface="Calibri" pitchFamily="34" charset="-120"/>
-              </a:rPr>
-              <a:t>CFO</a:t>
-            </a:r>
-            <a:endParaRPr lang="en-US" sz="2800" dirty="0"/>
-          </a:p>
-        </p:txBody>
-      </p:sp>
-      <p:sp>
-        <p:nvSpPr>
-          <p:cNvPr id="9" name="Shape 7"/>
-          <p:cNvSpPr/>
-          <p:nvPr/>
-        </p:nvSpPr>
-        <p:spPr>
-          <a:xfrm>
-            <a:off x="5056632" y="3657600"/>
-            <a:ext cx="2011680" cy="868680"/>
-          </a:xfrm>
-          <a:prstGeom prst="roundRect">
-            <a:avLst>
-              <a:gd name="adj" fmla="val 10526"/>
-            </a:avLst>
-          </a:prstGeom>
-          <a:solidFill>
-            <a:srgbClr val="EEF4EF"/>
-          </a:solidFill>
-          <a:ln w="12700">
-            <a:solidFill>
-              <a:srgbClr val="EEF4EF"/>
-            </a:solidFill>
-            <a:prstDash val="solid"/>
-          </a:ln>
-        </p:spPr>
-        <p:txBody>
-          <a:bodyPr/>
-          <a:lstStyle/>
-          <a:p>
-            <a:endParaRPr lang="en-ZA"/>
-          </a:p>
-        </p:txBody>
-      </p:sp>
-      <p:sp>
-        <p:nvSpPr>
-          <p:cNvPr id="10" name="Text 8"/>
-          <p:cNvSpPr txBox="1"/>
-          <p:nvPr/>
-        </p:nvSpPr>
-        <p:spPr>
-          <a:xfrm>
-            <a:off x="5056632" y="3657600"/>
-            <a:ext cx="2011680" cy="868680"/>
-          </a:xfrm>
-          <a:prstGeom prst="rect">
-            <a:avLst/>
-          </a:prstGeom>
-          <a:noFill/>
-          <a:ln/>
-        </p:spPr>
-        <p:txBody>
-          <a:bodyPr wrap="square" lIns="0" tIns="0" rIns="0" bIns="0" rtlCol="0" anchor="ctr"/>
-          <a:lstStyle/>
-          <a:p>
-            <a:pPr marL="0" indent="0" algn="ctr">
-              <a:buNone/>
-            </a:pPr>
-            <a:r>
-              <a:rPr lang="en-US" sz="2800" b="1" dirty="0">
-                <a:solidFill>
-                  <a:srgbClr val="1A5C2C"/>
-                </a:solidFill>
-                <a:latin typeface="Calibri" pitchFamily="34" charset="0"/>
-                <a:ea typeface="Calibri" pitchFamily="34" charset="-122"/>
-                <a:cs typeface="Calibri" pitchFamily="34" charset="-120"/>
-              </a:rPr>
-              <a:t>COO</a:t>
-            </a:r>
-            <a:endParaRPr lang="en-US" sz="2800" dirty="0"/>
-          </a:p>
-        </p:txBody>
-      </p:sp>
-      <p:sp>
-        <p:nvSpPr>
-          <p:cNvPr id="11" name="Shape 9"/>
-          <p:cNvSpPr/>
-          <p:nvPr/>
-        </p:nvSpPr>
-        <p:spPr>
-          <a:xfrm>
-            <a:off x="7310628" y="3657600"/>
-            <a:ext cx="2011680" cy="868680"/>
-          </a:xfrm>
-          <a:prstGeom prst="roundRect">
-            <a:avLst>
-              <a:gd name="adj" fmla="val 10526"/>
-            </a:avLst>
-          </a:prstGeom>
-          <a:solidFill>
-            <a:srgbClr val="EEF4EF"/>
-          </a:solidFill>
-          <a:ln w="12700">
-            <a:solidFill>
-              <a:srgbClr val="EEF4EF"/>
-            </a:solidFill>
-            <a:prstDash val="solid"/>
-          </a:ln>
-        </p:spPr>
-        <p:txBody>
-          <a:bodyPr/>
-          <a:lstStyle/>
-          <a:p>
-            <a:endParaRPr lang="en-ZA"/>
-          </a:p>
-        </p:txBody>
-      </p:sp>
-      <p:sp>
-        <p:nvSpPr>
-          <p:cNvPr id="12" name="Text 10"/>
-          <p:cNvSpPr txBox="1"/>
-          <p:nvPr/>
-        </p:nvSpPr>
-        <p:spPr>
-          <a:xfrm>
-            <a:off x="7310628" y="3657600"/>
-            <a:ext cx="2011680" cy="868680"/>
-          </a:xfrm>
-          <a:prstGeom prst="rect">
-            <a:avLst/>
-          </a:prstGeom>
-          <a:noFill/>
-          <a:ln/>
-        </p:spPr>
-        <p:txBody>
-          <a:bodyPr wrap="square" lIns="0" tIns="0" rIns="0" bIns="0" rtlCol="0" anchor="ctr"/>
-          <a:lstStyle/>
-          <a:p>
-            <a:pPr marL="0" indent="0" algn="ctr">
-              <a:buNone/>
-            </a:pPr>
-            <a:r>
-              <a:rPr lang="en-US" sz="2800" b="1" dirty="0">
-                <a:solidFill>
-                  <a:srgbClr val="1A5C2C"/>
-                </a:solidFill>
-                <a:latin typeface="Calibri" pitchFamily="34" charset="0"/>
-                <a:ea typeface="Calibri" pitchFamily="34" charset="-122"/>
-                <a:cs typeface="Calibri" pitchFamily="34" charset="-120"/>
-              </a:rPr>
-              <a:t>CHRO</a:t>
-            </a:r>
-            <a:endParaRPr lang="en-US" sz="2800" dirty="0"/>
-          </a:p>
-        </p:txBody>
-      </p:sp>
-      <p:sp>
-        <p:nvSpPr>
-          <p:cNvPr id="13" name="Shape 11"/>
-          <p:cNvSpPr/>
-          <p:nvPr/>
-        </p:nvSpPr>
-        <p:spPr>
-          <a:xfrm>
-            <a:off x="9564624" y="3657600"/>
-            <a:ext cx="2011680" cy="868680"/>
-          </a:xfrm>
-          <a:prstGeom prst="roundRect">
-            <a:avLst>
-              <a:gd name="adj" fmla="val 10526"/>
-            </a:avLst>
-          </a:prstGeom>
-          <a:solidFill>
-            <a:srgbClr val="EEF4EF"/>
-          </a:solidFill>
-          <a:ln w="12700">
-            <a:solidFill>
-              <a:srgbClr val="EEF4EF"/>
-            </a:solidFill>
-            <a:prstDash val="solid"/>
-          </a:ln>
-        </p:spPr>
-        <p:txBody>
-          <a:bodyPr/>
-          <a:lstStyle/>
-          <a:p>
-            <a:endParaRPr lang="en-ZA"/>
-          </a:p>
-        </p:txBody>
-      </p:sp>
-      <p:sp>
-        <p:nvSpPr>
-          <p:cNvPr id="14" name="Text 12"/>
-          <p:cNvSpPr txBox="1"/>
-          <p:nvPr/>
-        </p:nvSpPr>
-        <p:spPr>
-          <a:xfrm>
-            <a:off x="9564624" y="3657600"/>
-            <a:ext cx="2011680" cy="868680"/>
-          </a:xfrm>
-          <a:prstGeom prst="rect">
-            <a:avLst/>
-          </a:prstGeom>
-          <a:noFill/>
-          <a:ln/>
-        </p:spPr>
-        <p:txBody>
-          <a:bodyPr wrap="square" lIns="0" tIns="0" rIns="0" bIns="0" rtlCol="0" anchor="ctr"/>
-          <a:lstStyle/>
-          <a:p>
-            <a:pPr marL="0" indent="0" algn="ctr">
-              <a:buNone/>
-            </a:pPr>
-            <a:r>
-              <a:rPr lang="en-US" sz="2800" b="1" dirty="0">
-                <a:solidFill>
-                  <a:srgbClr val="1A5C2C"/>
-                </a:solidFill>
-                <a:latin typeface="Calibri" pitchFamily="34" charset="0"/>
-                <a:ea typeface="Calibri" pitchFamily="34" charset="-122"/>
-                <a:cs typeface="Calibri" pitchFamily="34" charset="-120"/>
-              </a:rPr>
-              <a:t>CTO</a:t>
-            </a:r>
-            <a:endParaRPr lang="en-US" sz="2800" dirty="0"/>
-          </a:p>
-        </p:txBody>
-      </p:sp>
-      <p:sp>
-        <p:nvSpPr>
-          <p:cNvPr id="15" name="Shape 13"/>
-          <p:cNvSpPr/>
-          <p:nvPr/>
-        </p:nvSpPr>
-        <p:spPr>
-          <a:xfrm>
-            <a:off x="548640" y="4754880"/>
-            <a:ext cx="2011680" cy="868680"/>
-          </a:xfrm>
-          <a:prstGeom prst="roundRect">
-            <a:avLst>
-              <a:gd name="adj" fmla="val 10526"/>
-            </a:avLst>
-          </a:prstGeom>
-          <a:solidFill>
-            <a:srgbClr val="EEF4EF"/>
-          </a:solidFill>
-          <a:ln w="12700">
-            <a:solidFill>
-              <a:srgbClr val="EEF4EF"/>
-            </a:solidFill>
-            <a:prstDash val="solid"/>
-          </a:ln>
-        </p:spPr>
-        <p:txBody>
-          <a:bodyPr/>
-          <a:lstStyle/>
-          <a:p>
-            <a:endParaRPr lang="en-ZA"/>
-          </a:p>
-        </p:txBody>
-      </p:sp>
-      <p:sp>
-        <p:nvSpPr>
-          <p:cNvPr id="16" name="Text 14"/>
-          <p:cNvSpPr txBox="1"/>
-          <p:nvPr/>
-        </p:nvSpPr>
-        <p:spPr>
-          <a:xfrm>
-            <a:off x="548640" y="4754880"/>
-            <a:ext cx="2011680" cy="868680"/>
-          </a:xfrm>
-          <a:prstGeom prst="rect">
-            <a:avLst/>
-          </a:prstGeom>
-          <a:noFill/>
-          <a:ln/>
-        </p:spPr>
-        <p:txBody>
-          <a:bodyPr wrap="square" lIns="0" tIns="0" rIns="0" bIns="0" rtlCol="0" anchor="ctr"/>
-          <a:lstStyle/>
-          <a:p>
-            <a:pPr marL="0" indent="0" algn="ctr">
-              <a:buNone/>
-            </a:pPr>
-            <a:r>
-              <a:rPr lang="en-US" sz="2800" b="1" dirty="0">
-                <a:solidFill>
-                  <a:srgbClr val="1A5C2C"/>
-                </a:solidFill>
-                <a:latin typeface="Calibri" pitchFamily="34" charset="0"/>
-                <a:ea typeface="Calibri" pitchFamily="34" charset="-122"/>
-                <a:cs typeface="Calibri" pitchFamily="34" charset="-120"/>
-              </a:rPr>
-              <a:t>CMO</a:t>
-            </a:r>
-            <a:endParaRPr lang="en-US" sz="2800" dirty="0"/>
-          </a:p>
-        </p:txBody>
-      </p:sp>
-      <p:sp>
-        <p:nvSpPr>
-          <p:cNvPr id="17" name="Shape 15"/>
-          <p:cNvSpPr/>
-          <p:nvPr/>
-        </p:nvSpPr>
-        <p:spPr>
-          <a:xfrm>
-            <a:off x="2802636" y="4754880"/>
-            <a:ext cx="2011680" cy="868680"/>
-          </a:xfrm>
-          <a:prstGeom prst="roundRect">
-            <a:avLst>
-              <a:gd name="adj" fmla="val 10526"/>
-            </a:avLst>
-          </a:prstGeom>
-          <a:solidFill>
-            <a:srgbClr val="EEF4EF"/>
-          </a:solidFill>
-          <a:ln w="12700">
-            <a:solidFill>
-              <a:srgbClr val="EEF4EF"/>
-            </a:solidFill>
-            <a:prstDash val="solid"/>
-          </a:ln>
-        </p:spPr>
-        <p:txBody>
-          <a:bodyPr/>
-          <a:lstStyle/>
-          <a:p>
-            <a:endParaRPr lang="en-ZA"/>
-          </a:p>
-        </p:txBody>
-      </p:sp>
-      <p:sp>
-        <p:nvSpPr>
-          <p:cNvPr id="18" name="Text 16"/>
-          <p:cNvSpPr txBox="1"/>
-          <p:nvPr/>
-        </p:nvSpPr>
-        <p:spPr>
-          <a:xfrm>
-            <a:off x="2802636" y="4754880"/>
-            <a:ext cx="2011680" cy="868680"/>
-          </a:xfrm>
-          <a:prstGeom prst="rect">
-            <a:avLst/>
-          </a:prstGeom>
-          <a:noFill/>
-          <a:ln/>
-        </p:spPr>
-        <p:txBody>
-          <a:bodyPr wrap="square" lIns="0" tIns="0" rIns="0" bIns="0" rtlCol="0" anchor="ctr"/>
-          <a:lstStyle/>
-          <a:p>
-            <a:pPr marL="0" indent="0" algn="ctr">
-              <a:buNone/>
-            </a:pPr>
-            <a:r>
-              <a:rPr lang="en-US" sz="2800" b="1" dirty="0">
-                <a:solidFill>
-                  <a:srgbClr val="1A5C2C"/>
-                </a:solidFill>
-                <a:latin typeface="Calibri" pitchFamily="34" charset="0"/>
-                <a:ea typeface="Calibri" pitchFamily="34" charset="-122"/>
-                <a:cs typeface="Calibri" pitchFamily="34" charset="-120"/>
-              </a:rPr>
-              <a:t>CCO</a:t>
-            </a:r>
-            <a:endParaRPr lang="en-US" sz="2800" dirty="0"/>
-          </a:p>
-        </p:txBody>
-      </p:sp>
-      <p:sp>
-        <p:nvSpPr>
-          <p:cNvPr id="19" name="Shape 17"/>
-          <p:cNvSpPr/>
-          <p:nvPr/>
-        </p:nvSpPr>
-        <p:spPr>
-          <a:xfrm>
-            <a:off x="5056632" y="4754880"/>
-            <a:ext cx="2011680" cy="868680"/>
-          </a:xfrm>
-          <a:prstGeom prst="roundRect">
-            <a:avLst>
-              <a:gd name="adj" fmla="val 10526"/>
-            </a:avLst>
-          </a:prstGeom>
-          <a:solidFill>
-            <a:srgbClr val="EEF4EF"/>
-          </a:solidFill>
-          <a:ln w="12700">
-            <a:solidFill>
-              <a:srgbClr val="EEF4EF"/>
-            </a:solidFill>
-            <a:prstDash val="solid"/>
-          </a:ln>
-        </p:spPr>
-        <p:txBody>
-          <a:bodyPr/>
-          <a:lstStyle/>
-          <a:p>
-            <a:endParaRPr lang="en-ZA"/>
-          </a:p>
-        </p:txBody>
-      </p:sp>
-      <p:sp>
-        <p:nvSpPr>
-          <p:cNvPr id="20" name="Text 18"/>
-          <p:cNvSpPr txBox="1"/>
-          <p:nvPr/>
-        </p:nvSpPr>
-        <p:spPr>
-          <a:xfrm>
-            <a:off x="5056632" y="4754880"/>
-            <a:ext cx="2011680" cy="868680"/>
-          </a:xfrm>
-          <a:prstGeom prst="rect">
-            <a:avLst/>
-          </a:prstGeom>
-          <a:noFill/>
-          <a:ln/>
-        </p:spPr>
-        <p:txBody>
-          <a:bodyPr wrap="square" lIns="0" tIns="0" rIns="0" bIns="0" rtlCol="0" anchor="ctr"/>
-          <a:lstStyle/>
-          <a:p>
-            <a:pPr marL="0" indent="0" algn="ctr">
-              <a:buNone/>
-            </a:pPr>
-            <a:r>
-              <a:rPr lang="en-US" sz="2800" b="1" dirty="0">
-                <a:solidFill>
-                  <a:srgbClr val="1A5C2C"/>
-                </a:solidFill>
-                <a:latin typeface="Calibri" pitchFamily="34" charset="0"/>
-                <a:ea typeface="Calibri" pitchFamily="34" charset="-122"/>
-                <a:cs typeface="Calibri" pitchFamily="34" charset="-120"/>
-              </a:rPr>
-              <a:t>CPO</a:t>
-            </a:r>
-            <a:endParaRPr lang="en-US" sz="2800" dirty="0"/>
-          </a:p>
-        </p:txBody>
-      </p:sp>
-      <p:sp>
-        <p:nvSpPr>
-          <p:cNvPr id="21" name="Shape 19"/>
-          <p:cNvSpPr/>
-          <p:nvPr/>
-        </p:nvSpPr>
-        <p:spPr>
-          <a:xfrm>
-            <a:off x="7310628" y="4754880"/>
-            <a:ext cx="2011680" cy="868680"/>
-          </a:xfrm>
-          <a:prstGeom prst="roundRect">
-            <a:avLst>
-              <a:gd name="adj" fmla="val 10526"/>
-            </a:avLst>
-          </a:prstGeom>
-          <a:solidFill>
-            <a:srgbClr val="EEF4EF"/>
-          </a:solidFill>
-          <a:ln w="12700">
-            <a:solidFill>
-              <a:srgbClr val="EEF4EF"/>
-            </a:solidFill>
-            <a:prstDash val="solid"/>
-          </a:ln>
-        </p:spPr>
-        <p:txBody>
-          <a:bodyPr/>
-          <a:lstStyle/>
-          <a:p>
-            <a:endParaRPr lang="en-ZA"/>
-          </a:p>
-        </p:txBody>
-      </p:sp>
-      <p:sp>
-        <p:nvSpPr>
-          <p:cNvPr id="22" name="Text 20"/>
-          <p:cNvSpPr txBox="1"/>
-          <p:nvPr/>
-        </p:nvSpPr>
-        <p:spPr>
-          <a:xfrm>
-            <a:off x="7310628" y="4754880"/>
-            <a:ext cx="2011680" cy="868680"/>
-          </a:xfrm>
-          <a:prstGeom prst="rect">
-            <a:avLst/>
-          </a:prstGeom>
-          <a:noFill/>
-          <a:ln/>
-        </p:spPr>
-        <p:txBody>
-          <a:bodyPr wrap="square" lIns="0" tIns="0" rIns="0" bIns="0" rtlCol="0" anchor="ctr"/>
-          <a:lstStyle/>
-          <a:p>
-            <a:pPr marL="0" indent="0" algn="ctr">
-              <a:buNone/>
-            </a:pPr>
-            <a:r>
-              <a:rPr lang="en-US" sz="2800" b="1" dirty="0">
-                <a:solidFill>
-                  <a:srgbClr val="1A5C2C"/>
-                </a:solidFill>
-                <a:latin typeface="Calibri" pitchFamily="34" charset="0"/>
-                <a:ea typeface="Calibri" pitchFamily="34" charset="-122"/>
-                <a:cs typeface="Calibri" pitchFamily="34" charset="-120"/>
-              </a:rPr>
-              <a:t>CRO</a:t>
-            </a:r>
-            <a:endParaRPr lang="en-US" sz="2800" dirty="0"/>
-          </a:p>
-        </p:txBody>
-      </p:sp>
-      <p:sp>
-        <p:nvSpPr>
-          <p:cNvPr id="23" name="Shape 21"/>
-          <p:cNvSpPr/>
-          <p:nvPr/>
-        </p:nvSpPr>
-        <p:spPr>
-          <a:xfrm>
-            <a:off x="9564624" y="4754880"/>
-            <a:ext cx="2011680" cy="868680"/>
-          </a:xfrm>
-          <a:prstGeom prst="roundRect">
-            <a:avLst>
-              <a:gd name="adj" fmla="val 10526"/>
-            </a:avLst>
-          </a:prstGeom>
-          <a:solidFill>
-            <a:srgbClr val="EEF4EF"/>
-          </a:solidFill>
-          <a:ln w="12700">
-            <a:solidFill>
-              <a:srgbClr val="EEF4EF"/>
-            </a:solidFill>
-            <a:prstDash val="solid"/>
-          </a:ln>
-        </p:spPr>
-        <p:txBody>
-          <a:bodyPr/>
-          <a:lstStyle/>
-          <a:p>
-            <a:endParaRPr lang="en-ZA"/>
-          </a:p>
-        </p:txBody>
-      </p:sp>
-      <p:sp>
-        <p:nvSpPr>
-          <p:cNvPr id="24" name="Text 22"/>
-          <p:cNvSpPr txBox="1"/>
-          <p:nvPr/>
-        </p:nvSpPr>
-        <p:spPr>
-          <a:xfrm>
-            <a:off x="9564624" y="4754880"/>
-            <a:ext cx="2011680" cy="868680"/>
-          </a:xfrm>
-          <a:prstGeom prst="rect">
-            <a:avLst/>
-          </a:prstGeom>
-          <a:noFill/>
-          <a:ln/>
-        </p:spPr>
-        <p:txBody>
-          <a:bodyPr wrap="square" lIns="0" tIns="0" rIns="0" bIns="0" rtlCol="0" anchor="ctr"/>
-          <a:lstStyle/>
-          <a:p>
-            <a:pPr marL="0" indent="0" algn="ctr">
-              <a:buNone/>
-            </a:pPr>
-            <a:r>
-              <a:rPr lang="en-US" sz="2800" b="1" dirty="0">
-                <a:solidFill>
-                  <a:srgbClr val="1A5C2C"/>
-                </a:solidFill>
-                <a:latin typeface="Calibri" pitchFamily="34" charset="0"/>
-                <a:ea typeface="Calibri" pitchFamily="34" charset="-122"/>
-                <a:cs typeface="Calibri" pitchFamily="34" charset="-120"/>
-              </a:rPr>
-              <a:t>CSO</a:t>
-            </a:r>
-            <a:endParaRPr lang="en-US" sz="2800" dirty="0"/>
-          </a:p>
-        </p:txBody>
-      </p:sp>
+      <p:pic>
+        <p:nvPicPr>
+          <p:cNvPr id="5" name="Portal 5.1" descr="portal_5_1.png"/>
+          <p:cNvPicPr>
+            <a:picLocks noChangeAspect="1"/>
+          </p:cNvPicPr>
+          <p:nvPr/>
+        </p:nvPicPr>
+        <p:blipFill>
+          <a:blip r:embed="rId3"/>
+          <a:stretch>
+            <a:fillRect/>
+          </a:stretch>
+        </p:blipFill>
+        <p:spPr>
+          <a:xfrm>
+            <a:off x="546100" y="2692400"/>
+            <a:ext cx="10269482" cy="3810000"/>
+          </a:xfrm>
+          <a:prstGeom prst="rect">
+            <a:avLst/>
+          </a:prstGeom>
+        </p:spPr>
+      </p:pic>
     </p:spTree>
   </p:cSld>
   <p:clrMapOvr>
@@ -30317,33 +28388,9 @@
           </a:p>
         </p:txBody>
       </p:sp>
-      <p:pic>
-        <p:nvPicPr>
-          <p:cNvPr id="3" name="Reflection 5.2" descr="Reflection — Application: Having completed the full application exercise — what is the single most important shift your organisation must make to close the gap between your current strategic capability and the SiP you have collectively described?"/>
-          <p:cNvPicPr>
-            <a:picLocks noChangeAspect="1"/>
-          </p:cNvPicPr>
-          <p:nvPr/>
-        </p:nvPicPr>
-        <p:blipFill>
-          <a:blip r:embed="rId3"/>
-          <a:stretch>
-            <a:fillRect/>
-          </a:stretch>
-        </p:blipFill>
-        <p:spPr>
-          <a:xfrm>
-            <a:off x="1691640" y="1572768"/>
-            <a:ext cx="9921240" cy="1425466"/>
-          </a:xfrm>
-          <a:prstGeom prst="rect">
-            <a:avLst/>
-          </a:prstGeom>
-        </p:spPr>
-      </p:pic>
-      <p:sp>
-        <p:nvSpPr>
-          <p:cNvPr id="4" name="Part 5.2"/>
+      <p:sp>
+        <p:nvSpPr>
+          <p:cNvPr id="4" name="Part 5.1"/>
           <p:cNvSpPr/>
           <p:nvPr/>
         </p:nvSpPr>
@@ -30391,11 +28438,35 @@
                 </a:solidFill>
                 <a:latin typeface="Calibri"/>
               </a:rPr>
-              <a:t>5.2</a:t>
-            </a:r>
-          </a:p>
-        </p:txBody>
-      </p:sp>
+              <a:t>5.1</a:t>
+            </a:r>
+          </a:p>
+        </p:txBody>
+      </p:sp>
+      <p:pic>
+        <p:nvPicPr>
+          <p:cNvPr id="5" name="Reflection 5.1" descr="ref_5.1.png"/>
+          <p:cNvPicPr>
+            <a:picLocks noChangeAspect="1"/>
+          </p:cNvPicPr>
+          <p:nvPr/>
+        </p:nvPicPr>
+        <p:blipFill>
+          <a:blip r:embed="rId4"/>
+          <a:stretch>
+            <a:fillRect/>
+          </a:stretch>
+        </p:blipFill>
+        <p:spPr>
+          <a:xfrm>
+            <a:off x="1691640" y="1572768"/>
+            <a:ext cx="9921240" cy="1059962"/>
+          </a:xfrm>
+          <a:prstGeom prst="rect">
+            <a:avLst/>
+          </a:prstGeom>
+        </p:spPr>
+      </p:pic>
     </p:spTree>
   </p:cSld>
   <p:clrMapOvr>

--- a/Unit decks/Unit 02 - Strategy Visioning & Success in Practice (SiP).pptx
+++ b/Unit decks/Unit 02 - Strategy Visioning & Success in Practice (SiP).pptx
@@ -440,7 +440,7 @@
           </a:p>
           <a:p>
             <a:r>
-              <a:t>- When every member has agreed, the three outputs feed the team's Capstone Blueprint, boxes 2A to 2F.</a:t>
+              <a:t>- When every member has agreed, the three outputs feed the team's Capstone S2R Blueprint, boxes 2A to 2F.</a:t>
             </a:r>
           </a:p>
           <a:p/>
@@ -8162,7 +8162,7 @@
           </a:p>
           <a:p>
             <a:r>
-              <a:t>When every member has agreed, the three outputs go into your team's Capstone Blueprint. If the scribe changes an entry after that, the agreements clear and every member agrees again."</a:t>
+              <a:t>When every member has agreed, the three outputs go into your team's Capstone S2R Blueprint. If the scribe changes an entry after that, the agreements clear and every member agrees again."</a:t>
             </a:r>
           </a:p>
           <a:p/>
@@ -8191,7 +8191,7 @@
           </a:p>
           <a:p>
             <a:r>
-              <a:t>The group chooses its scribe in 5.1 of the participant file and builds the three steps. Each member reads the Group record and selects Agree. The three outputs feed boxes 2A to 2F of the team's Capstone Blueprint.</a:t>
+              <a:t>The group chooses its scribe in 5.1 of the participant file and builds the three steps. Each member reads the Group record and selects Agree. The three outputs feed boxes 2A to 2F of the team's Capstone S2R Blueprint.</a:t>
             </a:r>
           </a:p>
         </p:txBody>
@@ -8644,7 +8644,7 @@
           </a:p>
           <a:p>
             <a:r>
-              <a:t>Each group built the same three outputs for its own simulated company. Every member agreed the group record, and the three outputs went into the team's Capstone Blueprint.</a:t>
+              <a:t>Each group built the same three outputs for its own simulated company. Every member agreed the group record, and the three outputs went into the team's Capstone S2R Blueprint.</a:t>
             </a:r>
           </a:p>
           <a:p>

--- a/Unit decks/Unit 02 - Strategy Visioning & Success in Practice (SiP).pptx
+++ b/Unit decks/Unit 02 - Strategy Visioning & Success in Practice (SiP).pptx
@@ -2001,7 +2001,7 @@
             </a:r>
             <a:r>
               <a:rPr lang="en-US" dirty="0"/>
-              <a:t>"Section 5 puts this function to work: each of you defines what one executive role must contribute so that the agreed Success in Practice becomes real."</a:t>
+              <a:t>"Section 5 puts this function to work: your group builds one Strategy Intent and one Success in Practice that every function in your company can read its contribution against."</a:t>
             </a:r>
           </a:p>
           <a:p>
@@ -2463,7 +2463,7 @@
           <a:p>
             <a:r>
               <a:rPr lang="en-US" dirty="0"/>
-              <a:t>Tell participants: both disciplines return in 4.3, where each group tests its own Success in Practice.</a:t>
+              <a:t>Tell participants: both disciplines return in 4.3, where the worked example applies them, and in Section 5, where each group tests its own Success in Practice.</a:t>
             </a:r>
           </a:p>
           <a:p>
@@ -3186,13 +3186,13 @@
           <a:p>
             <a:r>
               <a:rPr lang="en-US" b="1" dirty="0"/>
-              <a:t>7. Link the domain to Section 4.</a:t>
-            </a:r>
-          </a:p>
-          <a:p>
-            <a:r>
-              <a:rPr lang="en-US" dirty="0"/>
-              <a:t>Say: "In Section 4 your group writes one Customer Experience &amp; Value statement. </a:t>
+              <a:t>7. Link the domain to Section 5.</a:t>
+            </a:r>
+          </a:p>
+          <a:p>
+            <a:r>
+              <a:rPr lang="en-US" dirty="0"/>
+              <a:t>Say: "In Section 5 your group writes one Customer Experience &amp; Value statement. </a:t>
             </a:r>
           </a:p>
           <a:p>
@@ -3321,10 +3321,10 @@
               <a:rPr lang="en-US" dirty="0"/>
               <a:t>
 Read the four outcomes aloud and say where the unit delivers each one.
-- Outcome 1 is built in Section 1 (the definition and its architecture) and produced in 4.1 and 4.2 (the Strategy Architecture and the Strategy Intent Statement).
-- Outcome 2 is built in 1.3 and Section 3 (the four SiP domains and their observable indicators) and produced in 4.3 (the four SiP statements).
-- Outcome 3 is tested in 4.1, where each group checks that its choices reinforce one another and reflect the realities of its capability and environment, and in 3.2, where the SiP Flammables test the balance of the picture of success.
-- Outcome 4 is built in Section 2 (the three functions the Strategy Intent and SiP serve) and applied in Section 5 (the contribution of each executive role).
+- Outcome 1 is built in Section 1 (the definition and its architecture) and shown in the 4.1 and 4.2 worked example and produced by each group in Section 5 (the Strategy Architecture and the Strategy Intent Statement).
+- Outcome 2 is built in 1.3 and Section 3 (the four SiP domains and their observable indicators) and shown in 4.3 and produced by each group in Section 5 (the four SiP statements).
+- Outcome 3 is tested through the six checks on the Architecture (4.1d), which each group applies to its own choices in Section 5, and in 3.2, where the SiP Flammables test the balance of the picture of success.
+- Outcome 4 is built in Section 2 (the three functions the Strategy Intent and SiP serve) and applied in Section 5, where the group builds one strategy for its company and every member agrees it.
 Each section slide carries that section’s two learning outcomes.
 </a:t>
             </a:r>
@@ -3810,13 +3810,13 @@
           <a:p>
             <a:r>
               <a:rPr lang="en-US" b="1" dirty="0"/>
-              <a:t>7. Link the domain to Section 4.</a:t>
-            </a:r>
-          </a:p>
-          <a:p>
-            <a:r>
-              <a:rPr lang="en-US" dirty="0"/>
-              <a:t>Say: "In Section 4 your group writes one Operational Capability &amp; Execution Rhythm statement. </a:t>
+              <a:t>7. Link the domain to Section 5.</a:t>
+            </a:r>
+          </a:p>
+          <a:p>
+            <a:r>
+              <a:rPr lang="en-US" dirty="0"/>
+              <a:t>Say: "In Section 5 your group writes one Operational Capability &amp; Execution Rhythm statement. </a:t>
             </a:r>
           </a:p>
           <a:p>
@@ -4344,7 +4344,7 @@
           <a:p>
             <a:r>
               <a:rPr lang="en-US" b="1" dirty="0"/>
-              <a:t>7. Link the domain to Section 4.</a:t>
+              <a:t>7. Link the domain to Section 5.</a:t>
             </a:r>
           </a:p>
           <a:p>
@@ -4354,7 +4354,7 @@
             </a:r>
             <a:r>
               <a:rPr lang="en-US" dirty="0"/>
-              <a:t>"In Section 4 your group writes one People &amp; Culture Dynamics statement. </a:t>
+              <a:t>"In Section 5 your group writes one People &amp; Culture Dynamics statement. </a:t>
             </a:r>
           </a:p>
           <a:p>
@@ -4862,7 +4862,7 @@
           <a:p>
             <a:r>
               <a:rPr lang="en-US" b="1" dirty="0"/>
-              <a:t>7. Link the domain to Section 4.</a:t>
+              <a:t>7. Link the domain to Section 5.</a:t>
             </a:r>
           </a:p>
           <a:p>
@@ -4872,7 +4872,7 @@
             </a:r>
             <a:r>
               <a:rPr lang="en-US" dirty="0"/>
-              <a:t>"In Section 4 your group writes one Enterprise Value Creation statement</a:t>
+              <a:t>"In Section 5 your group writes one Enterprise Value Creation statement</a:t>
             </a:r>
           </a:p>
           <a:p>
@@ -5515,7 +5515,7 @@
           <a:p>
             <a:r>
               <a:rPr lang="en-US" dirty="0"/>
-              <a:t>Say: "Every pattern grows from a legitimate perspective. We are here to see dominance early, while the SiP is still being written. </a:t>
+              <a:t>Say: "Every pattern grows from a legitimate perspective. We are here to see dominance early, while the SiP is still being written." </a:t>
             </a:r>
           </a:p>
         </p:txBody>
@@ -5727,7 +5727,7 @@
           <a:p>
             <a:r>
               <a:rPr lang="en-US" dirty="0"/>
-              <a:t>Note which domain is named most often. Tell the groups: test that domain hardest when you write your SiP in Section 4.</a:t>
+              <a:t>Note which domain is named most often. Tell the groups: test that domain hardest when you write your SiP in Section 5.</a:t>
             </a:r>
           </a:p>
           <a:p>
@@ -5748,7 +5748,7 @@
           <a:p>
             <a:r>
               <a:rPr lang="en-US" dirty="0"/>
-              <a:t>In Section 4 each group builds its own outputs and applies both tests to its Success in Practice."</a:t>
+              <a:t>Section 4 shows one company apply both tests to its Success in Practice. In Section 5 each group applies them to its own.""</a:t>
             </a:r>
           </a:p>
           <a:p>
@@ -7125,7 +7125,7 @@
               <a:rPr lang="en-US" dirty="0"/>
               <a:t>
 1. Walk the five sections in one sentence each, using the list below.
-2. Say plainly that Sections 1 to 3 prepare the thinking and Section 4 is where each group produces its three outputs. </a:t>
+2. Say plainly that Sections 1 to 3 prepare the thinking, Section 4 shows the three outputs completed once for one company, and Section 5 is where each group produces its own three outputs. </a:t>
             </a:r>
           </a:p>
           <a:p>
@@ -7168,14 +7168,14 @@
             <a:r>
               <a:rPr lang="en-US" dirty="0"/>
               <a:t>
-- Section 4 · Integration — Collective: each group builds its Strategy Architecture, derives its Strategy Intent Statement and builds its Success in Practice.</a:t>
+- Section 4 · Integration — Collective: one worked example, Kestrel Point Services, taken through the Strategy Architecture, the Strategy Intent Statement and Success in Practice.</a:t>
             </a:r>
           </a:p>
           <a:p>
             <a:r>
               <a:rPr lang="en-US" dirty="0"/>
               <a:t>
-- Section 5 · Application — In Practice: each participant applies the agreed Success in Practice to an executive role; the groups then share.
+- Section 5 · Application — In Practice: each group builds the Strategy Architecture, the Strategy Intent Statement and the Success in Practice of its simulated company, and every member agrees the group record. This is Capstone work.
 </a:t>
             </a:r>
           </a:p>
@@ -8130,7 +8130,7 @@
             </a:r>
             <a:r>
               <a:rPr/>
-              <a:t>"Step 1: answer the questions of each element and write what the element is saying. When all 14 are written, the scribe brings them together under the five headings, and your group edits the text until it says what you intend.</a:t>
+              <a:t>"Step 1: answer the questions of each element and write what the element is saying. When all 14 are written, the scribe selects Bring the 14 elements together, they appear under the five headings, and your group edits the text until it says what you intend.</a:t>
             </a:r>
           </a:p>
           <a:p>
@@ -8192,6 +8192,45 @@
           <a:p>
             <a:r>
               <a:t>The group chooses its scribe in 5.1 of the participant file and builds the three steps. Each member reads the Group record and selects Agree. The three outputs feed boxes 2A to 2F of the team's Capstone S2R Blueprint.</a:t>
+            </a:r>
+          </a:p>
+          <a:p>
+            <a:endParaRPr lang="en-GB" dirty="0"/>
+          </a:p>
+          <a:p>
+            <a:r>
+              <a:rPr lang="en-GB" dirty="0" b="1"/>
+              <a:t>LATER, WHEN THE GROUPS DO THE WORK ON THE PORTAL:</a:t>
+            </a:r>
+          </a:p>
+          <a:p>
+            <a:r>
+              <a:rPr lang="en-GB" dirty="0"/>
+              <a:t>Your role is to guide how the work is completed. This is Capstone work and is assessed independently at the capstone.</a:t>
+            </a:r>
+          </a:p>
+          <a:p>
+            <a:r>
+              <a:rPr lang="en-GB" dirty="0"/>
+              <a:t>Step 1 · Strategy Architecture. Remind the group that the elements are interconnected, and that each element is answered with actual strategic choices. When all 14 are written, the six checks beside the Architecture box guide the group's reading: "What is this architecture collectively saying about our company's strategy?"</a:t>
+            </a:r>
+          </a:p>
+          <a:p>
+            <a:r>
+              <a:rPr lang="en-GB" dirty="0"/>
+              <a:t>Step 2 · Strategy Intent Statement. The group condenses the Architecture into one clear statement. Say: "The Architecture contains the depth. The Intent must provide the clarity." Where the statement exposes a contradiction, the group resolves it in the Architecture before finalising the Intent.</a:t>
+            </a:r>
+          </a:p>
+          <a:p>
+            <a:r>
+              <a:rPr lang="en-GB" dirty="0"/>
+              <a:t>Step 3 · Success in Practice. The group describes observable reality: what people see and experience when the strategy works. Ask: "What is happening when the strategy is working?" The observable indicators from Section 3 deepen the discussion, and the SiP Flammables are the final balance check, so that each domain has its place in the picture of success.</a:t>
+            </a:r>
+          </a:p>
+          <a:p>
+            <a:r>
+              <a:rPr lang="en-GB" dirty="0"/>
+              <a:t>Group record. Each member reads the full record and selects Agree on their own page. When every member has agreed, the group can print the three outputs as one report: Strategy Architecture → Strategy Intent → Success in Practice.</a:t>
             </a:r>
           </a:p>
         </p:txBody>
@@ -8727,7 +8766,7 @@
           <a:p/>
           <a:p>
             <a:r>
-              <a:t>Unit 3 maps that Success in Practice and defines the Objective Key Results that will measure our progress toward it."</a:t>
+              <a:t>Unit 3 maps that Success in Practice and defines the Objectives and Key Results that will measure our progress towards it."</a:t>
             </a:r>
           </a:p>
           <a:p/>
@@ -9402,7 +9441,7 @@
           <a:p>
             <a:r>
               <a:rPr lang="en-US" b="1" dirty="0"/>
-              <a:t>9. Bridge to the next slide.</a:t>
+              <a:t>6. Bridge to the next slide.</a:t>
             </a:r>
           </a:p>
           <a:p>
@@ -9754,7 +9793,7 @@
           <a:p>
             <a:r>
               <a:rPr lang="en-ZA" dirty="0"/>
-              <a:t>The signals that photography was moving toward digital were therefore not entirely external to the company.</a:t>
+              <a:t>The signals that photography was moving towards digital were therefore not entirely external to the company.</a:t>
             </a:r>
           </a:p>
           <a:p>
@@ -10601,7 +10640,7 @@
           <a:p>
             <a:r>
               <a:rPr lang="en-US" dirty="0"/>
-              <a:t>Take three or four answers and note them. They show where each group will need to work hardest in Section 4.</a:t>
+              <a:t>Take three or four answers and note them. They show where each group will need to work hardest in Section 5.</a:t>
             </a:r>
           </a:p>
           <a:p>
@@ -10622,7 +10661,7 @@
           <a:p>
             <a:r>
               <a:rPr lang="en-US" dirty="0"/>
-              <a:t>In Section 4 each group works this definition as 14 elements. </a:t>
+              <a:t>In Section 4 you see this definition worked as 14 elements for one company, and in Section 5 your group works it for its own company." </a:t>
             </a:r>
           </a:p>
           <a:p>
@@ -11387,7 +11426,7 @@
           <a:p>
             <a:r>
               <a:rPr lang="en-US" dirty="0"/>
-              <a:t>Ask participants to describe the observable organisational reality. Each group writes its own Strategy Intent Statement in Section 4.</a:t>
+              <a:t>Ask participants to describe the observable organisational reality. Each group writes its own Strategy Intent Statement in Section 5.</a:t>
             </a:r>
           </a:p>
           <a:p>
@@ -11507,11 +11546,11 @@
           <a:p>
             <a:r>
               <a:rPr lang="en-US" b="1" dirty="0"/>
-              <a:t>Say</a:t>
-            </a:r>
-            <a:r>
-              <a:rPr lang="en-US" dirty="0"/>
-              <a:t> Before you build, know exactly what you are building toward and why each element matters."</a:t>
+              <a:t>Say: </a:t>
+            </a:r>
+            <a:r>
+              <a:rPr lang="en-US" dirty="0"/>
+              <a:t>"Before you build, know exactly what you are building towards and why each element matters."</a:t>
             </a:r>
           </a:p>
           <a:p>

--- a/Unit decks/Unit 02 - Strategy Visioning & Success in Practice (SiP).pptx
+++ b/Unit decks/Unit 02 - Strategy Visioning & Success in Practice (SiP).pptx
@@ -440,7 +440,7 @@
           </a:p>
           <a:p>
             <a:r>
-              <a:t>- When every member has agreed, the three outputs feed the team's Capstone S2R Blueprint, boxes 2A to 2F.</a:t>
+              <a:t>- When every member has agreed, the three outputs feed the team's Capstone S2R Blueprint, parts 2A and 2B.</a:t>
             </a:r>
           </a:p>
           <a:p/>
@@ -7582,6 +7582,11 @@
               <a:t>D4 · Enterprise Value Creation. Say: "Scalable, efficient service models strengthen enterprise performance: margins hold steady, growth comes from retained and expanded key accounts, and leadership attention goes to high-value work."</a:t>
             </a:r>
           </a:p>
+          <a:p>
+            <a:r>
+              <a:t>Then read Kestrel Point's Success in Practice statement, which draws the four together. Say: "Kestrel Point is the partner clients rely on first: every client is served fast and consistently, decisions move within a day, people own enterprise priorities together, and growth comes from retained and expanded key accounts at steady margins."</a:t>
+            </a:r>
+          </a:p>
           <a:p/>
           <a:p>
             <a:r>
@@ -8140,7 +8145,7 @@
           </a:p>
           <a:p>
             <a:r>
-              <a:t>Step 3: answer the three questions of each SiP domain and write one statement for each."</a:t>
+              <a:t>Step 3: answer the three questions of each SiP domain and write one statement for each, then one Success in Practice statement that draws the four together."</a:t>
             </a:r>
           </a:p>
           <a:p/>
@@ -8153,6 +8158,12 @@
           <a:p>
             <a:r>
               <a:rPr b="1"/>
+              <a:t>Close the group work with Our Position. Say: "When your record is complete, write as a group a short summary statement of your team's position from this unit, in the unit's own terms. Every member agrees it with the rest of the record. It closes this unit's section of your Capstone S2R Blueprint and guides the assessors through your work."</a:t>
+            </a:r>
+          </a:p>
+          <a:p>
+            <a:r>
+              <a:rPr b="1"/>
               <a:t>Say: </a:t>
             </a:r>
             <a:r>
@@ -8191,7 +8202,7 @@
           </a:p>
           <a:p>
             <a:r>
-              <a:t>The group chooses its scribe in 5.1 of the participant file and builds the three steps. Each member reads the Group record and selects Agree. The three outputs feed boxes 2A to 2F of the team's Capstone S2R Blueprint.</a:t>
+              <a:t>The group chooses its scribe in 5.1 of the participant file and builds the three steps. Each member reads the Group record and selects Agree. The three outputs feed parts 2A and 2B of the team's Capstone S2R Blueprint.</a:t>
             </a:r>
           </a:p>
           <a:p>
